--- a/all/Intro to Programming_all.pptx
+++ b/all/Intro to Programming_all.pptx
@@ -5,7 +5,7 @@
     <p:sldMasterId id="2147483648" r:id="rId1"/>
   </p:sldMasterIdLst>
   <p:notesMasterIdLst>
-    <p:notesMasterId r:id="rId58"/>
+    <p:notesMasterId r:id="rId68"/>
   </p:notesMasterIdLst>
   <p:sldIdLst>
     <p:sldId id="256" r:id="rId2"/>
@@ -63,7 +63,17 @@
     <p:sldId id="312" r:id="rId54"/>
     <p:sldId id="313" r:id="rId55"/>
     <p:sldId id="314" r:id="rId56"/>
-    <p:sldId id="281" r:id="rId57"/>
+    <p:sldId id="315" r:id="rId57"/>
+    <p:sldId id="316" r:id="rId58"/>
+    <p:sldId id="318" r:id="rId59"/>
+    <p:sldId id="321" r:id="rId60"/>
+    <p:sldId id="322" r:id="rId61"/>
+    <p:sldId id="317" r:id="rId62"/>
+    <p:sldId id="319" r:id="rId63"/>
+    <p:sldId id="320" r:id="rId64"/>
+    <p:sldId id="323" r:id="rId65"/>
+    <p:sldId id="324" r:id="rId66"/>
+    <p:sldId id="281" r:id="rId67"/>
   </p:sldIdLst>
   <p:sldSz cx="12192000" cy="6858000"/>
   <p:notesSz cx="7315200" cy="9601200"/>
@@ -222,6 +232,16 @@
             <p14:sldId id="312"/>
             <p14:sldId id="313"/>
             <p14:sldId id="314"/>
+            <p14:sldId id="315"/>
+            <p14:sldId id="316"/>
+            <p14:sldId id="318"/>
+            <p14:sldId id="321"/>
+            <p14:sldId id="322"/>
+            <p14:sldId id="317"/>
+            <p14:sldId id="319"/>
+            <p14:sldId id="320"/>
+            <p14:sldId id="323"/>
+            <p14:sldId id="324"/>
             <p14:sldId id="281"/>
           </p14:sldIdLst>
         </p14:section>
@@ -316,7 +336,7 @@
           <a:p>
             <a:fld id="{03FEC988-D264-4851-9784-E262DEC12FF7}" type="datetimeFigureOut">
               <a:rPr lang="en-US" smtClean="0"/>
-              <a:t>10/30/2025</a:t>
+              <a:t>11/6/2025</a:t>
             </a:fld>
             <a:endParaRPr lang="en-US"/>
           </a:p>
@@ -730,7 +750,7 @@
           <a:p>
             <a:fld id="{FC9FB2DD-DF35-4B84-9135-C0E6A5E9FBB3}" type="datetimeFigureOut">
               <a:rPr lang="en-US" smtClean="0"/>
-              <a:t>10/30/2025</a:t>
+              <a:t>11/6/2025</a:t>
             </a:fld>
             <a:endParaRPr lang="en-US"/>
           </a:p>
@@ -928,7 +948,7 @@
           <a:p>
             <a:fld id="{FC9FB2DD-DF35-4B84-9135-C0E6A5E9FBB3}" type="datetimeFigureOut">
               <a:rPr lang="en-US" smtClean="0"/>
-              <a:t>10/30/2025</a:t>
+              <a:t>11/6/2025</a:t>
             </a:fld>
             <a:endParaRPr lang="en-US"/>
           </a:p>
@@ -1136,7 +1156,7 @@
           <a:p>
             <a:fld id="{FC9FB2DD-DF35-4B84-9135-C0E6A5E9FBB3}" type="datetimeFigureOut">
               <a:rPr lang="en-US" smtClean="0"/>
-              <a:t>10/30/2025</a:t>
+              <a:t>11/6/2025</a:t>
             </a:fld>
             <a:endParaRPr lang="en-US"/>
           </a:p>
@@ -1334,7 +1354,7 @@
           <a:p>
             <a:fld id="{FC9FB2DD-DF35-4B84-9135-C0E6A5E9FBB3}" type="datetimeFigureOut">
               <a:rPr lang="en-US" smtClean="0"/>
-              <a:t>10/30/2025</a:t>
+              <a:t>11/6/2025</a:t>
             </a:fld>
             <a:endParaRPr lang="en-US"/>
           </a:p>
@@ -1609,7 +1629,7 @@
           <a:p>
             <a:fld id="{FC9FB2DD-DF35-4B84-9135-C0E6A5E9FBB3}" type="datetimeFigureOut">
               <a:rPr lang="en-US" smtClean="0"/>
-              <a:t>10/30/2025</a:t>
+              <a:t>11/6/2025</a:t>
             </a:fld>
             <a:endParaRPr lang="en-US"/>
           </a:p>
@@ -1874,7 +1894,7 @@
           <a:p>
             <a:fld id="{FC9FB2DD-DF35-4B84-9135-C0E6A5E9FBB3}" type="datetimeFigureOut">
               <a:rPr lang="en-US" smtClean="0"/>
-              <a:t>10/30/2025</a:t>
+              <a:t>11/6/2025</a:t>
             </a:fld>
             <a:endParaRPr lang="en-US"/>
           </a:p>
@@ -2286,7 +2306,7 @@
           <a:p>
             <a:fld id="{FC9FB2DD-DF35-4B84-9135-C0E6A5E9FBB3}" type="datetimeFigureOut">
               <a:rPr lang="en-US" smtClean="0"/>
-              <a:t>10/30/2025</a:t>
+              <a:t>11/6/2025</a:t>
             </a:fld>
             <a:endParaRPr lang="en-US"/>
           </a:p>
@@ -2427,7 +2447,7 @@
           <a:p>
             <a:fld id="{FC9FB2DD-DF35-4B84-9135-C0E6A5E9FBB3}" type="datetimeFigureOut">
               <a:rPr lang="en-US" smtClean="0"/>
-              <a:t>10/30/2025</a:t>
+              <a:t>11/6/2025</a:t>
             </a:fld>
             <a:endParaRPr lang="en-US"/>
           </a:p>
@@ -2540,7 +2560,7 @@
           <a:p>
             <a:fld id="{FC9FB2DD-DF35-4B84-9135-C0E6A5E9FBB3}" type="datetimeFigureOut">
               <a:rPr lang="en-US" smtClean="0"/>
-              <a:t>10/30/2025</a:t>
+              <a:t>11/6/2025</a:t>
             </a:fld>
             <a:endParaRPr lang="en-US"/>
           </a:p>
@@ -2851,7 +2871,7 @@
           <a:p>
             <a:fld id="{FC9FB2DD-DF35-4B84-9135-C0E6A5E9FBB3}" type="datetimeFigureOut">
               <a:rPr lang="en-US" smtClean="0"/>
-              <a:t>10/30/2025</a:t>
+              <a:t>11/6/2025</a:t>
             </a:fld>
             <a:endParaRPr lang="en-US"/>
           </a:p>
@@ -3139,7 +3159,7 @@
           <a:p>
             <a:fld id="{FC9FB2DD-DF35-4B84-9135-C0E6A5E9FBB3}" type="datetimeFigureOut">
               <a:rPr lang="en-US" smtClean="0"/>
-              <a:t>10/30/2025</a:t>
+              <a:t>11/6/2025</a:t>
             </a:fld>
             <a:endParaRPr lang="en-US"/>
           </a:p>
@@ -3380,7 +3400,7 @@
           <a:p>
             <a:fld id="{FC9FB2DD-DF35-4B84-9135-C0E6A5E9FBB3}" type="datetimeFigureOut">
               <a:rPr lang="en-US" smtClean="0"/>
-              <a:t>10/30/2025</a:t>
+              <a:t>11/6/2025</a:t>
             </a:fld>
             <a:endParaRPr lang="en-US"/>
           </a:p>
@@ -16764,7 +16784,7 @@
           <p:cNvPr id="2" name="Title 1">
             <a:extLst>
               <a:ext uri="{FF2B5EF4-FFF2-40B4-BE49-F238E27FC236}">
-                <a16:creationId xmlns:a16="http://schemas.microsoft.com/office/drawing/2014/main" id="{7F3F2022-DBA0-F8BB-70DA-B01A01136D53}"/>
+                <a16:creationId xmlns:a16="http://schemas.microsoft.com/office/drawing/2014/main" id="{706BA87D-1D70-78FE-25DC-A4EBD265B3AB}"/>
               </a:ext>
             </a:extLst>
           </p:cNvPr>
@@ -16777,12 +16797,14 @@
         </p:nvSpPr>
         <p:spPr/>
         <p:txBody>
-          <a:bodyPr/>
-          <a:lstStyle/>
-          <a:p>
-            <a:r>
-              <a:rPr lang="en-US" dirty="0"/>
-              <a:t>string data type</a:t>
+          <a:bodyPr>
+            <a:normAutofit/>
+          </a:bodyPr>
+          <a:lstStyle/>
+          <a:p>
+            <a:r>
+              <a:rPr lang="en-US" dirty="0"/>
+              <a:t>Sequences </a:t>
             </a:r>
           </a:p>
         </p:txBody>
@@ -16792,7 +16814,7 @@
           <p:cNvPr id="3" name="Content Placeholder 2">
             <a:extLst>
               <a:ext uri="{FF2B5EF4-FFF2-40B4-BE49-F238E27FC236}">
-                <a16:creationId xmlns:a16="http://schemas.microsoft.com/office/drawing/2014/main" id="{12C7C63C-7B86-C453-D132-93C8AB055AC5}"/>
+                <a16:creationId xmlns:a16="http://schemas.microsoft.com/office/drawing/2014/main" id="{317BA258-9060-08A8-D80A-3077DE67B975}"/>
               </a:ext>
             </a:extLst>
           </p:cNvPr>
@@ -16805,93 +16827,33 @@
         </p:nvSpPr>
         <p:spPr/>
         <p:txBody>
-          <a:bodyPr>
-            <a:normAutofit fontScale="92500" lnSpcReduction="10000"/>
-          </a:bodyPr>
-          <a:lstStyle/>
-          <a:p>
-            <a:r>
-              <a:rPr lang="en-US" dirty="0"/>
-              <a:t>We already know few built in types</a:t>
-            </a:r>
-          </a:p>
-          <a:p>
-            <a:pPr lvl="1"/>
-            <a:r>
-              <a:rPr lang="en-US" dirty="0"/>
-              <a:t>int , float , char, bool</a:t>
-            </a:r>
-          </a:p>
-          <a:p>
-            <a:r>
-              <a:rPr lang="en-US" dirty="0"/>
-              <a:t>string </a:t>
-            </a:r>
-          </a:p>
-          <a:p>
-            <a:pPr lvl="1"/>
-            <a:r>
-              <a:rPr lang="en-US" dirty="0"/>
-              <a:t>Is a derived data type, </a:t>
-            </a:r>
-          </a:p>
-          <a:p>
-            <a:pPr lvl="1"/>
-            <a:r>
-              <a:rPr lang="en-US" dirty="0"/>
-              <a:t>Useful for names, description etc. </a:t>
-            </a:r>
-          </a:p>
-          <a:p>
-            <a:r>
-              <a:rPr lang="en-US" dirty="0"/>
-              <a:t>Header </a:t>
-            </a:r>
-          </a:p>
-          <a:p>
-            <a:pPr lvl="1"/>
-            <a:r>
-              <a:rPr lang="en-US" dirty="0"/>
-              <a:t>#include&lt;string&gt;</a:t>
-            </a:r>
-          </a:p>
-          <a:p>
-            <a:r>
-              <a:rPr lang="en-US" dirty="0"/>
-              <a:t>Usage </a:t>
-            </a:r>
-          </a:p>
-          <a:p>
-            <a:pPr lvl="1"/>
-            <a:r>
-              <a:rPr lang="en-US" dirty="0"/>
-              <a:t>string name;</a:t>
-            </a:r>
-          </a:p>
-          <a:p>
-            <a:pPr lvl="1"/>
-            <a:r>
-              <a:rPr lang="en-US" dirty="0" err="1"/>
-              <a:t>cin</a:t>
-            </a:r>
-            <a:r>
-              <a:rPr lang="en-US" dirty="0"/>
-              <a:t> &gt;&gt; name;</a:t>
-            </a:r>
-          </a:p>
-          <a:p>
-            <a:pPr lvl="1"/>
-            <a:r>
-              <a:rPr lang="en-US" dirty="0" err="1"/>
-              <a:t>cout</a:t>
-            </a:r>
-            <a:r>
-              <a:rPr lang="en-US" dirty="0"/>
-              <a:t> &lt;&lt;name;</a:t>
-            </a:r>
-            <a:br>
-              <a:rPr lang="en-US" dirty="0"/>
-            </a:br>
+          <a:bodyPr/>
+          <a:lstStyle/>
+          <a:p>
+            <a:r>
+              <a:rPr lang="en-US" dirty="0"/>
+              <a:t>Game leaderboard</a:t>
+            </a:r>
+          </a:p>
+          <a:p>
+            <a:r>
+              <a:rPr lang="en-US" dirty="0"/>
+              <a:t>Scores per test </a:t>
+            </a:r>
+          </a:p>
+          <a:p>
+            <a:r>
+              <a:rPr lang="en-US" dirty="0"/>
+              <a:t>Temperature per hour of day</a:t>
+            </a:r>
+          </a:p>
+          <a:p>
+            <a:r>
+              <a:rPr lang="en-US" dirty="0"/>
+              <a:t>…</a:t>
+            </a:r>
+          </a:p>
+          <a:p>
             <a:endParaRPr lang="en-US" dirty="0"/>
           </a:p>
         </p:txBody>
@@ -16901,7 +16863,7 @@
           <p:cNvPr id="4" name="Footer Placeholder 3">
             <a:extLst>
               <a:ext uri="{FF2B5EF4-FFF2-40B4-BE49-F238E27FC236}">
-                <a16:creationId xmlns:a16="http://schemas.microsoft.com/office/drawing/2014/main" id="{975DF1C2-BCB7-988E-2E18-DF5C6412B181}"/>
+                <a16:creationId xmlns:a16="http://schemas.microsoft.com/office/drawing/2014/main" id="{84CA5CA1-8045-4107-1F48-A285FED4B3B3}"/>
               </a:ext>
             </a:extLst>
           </p:cNvPr>
@@ -16919,7 +16881,7 @@
           <a:p>
             <a:r>
               <a:rPr lang="en-US"/>
-              <a:t>Week 4</a:t>
+              <a:t>Week 8</a:t>
             </a:r>
           </a:p>
         </p:txBody>
@@ -16929,7 +16891,7 @@
           <p:cNvPr id="5" name="Slide Number Placeholder 4">
             <a:extLst>
               <a:ext uri="{FF2B5EF4-FFF2-40B4-BE49-F238E27FC236}">
-                <a16:creationId xmlns:a16="http://schemas.microsoft.com/office/drawing/2014/main" id="{43357A0E-A54D-5BCE-A42F-833CB4760EC1}"/>
+                <a16:creationId xmlns:a16="http://schemas.microsoft.com/office/drawing/2014/main" id="{E62941CD-62F3-99C5-F1B5-41C2D05711FB}"/>
               </a:ext>
             </a:extLst>
           </p:cNvPr>
@@ -16956,7 +16918,1261 @@
     </p:spTree>
     <p:extLst>
       <p:ext uri="{BB962C8B-B14F-4D97-AF65-F5344CB8AC3E}">
-        <p14:creationId xmlns:p14="http://schemas.microsoft.com/office/powerpoint/2010/main" val="4193919016"/>
+        <p14:creationId xmlns:p14="http://schemas.microsoft.com/office/powerpoint/2010/main" val="73703205"/>
+      </p:ext>
+    </p:extLst>
+  </p:cSld>
+  <p:clrMapOvr>
+    <a:masterClrMapping/>
+  </p:clrMapOvr>
+</p:sld>
+</file>
+
+<file path=ppt/slides/slide57.xml><?xml version="1.0" encoding="utf-8"?>
+<p:sld xmlns:a="http://schemas.openxmlformats.org/drawingml/2006/main" xmlns:r="http://schemas.openxmlformats.org/officeDocument/2006/relationships" xmlns:p="http://schemas.openxmlformats.org/presentationml/2006/main">
+  <p:cSld>
+    <p:spTree>
+      <p:nvGrpSpPr>
+        <p:cNvPr id="1" name=""/>
+        <p:cNvGrpSpPr/>
+        <p:nvPr/>
+      </p:nvGrpSpPr>
+      <p:grpSpPr>
+        <a:xfrm>
+          <a:off x="0" y="0"/>
+          <a:ext cx="0" cy="0"/>
+          <a:chOff x="0" y="0"/>
+          <a:chExt cx="0" cy="0"/>
+        </a:xfrm>
+      </p:grpSpPr>
+      <p:sp>
+        <p:nvSpPr>
+          <p:cNvPr id="2" name="Title 1">
+            <a:extLst>
+              <a:ext uri="{FF2B5EF4-FFF2-40B4-BE49-F238E27FC236}">
+                <a16:creationId xmlns:a16="http://schemas.microsoft.com/office/drawing/2014/main" id="{41E8E8C3-0036-E4B6-B5BC-68B4D8B6C87A}"/>
+              </a:ext>
+            </a:extLst>
+          </p:cNvPr>
+          <p:cNvSpPr>
+            <a:spLocks noGrp="1"/>
+          </p:cNvSpPr>
+          <p:nvPr>
+            <p:ph type="title"/>
+          </p:nvPr>
+        </p:nvSpPr>
+        <p:spPr/>
+        <p:txBody>
+          <a:bodyPr/>
+          <a:lstStyle/>
+          <a:p>
+            <a:r>
+              <a:rPr lang="en-US" dirty="0"/>
+              <a:t>Sequence of data types : Arrays</a:t>
+            </a:r>
+          </a:p>
+        </p:txBody>
+      </p:sp>
+      <p:sp>
+        <p:nvSpPr>
+          <p:cNvPr id="3" name="Content Placeholder 2">
+            <a:extLst>
+              <a:ext uri="{FF2B5EF4-FFF2-40B4-BE49-F238E27FC236}">
+                <a16:creationId xmlns:a16="http://schemas.microsoft.com/office/drawing/2014/main" id="{0103191C-E247-FDFE-C8AA-BEC5A5DBBEEA}"/>
+              </a:ext>
+            </a:extLst>
+          </p:cNvPr>
+          <p:cNvSpPr>
+            <a:spLocks noGrp="1"/>
+          </p:cNvSpPr>
+          <p:nvPr>
+            <p:ph idx="1"/>
+          </p:nvPr>
+        </p:nvSpPr>
+        <p:spPr/>
+        <p:txBody>
+          <a:bodyPr/>
+          <a:lstStyle/>
+          <a:p>
+            <a:r>
+              <a:rPr lang="en-US" dirty="0"/>
+              <a:t>int days[7];</a:t>
+            </a:r>
+          </a:p>
+          <a:p>
+            <a:pPr lvl="1"/>
+            <a:r>
+              <a:rPr lang="en-US" dirty="0"/>
+              <a:t>Variables ‘days’</a:t>
+            </a:r>
+          </a:p>
+          <a:p>
+            <a:pPr lvl="1"/>
+            <a:r>
+              <a:rPr lang="en-US" dirty="0"/>
+              <a:t>Memory locations : 7 x </a:t>
+            </a:r>
+            <a:r>
+              <a:rPr lang="en-US" dirty="0" err="1"/>
+              <a:t>sizeof</a:t>
+            </a:r>
+            <a:r>
+              <a:rPr lang="en-US" dirty="0"/>
+              <a:t>(int) = ?</a:t>
+            </a:r>
+          </a:p>
+          <a:p>
+            <a:pPr lvl="1"/>
+            <a:r>
+              <a:rPr lang="en-US" dirty="0"/>
+              <a:t>1</a:t>
+            </a:r>
+            <a:r>
+              <a:rPr lang="en-US" baseline="30000" dirty="0"/>
+              <a:t>st</a:t>
+            </a:r>
+            <a:r>
+              <a:rPr lang="en-US" dirty="0"/>
+              <a:t> : day[0];</a:t>
+            </a:r>
+          </a:p>
+          <a:p>
+            <a:pPr lvl="1"/>
+            <a:r>
+              <a:rPr lang="en-US" dirty="0"/>
+              <a:t>7</a:t>
+            </a:r>
+            <a:r>
+              <a:rPr lang="en-US" baseline="30000" dirty="0"/>
+              <a:t>th</a:t>
+            </a:r>
+            <a:r>
+              <a:rPr lang="en-US" dirty="0"/>
+              <a:t> : day [?]</a:t>
+            </a:r>
+          </a:p>
+          <a:p>
+            <a:r>
+              <a:rPr lang="en-US" dirty="0"/>
+              <a:t>float avg[12]</a:t>
+            </a:r>
+          </a:p>
+          <a:p>
+            <a:pPr lvl="1"/>
+            <a:r>
+              <a:rPr lang="en-US" dirty="0"/>
+              <a:t>Variable ‘avg’</a:t>
+            </a:r>
+          </a:p>
+          <a:p>
+            <a:pPr lvl="1"/>
+            <a:r>
+              <a:rPr lang="en-US" dirty="0"/>
+              <a:t>Memory locations : 12 x </a:t>
+            </a:r>
+            <a:r>
+              <a:rPr lang="en-US" dirty="0" err="1"/>
+              <a:t>sizeof</a:t>
+            </a:r>
+            <a:r>
+              <a:rPr lang="en-US" dirty="0"/>
+              <a:t>(int) = ?</a:t>
+            </a:r>
+          </a:p>
+          <a:p>
+            <a:pPr lvl="1"/>
+            <a:r>
+              <a:rPr lang="en-US" dirty="0"/>
+              <a:t>1</a:t>
+            </a:r>
+            <a:r>
+              <a:rPr lang="en-US" baseline="30000" dirty="0"/>
+              <a:t>st</a:t>
+            </a:r>
+            <a:r>
+              <a:rPr lang="en-US" dirty="0"/>
+              <a:t> : ?</a:t>
+            </a:r>
+          </a:p>
+          <a:p>
+            <a:pPr lvl="1"/>
+            <a:r>
+              <a:rPr lang="en-US" dirty="0"/>
+              <a:t>12</a:t>
+            </a:r>
+            <a:r>
+              <a:rPr lang="en-US" baseline="30000" dirty="0"/>
+              <a:t>th</a:t>
+            </a:r>
+            <a:r>
+              <a:rPr lang="en-US" dirty="0"/>
+              <a:t> : ?</a:t>
+            </a:r>
+          </a:p>
+          <a:p>
+            <a:endParaRPr lang="en-US" dirty="0"/>
+          </a:p>
+        </p:txBody>
+      </p:sp>
+      <p:sp>
+        <p:nvSpPr>
+          <p:cNvPr id="4" name="Footer Placeholder 3">
+            <a:extLst>
+              <a:ext uri="{FF2B5EF4-FFF2-40B4-BE49-F238E27FC236}">
+                <a16:creationId xmlns:a16="http://schemas.microsoft.com/office/drawing/2014/main" id="{A9F5625D-6279-11E4-45A4-D46C675C8A4F}"/>
+              </a:ext>
+            </a:extLst>
+          </p:cNvPr>
+          <p:cNvSpPr>
+            <a:spLocks noGrp="1"/>
+          </p:cNvSpPr>
+          <p:nvPr>
+            <p:ph type="ftr" sz="quarter" idx="11"/>
+          </p:nvPr>
+        </p:nvSpPr>
+        <p:spPr/>
+        <p:txBody>
+          <a:bodyPr/>
+          <a:lstStyle/>
+          <a:p>
+            <a:r>
+              <a:rPr lang="en-US"/>
+              <a:t>Week 8</a:t>
+            </a:r>
+          </a:p>
+        </p:txBody>
+      </p:sp>
+      <p:sp>
+        <p:nvSpPr>
+          <p:cNvPr id="5" name="Slide Number Placeholder 4">
+            <a:extLst>
+              <a:ext uri="{FF2B5EF4-FFF2-40B4-BE49-F238E27FC236}">
+                <a16:creationId xmlns:a16="http://schemas.microsoft.com/office/drawing/2014/main" id="{9392E159-3298-370B-C8EE-71EA916EC07E}"/>
+              </a:ext>
+            </a:extLst>
+          </p:cNvPr>
+          <p:cNvSpPr>
+            <a:spLocks noGrp="1"/>
+          </p:cNvSpPr>
+          <p:nvPr>
+            <p:ph type="sldNum" sz="quarter" idx="12"/>
+          </p:nvPr>
+        </p:nvSpPr>
+        <p:spPr/>
+        <p:txBody>
+          <a:bodyPr/>
+          <a:lstStyle/>
+          <a:p>
+            <a:fld id="{3EC9E123-0CB8-4CD3-A52F-DDEB9B17898B}" type="slidenum">
+              <a:rPr lang="en-US" smtClean="0"/>
+              <a:t>57</a:t>
+            </a:fld>
+            <a:endParaRPr lang="en-US"/>
+          </a:p>
+        </p:txBody>
+      </p:sp>
+    </p:spTree>
+    <p:extLst>
+      <p:ext uri="{BB962C8B-B14F-4D97-AF65-F5344CB8AC3E}">
+        <p14:creationId xmlns:p14="http://schemas.microsoft.com/office/powerpoint/2010/main" val="3810612980"/>
+      </p:ext>
+    </p:extLst>
+  </p:cSld>
+  <p:clrMapOvr>
+    <a:masterClrMapping/>
+  </p:clrMapOvr>
+</p:sld>
+</file>
+
+<file path=ppt/slides/slide58.xml><?xml version="1.0" encoding="utf-8"?>
+<p:sld xmlns:a="http://schemas.openxmlformats.org/drawingml/2006/main" xmlns:r="http://schemas.openxmlformats.org/officeDocument/2006/relationships" xmlns:p="http://schemas.openxmlformats.org/presentationml/2006/main">
+  <p:cSld>
+    <p:spTree>
+      <p:nvGrpSpPr>
+        <p:cNvPr id="1" name=""/>
+        <p:cNvGrpSpPr/>
+        <p:nvPr/>
+      </p:nvGrpSpPr>
+      <p:grpSpPr>
+        <a:xfrm>
+          <a:off x="0" y="0"/>
+          <a:ext cx="0" cy="0"/>
+          <a:chOff x="0" y="0"/>
+          <a:chExt cx="0" cy="0"/>
+        </a:xfrm>
+      </p:grpSpPr>
+      <p:sp>
+        <p:nvSpPr>
+          <p:cNvPr id="2" name="Title 1">
+            <a:extLst>
+              <a:ext uri="{FF2B5EF4-FFF2-40B4-BE49-F238E27FC236}">
+                <a16:creationId xmlns:a16="http://schemas.microsoft.com/office/drawing/2014/main" id="{DDD7C0AE-61CB-CB30-03D8-ACC2E0C8A4AD}"/>
+              </a:ext>
+            </a:extLst>
+          </p:cNvPr>
+          <p:cNvSpPr>
+            <a:spLocks noGrp="1"/>
+          </p:cNvSpPr>
+          <p:nvPr>
+            <p:ph type="title"/>
+          </p:nvPr>
+        </p:nvSpPr>
+        <p:spPr/>
+        <p:txBody>
+          <a:bodyPr/>
+          <a:lstStyle/>
+          <a:p>
+            <a:r>
+              <a:rPr lang="en-US" dirty="0"/>
+              <a:t>Array syntax</a:t>
+            </a:r>
+          </a:p>
+        </p:txBody>
+      </p:sp>
+      <p:sp>
+        <p:nvSpPr>
+          <p:cNvPr id="3" name="Content Placeholder 2">
+            <a:extLst>
+              <a:ext uri="{FF2B5EF4-FFF2-40B4-BE49-F238E27FC236}">
+                <a16:creationId xmlns:a16="http://schemas.microsoft.com/office/drawing/2014/main" id="{3CE9B108-20A2-AC8F-9F7A-13126FC8C8D7}"/>
+              </a:ext>
+            </a:extLst>
+          </p:cNvPr>
+          <p:cNvSpPr>
+            <a:spLocks noGrp="1"/>
+          </p:cNvSpPr>
+          <p:nvPr>
+            <p:ph idx="1"/>
+          </p:nvPr>
+        </p:nvSpPr>
+        <p:spPr/>
+        <p:txBody>
+          <a:bodyPr>
+            <a:normAutofit lnSpcReduction="10000"/>
+          </a:bodyPr>
+          <a:lstStyle/>
+          <a:p>
+            <a:r>
+              <a:rPr lang="en-US" dirty="0"/>
+              <a:t>int days[7];</a:t>
+            </a:r>
+          </a:p>
+          <a:p>
+            <a:pPr lvl="1"/>
+            <a:r>
+              <a:rPr lang="en-US" dirty="0"/>
+              <a:t>one dimensional array </a:t>
+            </a:r>
+          </a:p>
+          <a:p>
+            <a:pPr lvl="1"/>
+            <a:r>
+              <a:rPr lang="en-US" dirty="0"/>
+              <a:t>[ ] square backets require a constant value</a:t>
+            </a:r>
+          </a:p>
+          <a:p>
+            <a:pPr lvl="1"/>
+            <a:r>
+              <a:rPr lang="en-US" dirty="0"/>
+              <a:t>Index starts from 0 </a:t>
+            </a:r>
+          </a:p>
+          <a:p>
+            <a:pPr lvl="1"/>
+            <a:r>
+              <a:rPr lang="en-US" dirty="0"/>
+              <a:t>Access nth value using days[n];</a:t>
+            </a:r>
+          </a:p>
+          <a:p>
+            <a:pPr lvl="1"/>
+            <a:r>
+              <a:rPr lang="en-US" dirty="0"/>
+              <a:t>Initialization</a:t>
+            </a:r>
+          </a:p>
+          <a:p>
+            <a:pPr lvl="2"/>
+            <a:r>
+              <a:rPr lang="en-US" dirty="0"/>
+              <a:t>Option 1 </a:t>
+            </a:r>
+          </a:p>
+          <a:p>
+            <a:pPr lvl="3"/>
+            <a:r>
+              <a:rPr lang="en-US" dirty="0"/>
+              <a:t>int days[7] = {1,2,3,4,5,6,7};</a:t>
+            </a:r>
+          </a:p>
+          <a:p>
+            <a:pPr lvl="2"/>
+            <a:r>
+              <a:rPr lang="en-US" dirty="0"/>
+              <a:t>Option 2 : omit the size</a:t>
+            </a:r>
+          </a:p>
+          <a:p>
+            <a:pPr lvl="3"/>
+            <a:r>
+              <a:rPr lang="en-US" dirty="0"/>
+              <a:t>int days[  ] =  {1,2,3,4,5,6,7};</a:t>
+            </a:r>
+          </a:p>
+          <a:p>
+            <a:pPr lvl="2"/>
+            <a:r>
+              <a:rPr lang="en-US" dirty="0"/>
+              <a:t>Or GIGO ??</a:t>
+            </a:r>
+          </a:p>
+          <a:p>
+            <a:r>
+              <a:rPr lang="en-US" dirty="0"/>
+              <a:t>* Array size is constant, cant change after creation.</a:t>
+            </a:r>
+          </a:p>
+          <a:p>
+            <a:pPr lvl="3"/>
+            <a:endParaRPr lang="en-US" dirty="0"/>
+          </a:p>
+          <a:p>
+            <a:pPr lvl="2"/>
+            <a:endParaRPr lang="en-US" dirty="0"/>
+          </a:p>
+          <a:p>
+            <a:endParaRPr lang="en-US" dirty="0"/>
+          </a:p>
+          <a:p>
+            <a:pPr marL="914400" lvl="2" indent="0">
+              <a:buNone/>
+            </a:pPr>
+            <a:endParaRPr lang="en-US" dirty="0"/>
+          </a:p>
+          <a:p>
+            <a:pPr lvl="1"/>
+            <a:endParaRPr lang="en-US" dirty="0"/>
+          </a:p>
+          <a:p>
+            <a:endParaRPr lang="en-US" dirty="0"/>
+          </a:p>
+        </p:txBody>
+      </p:sp>
+      <p:sp>
+        <p:nvSpPr>
+          <p:cNvPr id="4" name="Footer Placeholder 3">
+            <a:extLst>
+              <a:ext uri="{FF2B5EF4-FFF2-40B4-BE49-F238E27FC236}">
+                <a16:creationId xmlns:a16="http://schemas.microsoft.com/office/drawing/2014/main" id="{5C2C496D-8898-51D9-3B81-776102C094B9}"/>
+              </a:ext>
+            </a:extLst>
+          </p:cNvPr>
+          <p:cNvSpPr>
+            <a:spLocks noGrp="1"/>
+          </p:cNvSpPr>
+          <p:nvPr>
+            <p:ph type="ftr" sz="quarter" idx="11"/>
+          </p:nvPr>
+        </p:nvSpPr>
+        <p:spPr/>
+        <p:txBody>
+          <a:bodyPr/>
+          <a:lstStyle/>
+          <a:p>
+            <a:r>
+              <a:rPr lang="en-US"/>
+              <a:t>Week 8</a:t>
+            </a:r>
+          </a:p>
+        </p:txBody>
+      </p:sp>
+      <p:sp>
+        <p:nvSpPr>
+          <p:cNvPr id="5" name="Slide Number Placeholder 4">
+            <a:extLst>
+              <a:ext uri="{FF2B5EF4-FFF2-40B4-BE49-F238E27FC236}">
+                <a16:creationId xmlns:a16="http://schemas.microsoft.com/office/drawing/2014/main" id="{40680A94-A6A9-9512-E15E-F959BFB1C553}"/>
+              </a:ext>
+            </a:extLst>
+          </p:cNvPr>
+          <p:cNvSpPr>
+            <a:spLocks noGrp="1"/>
+          </p:cNvSpPr>
+          <p:nvPr>
+            <p:ph type="sldNum" sz="quarter" idx="12"/>
+          </p:nvPr>
+        </p:nvSpPr>
+        <p:spPr/>
+        <p:txBody>
+          <a:bodyPr/>
+          <a:lstStyle/>
+          <a:p>
+            <a:fld id="{3EC9E123-0CB8-4CD3-A52F-DDEB9B17898B}" type="slidenum">
+              <a:rPr lang="en-US" smtClean="0"/>
+              <a:t>58</a:t>
+            </a:fld>
+            <a:endParaRPr lang="en-US"/>
+          </a:p>
+        </p:txBody>
+      </p:sp>
+    </p:spTree>
+    <p:extLst>
+      <p:ext uri="{BB962C8B-B14F-4D97-AF65-F5344CB8AC3E}">
+        <p14:creationId xmlns:p14="http://schemas.microsoft.com/office/powerpoint/2010/main" val="2346830826"/>
+      </p:ext>
+    </p:extLst>
+  </p:cSld>
+  <p:clrMapOvr>
+    <a:masterClrMapping/>
+  </p:clrMapOvr>
+</p:sld>
+</file>
+
+<file path=ppt/slides/slide59.xml><?xml version="1.0" encoding="utf-8"?>
+<p:sld xmlns:a="http://schemas.openxmlformats.org/drawingml/2006/main" xmlns:r="http://schemas.openxmlformats.org/officeDocument/2006/relationships" xmlns:p="http://schemas.openxmlformats.org/presentationml/2006/main">
+  <p:cSld>
+    <p:spTree>
+      <p:nvGrpSpPr>
+        <p:cNvPr id="1" name=""/>
+        <p:cNvGrpSpPr/>
+        <p:nvPr/>
+      </p:nvGrpSpPr>
+      <p:grpSpPr>
+        <a:xfrm>
+          <a:off x="0" y="0"/>
+          <a:ext cx="0" cy="0"/>
+          <a:chOff x="0" y="0"/>
+          <a:chExt cx="0" cy="0"/>
+        </a:xfrm>
+      </p:grpSpPr>
+      <p:sp>
+        <p:nvSpPr>
+          <p:cNvPr id="2" name="Title 1">
+            <a:extLst>
+              <a:ext uri="{FF2B5EF4-FFF2-40B4-BE49-F238E27FC236}">
+                <a16:creationId xmlns:a16="http://schemas.microsoft.com/office/drawing/2014/main" id="{BE76B238-15D7-0DF5-DB58-F44C964BDD0A}"/>
+              </a:ext>
+            </a:extLst>
+          </p:cNvPr>
+          <p:cNvSpPr>
+            <a:spLocks noGrp="1"/>
+          </p:cNvSpPr>
+          <p:nvPr>
+            <p:ph type="title"/>
+          </p:nvPr>
+        </p:nvSpPr>
+        <p:spPr/>
+        <p:txBody>
+          <a:bodyPr/>
+          <a:lstStyle/>
+          <a:p>
+            <a:r>
+              <a:rPr lang="en-US" dirty="0"/>
+              <a:t>Memory layout</a:t>
+            </a:r>
+          </a:p>
+        </p:txBody>
+      </p:sp>
+      <p:sp>
+        <p:nvSpPr>
+          <p:cNvPr id="3" name="Content Placeholder 2">
+            <a:extLst>
+              <a:ext uri="{FF2B5EF4-FFF2-40B4-BE49-F238E27FC236}">
+                <a16:creationId xmlns:a16="http://schemas.microsoft.com/office/drawing/2014/main" id="{D86D8E67-8D03-B14F-FD39-CFA6310CB53A}"/>
+              </a:ext>
+            </a:extLst>
+          </p:cNvPr>
+          <p:cNvSpPr>
+            <a:spLocks noGrp="1"/>
+          </p:cNvSpPr>
+          <p:nvPr>
+            <p:ph idx="1"/>
+          </p:nvPr>
+        </p:nvSpPr>
+        <p:spPr/>
+        <p:txBody>
+          <a:bodyPr/>
+          <a:lstStyle/>
+          <a:p>
+            <a:r>
+              <a:rPr lang="en-US" dirty="0"/>
+              <a:t>int days[7]  = {1,2,3,4,5,6,7};</a:t>
+            </a:r>
+          </a:p>
+          <a:p>
+            <a:endParaRPr lang="en-US" dirty="0"/>
+          </a:p>
+          <a:p>
+            <a:endParaRPr lang="en-US" dirty="0"/>
+          </a:p>
+          <a:p>
+            <a:pPr lvl="1"/>
+            <a:r>
+              <a:rPr lang="en-US" dirty="0"/>
+              <a:t>Layout is Sequential </a:t>
+            </a:r>
+          </a:p>
+          <a:p>
+            <a:pPr lvl="2"/>
+            <a:r>
+              <a:rPr lang="en-US" dirty="0"/>
+              <a:t>Next number is right after the previous … all the way to end</a:t>
+            </a:r>
+          </a:p>
+          <a:p>
+            <a:pPr lvl="1"/>
+            <a:r>
+              <a:rPr lang="en-US" dirty="0">
+                <a:solidFill>
+                  <a:srgbClr val="FF0000"/>
+                </a:solidFill>
+              </a:rPr>
+              <a:t>Caution </a:t>
+            </a:r>
+          </a:p>
+          <a:p>
+            <a:pPr lvl="2"/>
+            <a:r>
+              <a:rPr lang="en-US" dirty="0"/>
+              <a:t>Do not go beyond the bound of array … that is GIGO</a:t>
+            </a:r>
+          </a:p>
+          <a:p>
+            <a:pPr lvl="1"/>
+            <a:endParaRPr lang="en-US" dirty="0"/>
+          </a:p>
+          <a:p>
+            <a:pPr marL="457200" lvl="1" indent="0">
+              <a:buNone/>
+            </a:pPr>
+            <a:endParaRPr lang="en-US" dirty="0"/>
+          </a:p>
+        </p:txBody>
+      </p:sp>
+      <p:graphicFrame>
+        <p:nvGraphicFramePr>
+          <p:cNvPr id="4" name="Table 3">
+            <a:extLst>
+              <a:ext uri="{FF2B5EF4-FFF2-40B4-BE49-F238E27FC236}">
+                <a16:creationId xmlns:a16="http://schemas.microsoft.com/office/drawing/2014/main" id="{EE9398DC-4BD3-2122-8E0F-F2E376FFFB6B}"/>
+              </a:ext>
+            </a:extLst>
+          </p:cNvPr>
+          <p:cNvGraphicFramePr>
+            <a:graphicFrameLocks noGrp="1"/>
+          </p:cNvGraphicFramePr>
+          <p:nvPr>
+            <p:extLst>
+              <p:ext uri="{D42A27DB-BD31-4B8C-83A1-F6EECF244321}">
+                <p14:modId xmlns:p14="http://schemas.microsoft.com/office/powerpoint/2010/main" val="339386069"/>
+              </p:ext>
+            </p:extLst>
+          </p:nvPr>
+        </p:nvGraphicFramePr>
+        <p:xfrm>
+          <a:off x="1353576" y="2722131"/>
+          <a:ext cx="3113082" cy="365760"/>
+        </p:xfrm>
+        <a:graphic>
+          <a:graphicData uri="http://schemas.openxmlformats.org/drawingml/2006/table">
+            <a:tbl>
+              <a:tblPr firstRow="1" bandRow="1">
+                <a:tableStyleId>{5C22544A-7EE6-4342-B048-85BDC9FD1C3A}</a:tableStyleId>
+              </a:tblPr>
+              <a:tblGrid>
+                <a:gridCol w="444726">
+                  <a:extLst>
+                    <a:ext uri="{9D8B030D-6E8A-4147-A177-3AD203B41FA5}">
+                      <a16:colId xmlns:a16="http://schemas.microsoft.com/office/drawing/2014/main" val="3537882725"/>
+                    </a:ext>
+                  </a:extLst>
+                </a:gridCol>
+                <a:gridCol w="444726">
+                  <a:extLst>
+                    <a:ext uri="{9D8B030D-6E8A-4147-A177-3AD203B41FA5}">
+                      <a16:colId xmlns:a16="http://schemas.microsoft.com/office/drawing/2014/main" val="2096251874"/>
+                    </a:ext>
+                  </a:extLst>
+                </a:gridCol>
+                <a:gridCol w="444726">
+                  <a:extLst>
+                    <a:ext uri="{9D8B030D-6E8A-4147-A177-3AD203B41FA5}">
+                      <a16:colId xmlns:a16="http://schemas.microsoft.com/office/drawing/2014/main" val="2477420844"/>
+                    </a:ext>
+                  </a:extLst>
+                </a:gridCol>
+                <a:gridCol w="444726">
+                  <a:extLst>
+                    <a:ext uri="{9D8B030D-6E8A-4147-A177-3AD203B41FA5}">
+                      <a16:colId xmlns:a16="http://schemas.microsoft.com/office/drawing/2014/main" val="353016836"/>
+                    </a:ext>
+                  </a:extLst>
+                </a:gridCol>
+                <a:gridCol w="444726">
+                  <a:extLst>
+                    <a:ext uri="{9D8B030D-6E8A-4147-A177-3AD203B41FA5}">
+                      <a16:colId xmlns:a16="http://schemas.microsoft.com/office/drawing/2014/main" val="4000073041"/>
+                    </a:ext>
+                  </a:extLst>
+                </a:gridCol>
+                <a:gridCol w="444726">
+                  <a:extLst>
+                    <a:ext uri="{9D8B030D-6E8A-4147-A177-3AD203B41FA5}">
+                      <a16:colId xmlns:a16="http://schemas.microsoft.com/office/drawing/2014/main" val="54443186"/>
+                    </a:ext>
+                  </a:extLst>
+                </a:gridCol>
+                <a:gridCol w="444726">
+                  <a:extLst>
+                    <a:ext uri="{9D8B030D-6E8A-4147-A177-3AD203B41FA5}">
+                      <a16:colId xmlns:a16="http://schemas.microsoft.com/office/drawing/2014/main" val="2609842276"/>
+                    </a:ext>
+                  </a:extLst>
+                </a:gridCol>
+              </a:tblGrid>
+              <a:tr h="159251">
+                <a:tc>
+                  <a:txBody>
+                    <a:bodyPr/>
+                    <a:lstStyle/>
+                    <a:p>
+                      <a:pPr algn="ctr"/>
+                      <a:r>
+                        <a:rPr lang="en-US" dirty="0"/>
+                        <a:t>1</a:t>
+                      </a:r>
+                    </a:p>
+                  </a:txBody>
+                  <a:tcPr>
+                    <a:solidFill>
+                      <a:schemeClr val="bg1">
+                        <a:lumMod val="50000"/>
+                      </a:schemeClr>
+                    </a:solidFill>
+                  </a:tcPr>
+                </a:tc>
+                <a:tc>
+                  <a:txBody>
+                    <a:bodyPr/>
+                    <a:lstStyle/>
+                    <a:p>
+                      <a:pPr algn="ctr"/>
+                      <a:r>
+                        <a:rPr lang="en-US" dirty="0"/>
+                        <a:t>2</a:t>
+                      </a:r>
+                    </a:p>
+                  </a:txBody>
+                  <a:tcPr>
+                    <a:solidFill>
+                      <a:schemeClr val="bg1">
+                        <a:lumMod val="50000"/>
+                      </a:schemeClr>
+                    </a:solidFill>
+                  </a:tcPr>
+                </a:tc>
+                <a:tc>
+                  <a:txBody>
+                    <a:bodyPr/>
+                    <a:lstStyle/>
+                    <a:p>
+                      <a:pPr algn="ctr"/>
+                      <a:r>
+                        <a:rPr lang="en-US" dirty="0"/>
+                        <a:t>3</a:t>
+                      </a:r>
+                    </a:p>
+                  </a:txBody>
+                  <a:tcPr>
+                    <a:solidFill>
+                      <a:schemeClr val="bg1">
+                        <a:lumMod val="50000"/>
+                      </a:schemeClr>
+                    </a:solidFill>
+                  </a:tcPr>
+                </a:tc>
+                <a:tc>
+                  <a:txBody>
+                    <a:bodyPr/>
+                    <a:lstStyle/>
+                    <a:p>
+                      <a:pPr algn="ctr"/>
+                      <a:r>
+                        <a:rPr lang="en-US" dirty="0"/>
+                        <a:t>4</a:t>
+                      </a:r>
+                    </a:p>
+                  </a:txBody>
+                  <a:tcPr>
+                    <a:solidFill>
+                      <a:schemeClr val="bg1">
+                        <a:lumMod val="50000"/>
+                      </a:schemeClr>
+                    </a:solidFill>
+                  </a:tcPr>
+                </a:tc>
+                <a:tc>
+                  <a:txBody>
+                    <a:bodyPr/>
+                    <a:lstStyle/>
+                    <a:p>
+                      <a:pPr algn="ctr"/>
+                      <a:r>
+                        <a:rPr lang="en-US" dirty="0"/>
+                        <a:t>5</a:t>
+                      </a:r>
+                    </a:p>
+                  </a:txBody>
+                  <a:tcPr>
+                    <a:solidFill>
+                      <a:schemeClr val="bg1">
+                        <a:lumMod val="50000"/>
+                      </a:schemeClr>
+                    </a:solidFill>
+                  </a:tcPr>
+                </a:tc>
+                <a:tc>
+                  <a:txBody>
+                    <a:bodyPr/>
+                    <a:lstStyle/>
+                    <a:p>
+                      <a:pPr algn="ctr"/>
+                      <a:r>
+                        <a:rPr lang="en-US" dirty="0"/>
+                        <a:t>6</a:t>
+                      </a:r>
+                    </a:p>
+                  </a:txBody>
+                  <a:tcPr>
+                    <a:solidFill>
+                      <a:schemeClr val="bg1">
+                        <a:lumMod val="50000"/>
+                      </a:schemeClr>
+                    </a:solidFill>
+                  </a:tcPr>
+                </a:tc>
+                <a:tc>
+                  <a:txBody>
+                    <a:bodyPr/>
+                    <a:lstStyle/>
+                    <a:p>
+                      <a:pPr algn="ctr"/>
+                      <a:r>
+                        <a:rPr lang="en-US" dirty="0"/>
+                        <a:t>7</a:t>
+                      </a:r>
+                    </a:p>
+                  </a:txBody>
+                  <a:tcPr>
+                    <a:solidFill>
+                      <a:schemeClr val="bg1">
+                        <a:lumMod val="50000"/>
+                      </a:schemeClr>
+                    </a:solidFill>
+                  </a:tcPr>
+                </a:tc>
+                <a:extLst>
+                  <a:ext uri="{0D108BD9-81ED-4DB2-BD59-A6C34878D82A}">
+                    <a16:rowId xmlns:a16="http://schemas.microsoft.com/office/drawing/2014/main" val="3327187260"/>
+                  </a:ext>
+                </a:extLst>
+              </a:tr>
+            </a:tbl>
+          </a:graphicData>
+        </a:graphic>
+      </p:graphicFrame>
+      <p:graphicFrame>
+        <p:nvGraphicFramePr>
+          <p:cNvPr id="6" name="Table 5">
+            <a:extLst>
+              <a:ext uri="{FF2B5EF4-FFF2-40B4-BE49-F238E27FC236}">
+                <a16:creationId xmlns:a16="http://schemas.microsoft.com/office/drawing/2014/main" id="{F57BD70C-8034-9C89-3269-F0F579A2D95B}"/>
+              </a:ext>
+            </a:extLst>
+          </p:cNvPr>
+          <p:cNvGraphicFramePr>
+            <a:graphicFrameLocks noGrp="1"/>
+          </p:cNvGraphicFramePr>
+          <p:nvPr>
+            <p:extLst>
+              <p:ext uri="{D42A27DB-BD31-4B8C-83A1-F6EECF244321}">
+                <p14:modId xmlns:p14="http://schemas.microsoft.com/office/powerpoint/2010/main" val="1512952606"/>
+              </p:ext>
+            </p:extLst>
+          </p:nvPr>
+        </p:nvGraphicFramePr>
+        <p:xfrm>
+          <a:off x="1353576" y="2351291"/>
+          <a:ext cx="3113082" cy="370840"/>
+        </p:xfrm>
+        <a:graphic>
+          <a:graphicData uri="http://schemas.openxmlformats.org/drawingml/2006/table">
+            <a:tbl>
+              <a:tblPr firstRow="1" bandRow="1">
+                <a:tableStyleId>{5940675A-B579-460E-94D1-54222C63F5DA}</a:tableStyleId>
+              </a:tblPr>
+              <a:tblGrid>
+                <a:gridCol w="444726">
+                  <a:extLst>
+                    <a:ext uri="{9D8B030D-6E8A-4147-A177-3AD203B41FA5}">
+                      <a16:colId xmlns:a16="http://schemas.microsoft.com/office/drawing/2014/main" val="163348864"/>
+                    </a:ext>
+                  </a:extLst>
+                </a:gridCol>
+                <a:gridCol w="444726">
+                  <a:extLst>
+                    <a:ext uri="{9D8B030D-6E8A-4147-A177-3AD203B41FA5}">
+                      <a16:colId xmlns:a16="http://schemas.microsoft.com/office/drawing/2014/main" val="993047331"/>
+                    </a:ext>
+                  </a:extLst>
+                </a:gridCol>
+                <a:gridCol w="444726">
+                  <a:extLst>
+                    <a:ext uri="{9D8B030D-6E8A-4147-A177-3AD203B41FA5}">
+                      <a16:colId xmlns:a16="http://schemas.microsoft.com/office/drawing/2014/main" val="4148684831"/>
+                    </a:ext>
+                  </a:extLst>
+                </a:gridCol>
+                <a:gridCol w="444726">
+                  <a:extLst>
+                    <a:ext uri="{9D8B030D-6E8A-4147-A177-3AD203B41FA5}">
+                      <a16:colId xmlns:a16="http://schemas.microsoft.com/office/drawing/2014/main" val="3952030039"/>
+                    </a:ext>
+                  </a:extLst>
+                </a:gridCol>
+                <a:gridCol w="444726">
+                  <a:extLst>
+                    <a:ext uri="{9D8B030D-6E8A-4147-A177-3AD203B41FA5}">
+                      <a16:colId xmlns:a16="http://schemas.microsoft.com/office/drawing/2014/main" val="897148073"/>
+                    </a:ext>
+                  </a:extLst>
+                </a:gridCol>
+                <a:gridCol w="444726">
+                  <a:extLst>
+                    <a:ext uri="{9D8B030D-6E8A-4147-A177-3AD203B41FA5}">
+                      <a16:colId xmlns:a16="http://schemas.microsoft.com/office/drawing/2014/main" val="2995066305"/>
+                    </a:ext>
+                  </a:extLst>
+                </a:gridCol>
+                <a:gridCol w="444726">
+                  <a:extLst>
+                    <a:ext uri="{9D8B030D-6E8A-4147-A177-3AD203B41FA5}">
+                      <a16:colId xmlns:a16="http://schemas.microsoft.com/office/drawing/2014/main" val="4218743769"/>
+                    </a:ext>
+                  </a:extLst>
+                </a:gridCol>
+              </a:tblGrid>
+              <a:tr h="370840">
+                <a:tc>
+                  <a:txBody>
+                    <a:bodyPr/>
+                    <a:lstStyle/>
+                    <a:p>
+                      <a:r>
+                        <a:rPr lang="en-US" dirty="0"/>
+                        <a:t>0</a:t>
+                      </a:r>
+                    </a:p>
+                  </a:txBody>
+                  <a:tcPr>
+                    <a:lnL w="12700" cmpd="sng">
+                      <a:noFill/>
+                    </a:lnL>
+                    <a:lnR w="12700" cmpd="sng">
+                      <a:noFill/>
+                    </a:lnR>
+                    <a:lnT w="12700" cmpd="sng">
+                      <a:noFill/>
+                    </a:lnT>
+                    <a:lnB w="12700" cmpd="sng">
+                      <a:noFill/>
+                    </a:lnB>
+                    <a:lnTlToBr w="12700" cmpd="sng">
+                      <a:noFill/>
+                      <a:prstDash val="solid"/>
+                    </a:lnTlToBr>
+                    <a:lnBlToTr w="12700" cmpd="sng">
+                      <a:noFill/>
+                      <a:prstDash val="solid"/>
+                    </a:lnBlToTr>
+                  </a:tcPr>
+                </a:tc>
+                <a:tc>
+                  <a:txBody>
+                    <a:bodyPr/>
+                    <a:lstStyle/>
+                    <a:p>
+                      <a:r>
+                        <a:rPr lang="en-US" dirty="0"/>
+                        <a:t>1</a:t>
+                      </a:r>
+                    </a:p>
+                  </a:txBody>
+                  <a:tcPr>
+                    <a:lnL w="12700" cmpd="sng">
+                      <a:noFill/>
+                    </a:lnL>
+                    <a:lnR w="12700" cmpd="sng">
+                      <a:noFill/>
+                    </a:lnR>
+                    <a:lnT w="12700" cmpd="sng">
+                      <a:noFill/>
+                    </a:lnT>
+                    <a:lnB w="12700" cmpd="sng">
+                      <a:noFill/>
+                    </a:lnB>
+                    <a:lnTlToBr w="12700" cmpd="sng">
+                      <a:noFill/>
+                      <a:prstDash val="solid"/>
+                    </a:lnTlToBr>
+                    <a:lnBlToTr w="12700" cmpd="sng">
+                      <a:noFill/>
+                      <a:prstDash val="solid"/>
+                    </a:lnBlToTr>
+                  </a:tcPr>
+                </a:tc>
+                <a:tc>
+                  <a:txBody>
+                    <a:bodyPr/>
+                    <a:lstStyle/>
+                    <a:p>
+                      <a:r>
+                        <a:rPr lang="en-US" dirty="0"/>
+                        <a:t>2</a:t>
+                      </a:r>
+                    </a:p>
+                  </a:txBody>
+                  <a:tcPr>
+                    <a:lnL w="12700" cmpd="sng">
+                      <a:noFill/>
+                    </a:lnL>
+                    <a:lnR w="12700" cmpd="sng">
+                      <a:noFill/>
+                    </a:lnR>
+                    <a:lnT w="12700" cmpd="sng">
+                      <a:noFill/>
+                    </a:lnT>
+                    <a:lnB w="12700" cmpd="sng">
+                      <a:noFill/>
+                    </a:lnB>
+                    <a:lnTlToBr w="12700" cmpd="sng">
+                      <a:noFill/>
+                      <a:prstDash val="solid"/>
+                    </a:lnTlToBr>
+                    <a:lnBlToTr w="12700" cmpd="sng">
+                      <a:noFill/>
+                      <a:prstDash val="solid"/>
+                    </a:lnBlToTr>
+                  </a:tcPr>
+                </a:tc>
+                <a:tc>
+                  <a:txBody>
+                    <a:bodyPr/>
+                    <a:lstStyle/>
+                    <a:p>
+                      <a:r>
+                        <a:rPr lang="en-US" dirty="0"/>
+                        <a:t>3</a:t>
+                      </a:r>
+                    </a:p>
+                  </a:txBody>
+                  <a:tcPr>
+                    <a:lnL w="12700" cmpd="sng">
+                      <a:noFill/>
+                    </a:lnL>
+                    <a:lnR w="12700" cmpd="sng">
+                      <a:noFill/>
+                    </a:lnR>
+                    <a:lnT w="12700" cmpd="sng">
+                      <a:noFill/>
+                    </a:lnT>
+                    <a:lnB w="12700" cmpd="sng">
+                      <a:noFill/>
+                    </a:lnB>
+                    <a:lnTlToBr w="12700" cmpd="sng">
+                      <a:noFill/>
+                      <a:prstDash val="solid"/>
+                    </a:lnTlToBr>
+                    <a:lnBlToTr w="12700" cmpd="sng">
+                      <a:noFill/>
+                      <a:prstDash val="solid"/>
+                    </a:lnBlToTr>
+                  </a:tcPr>
+                </a:tc>
+                <a:tc>
+                  <a:txBody>
+                    <a:bodyPr/>
+                    <a:lstStyle/>
+                    <a:p>
+                      <a:r>
+                        <a:rPr lang="en-US" dirty="0"/>
+                        <a:t>4</a:t>
+                      </a:r>
+                    </a:p>
+                  </a:txBody>
+                  <a:tcPr>
+                    <a:lnL w="12700" cmpd="sng">
+                      <a:noFill/>
+                    </a:lnL>
+                    <a:lnR w="12700" cmpd="sng">
+                      <a:noFill/>
+                    </a:lnR>
+                    <a:lnT w="12700" cmpd="sng">
+                      <a:noFill/>
+                    </a:lnT>
+                    <a:lnB w="12700" cmpd="sng">
+                      <a:noFill/>
+                    </a:lnB>
+                    <a:lnTlToBr w="12700" cmpd="sng">
+                      <a:noFill/>
+                      <a:prstDash val="solid"/>
+                    </a:lnTlToBr>
+                    <a:lnBlToTr w="12700" cmpd="sng">
+                      <a:noFill/>
+                      <a:prstDash val="solid"/>
+                    </a:lnBlToTr>
+                  </a:tcPr>
+                </a:tc>
+                <a:tc>
+                  <a:txBody>
+                    <a:bodyPr/>
+                    <a:lstStyle/>
+                    <a:p>
+                      <a:r>
+                        <a:rPr lang="en-US" dirty="0"/>
+                        <a:t>5</a:t>
+                      </a:r>
+                    </a:p>
+                  </a:txBody>
+                  <a:tcPr>
+                    <a:lnL w="12700" cmpd="sng">
+                      <a:noFill/>
+                    </a:lnL>
+                    <a:lnR w="12700" cmpd="sng">
+                      <a:noFill/>
+                    </a:lnR>
+                    <a:lnT w="12700" cmpd="sng">
+                      <a:noFill/>
+                    </a:lnT>
+                    <a:lnB w="12700" cmpd="sng">
+                      <a:noFill/>
+                    </a:lnB>
+                    <a:lnTlToBr w="12700" cmpd="sng">
+                      <a:noFill/>
+                      <a:prstDash val="solid"/>
+                    </a:lnTlToBr>
+                    <a:lnBlToTr w="12700" cmpd="sng">
+                      <a:noFill/>
+                      <a:prstDash val="solid"/>
+                    </a:lnBlToTr>
+                  </a:tcPr>
+                </a:tc>
+                <a:tc>
+                  <a:txBody>
+                    <a:bodyPr/>
+                    <a:lstStyle/>
+                    <a:p>
+                      <a:r>
+                        <a:rPr lang="en-US" dirty="0"/>
+                        <a:t>6</a:t>
+                      </a:r>
+                    </a:p>
+                  </a:txBody>
+                  <a:tcPr>
+                    <a:lnL w="12700" cmpd="sng">
+                      <a:noFill/>
+                    </a:lnL>
+                    <a:lnR w="12700" cmpd="sng">
+                      <a:noFill/>
+                    </a:lnR>
+                    <a:lnT w="12700" cmpd="sng">
+                      <a:noFill/>
+                    </a:lnT>
+                    <a:lnB w="12700" cmpd="sng">
+                      <a:noFill/>
+                    </a:lnB>
+                    <a:lnTlToBr w="12700" cmpd="sng">
+                      <a:noFill/>
+                      <a:prstDash val="solid"/>
+                    </a:lnTlToBr>
+                    <a:lnBlToTr w="12700" cmpd="sng">
+                      <a:noFill/>
+                      <a:prstDash val="solid"/>
+                    </a:lnBlToTr>
+                  </a:tcPr>
+                </a:tc>
+                <a:extLst>
+                  <a:ext uri="{0D108BD9-81ED-4DB2-BD59-A6C34878D82A}">
+                    <a16:rowId xmlns:a16="http://schemas.microsoft.com/office/drawing/2014/main" val="4075591836"/>
+                  </a:ext>
+                </a:extLst>
+              </a:tr>
+            </a:tbl>
+          </a:graphicData>
+        </a:graphic>
+      </p:graphicFrame>
+      <p:sp>
+        <p:nvSpPr>
+          <p:cNvPr id="7" name="Footer Placeholder 6">
+            <a:extLst>
+              <a:ext uri="{FF2B5EF4-FFF2-40B4-BE49-F238E27FC236}">
+                <a16:creationId xmlns:a16="http://schemas.microsoft.com/office/drawing/2014/main" id="{A54A4C86-6B2D-09A0-4DE8-AD33612D4CB1}"/>
+              </a:ext>
+            </a:extLst>
+          </p:cNvPr>
+          <p:cNvSpPr>
+            <a:spLocks noGrp="1"/>
+          </p:cNvSpPr>
+          <p:nvPr>
+            <p:ph type="ftr" sz="quarter" idx="11"/>
+          </p:nvPr>
+        </p:nvSpPr>
+        <p:spPr/>
+        <p:txBody>
+          <a:bodyPr/>
+          <a:lstStyle/>
+          <a:p>
+            <a:r>
+              <a:rPr lang="en-US"/>
+              <a:t>Week 8</a:t>
+            </a:r>
+          </a:p>
+        </p:txBody>
+      </p:sp>
+      <p:sp>
+        <p:nvSpPr>
+          <p:cNvPr id="8" name="Slide Number Placeholder 7">
+            <a:extLst>
+              <a:ext uri="{FF2B5EF4-FFF2-40B4-BE49-F238E27FC236}">
+                <a16:creationId xmlns:a16="http://schemas.microsoft.com/office/drawing/2014/main" id="{DEE893C4-46F0-E43D-7309-BC3BE75E895B}"/>
+              </a:ext>
+            </a:extLst>
+          </p:cNvPr>
+          <p:cNvSpPr>
+            <a:spLocks noGrp="1"/>
+          </p:cNvSpPr>
+          <p:nvPr>
+            <p:ph type="sldNum" sz="quarter" idx="12"/>
+          </p:nvPr>
+        </p:nvSpPr>
+        <p:spPr/>
+        <p:txBody>
+          <a:bodyPr/>
+          <a:lstStyle/>
+          <a:p>
+            <a:fld id="{3EC9E123-0CB8-4CD3-A52F-DDEB9B17898B}" type="slidenum">
+              <a:rPr lang="en-US" smtClean="0"/>
+              <a:t>59</a:t>
+            </a:fld>
+            <a:endParaRPr lang="en-US"/>
+          </a:p>
+        </p:txBody>
+      </p:sp>
+    </p:spTree>
+    <p:extLst>
+      <p:ext uri="{BB962C8B-B14F-4D97-AF65-F5344CB8AC3E}">
+        <p14:creationId xmlns:p14="http://schemas.microsoft.com/office/powerpoint/2010/main" val="2835169319"/>
       </p:ext>
     </p:extLst>
   </p:cSld>
@@ -17137,6 +18353,2062 @@
     <p:extLst>
       <p:ext uri="{BB962C8B-B14F-4D97-AF65-F5344CB8AC3E}">
         <p14:creationId xmlns:p14="http://schemas.microsoft.com/office/powerpoint/2010/main" val="2948917220"/>
+      </p:ext>
+    </p:extLst>
+  </p:cSld>
+  <p:clrMapOvr>
+    <a:masterClrMapping/>
+  </p:clrMapOvr>
+</p:sld>
+</file>
+
+<file path=ppt/slides/slide60.xml><?xml version="1.0" encoding="utf-8"?>
+<p:sld xmlns:a="http://schemas.openxmlformats.org/drawingml/2006/main" xmlns:r="http://schemas.openxmlformats.org/officeDocument/2006/relationships" xmlns:p="http://schemas.openxmlformats.org/presentationml/2006/main">
+  <p:cSld>
+    <p:spTree>
+      <p:nvGrpSpPr>
+        <p:cNvPr id="1" name=""/>
+        <p:cNvGrpSpPr/>
+        <p:nvPr/>
+      </p:nvGrpSpPr>
+      <p:grpSpPr>
+        <a:xfrm>
+          <a:off x="0" y="0"/>
+          <a:ext cx="0" cy="0"/>
+          <a:chOff x="0" y="0"/>
+          <a:chExt cx="0" cy="0"/>
+        </a:xfrm>
+      </p:grpSpPr>
+      <p:sp>
+        <p:nvSpPr>
+          <p:cNvPr id="2" name="Title 1">
+            <a:extLst>
+              <a:ext uri="{FF2B5EF4-FFF2-40B4-BE49-F238E27FC236}">
+                <a16:creationId xmlns:a16="http://schemas.microsoft.com/office/drawing/2014/main" id="{D9DEBA33-121D-5E84-2792-B0DCDD20395B}"/>
+              </a:ext>
+            </a:extLst>
+          </p:cNvPr>
+          <p:cNvSpPr>
+            <a:spLocks noGrp="1"/>
+          </p:cNvSpPr>
+          <p:nvPr>
+            <p:ph type="title"/>
+          </p:nvPr>
+        </p:nvSpPr>
+        <p:spPr/>
+        <p:txBody>
+          <a:bodyPr/>
+          <a:lstStyle/>
+          <a:p>
+            <a:r>
+              <a:rPr lang="en-US" dirty="0"/>
+              <a:t>Lab</a:t>
+            </a:r>
+          </a:p>
+        </p:txBody>
+      </p:sp>
+      <p:sp>
+        <p:nvSpPr>
+          <p:cNvPr id="3" name="Content Placeholder 2">
+            <a:extLst>
+              <a:ext uri="{FF2B5EF4-FFF2-40B4-BE49-F238E27FC236}">
+                <a16:creationId xmlns:a16="http://schemas.microsoft.com/office/drawing/2014/main" id="{0784E5FB-3099-78F2-6E43-9AB8FA3B09E6}"/>
+              </a:ext>
+            </a:extLst>
+          </p:cNvPr>
+          <p:cNvSpPr>
+            <a:spLocks noGrp="1"/>
+          </p:cNvSpPr>
+          <p:nvPr>
+            <p:ph idx="1"/>
+          </p:nvPr>
+        </p:nvSpPr>
+        <p:spPr/>
+        <p:txBody>
+          <a:bodyPr>
+            <a:normAutofit lnSpcReduction="10000"/>
+          </a:bodyPr>
+          <a:lstStyle/>
+          <a:p>
+            <a:r>
+              <a:rPr lang="en-US" dirty="0"/>
+              <a:t>Q1:average of 5 numbers</a:t>
+            </a:r>
+          </a:p>
+          <a:p>
+            <a:pPr lvl="1"/>
+            <a:r>
+              <a:rPr lang="en-US" dirty="0"/>
+              <a:t>Get 5 numbers from user </a:t>
+            </a:r>
+          </a:p>
+          <a:p>
+            <a:pPr lvl="2"/>
+            <a:r>
+              <a:rPr lang="en-US" dirty="0"/>
+              <a:t>Print the average of the 5 numbers</a:t>
+            </a:r>
+          </a:p>
+          <a:p>
+            <a:pPr lvl="2"/>
+            <a:r>
+              <a:rPr lang="en-US" dirty="0"/>
+              <a:t>Hints</a:t>
+            </a:r>
+          </a:p>
+          <a:p>
+            <a:pPr lvl="3"/>
+            <a:r>
+              <a:rPr lang="en-US" dirty="0" err="1"/>
+              <a:t>cin</a:t>
+            </a:r>
+            <a:r>
+              <a:rPr lang="en-US" dirty="0"/>
+              <a:t>&gt;&gt;num[</a:t>
+            </a:r>
+            <a:r>
+              <a:rPr lang="en-US" dirty="0" err="1"/>
+              <a:t>i</a:t>
+            </a:r>
+            <a:r>
+              <a:rPr lang="en-US" dirty="0"/>
+              <a:t>];</a:t>
+            </a:r>
+          </a:p>
+          <a:p>
+            <a:pPr lvl="3"/>
+            <a:r>
+              <a:rPr lang="en-US" dirty="0"/>
+              <a:t>sum = sum + num[</a:t>
+            </a:r>
+            <a:r>
+              <a:rPr lang="en-US" dirty="0" err="1"/>
+              <a:t>i</a:t>
+            </a:r>
+            <a:r>
+              <a:rPr lang="en-US" dirty="0"/>
+              <a:t>];</a:t>
+            </a:r>
+          </a:p>
+          <a:p>
+            <a:pPr lvl="3"/>
+            <a:r>
+              <a:rPr lang="en-US" dirty="0"/>
+              <a:t>loops</a:t>
+            </a:r>
+          </a:p>
+          <a:p>
+            <a:pPr lvl="2"/>
+            <a:r>
+              <a:rPr lang="en-US" dirty="0"/>
+              <a:t>* Consider the right data type for average…</a:t>
+            </a:r>
+          </a:p>
+          <a:p>
+            <a:r>
+              <a:rPr lang="en-US" dirty="0"/>
+              <a:t>Q2 : search whether a number exists in above array </a:t>
+            </a:r>
+          </a:p>
+          <a:p>
+            <a:pPr lvl="1"/>
+            <a:r>
+              <a:rPr lang="en-US" dirty="0"/>
+              <a:t>(After printing average In the above entered numbers )</a:t>
+            </a:r>
+          </a:p>
+          <a:p>
+            <a:pPr lvl="1"/>
+            <a:r>
+              <a:rPr lang="en-US" dirty="0"/>
+              <a:t>Get user to enter a search num </a:t>
+            </a:r>
+          </a:p>
+          <a:p>
+            <a:pPr lvl="1"/>
+            <a:r>
+              <a:rPr lang="en-US" dirty="0"/>
+              <a:t>Return at what index location it exists in the array.</a:t>
+            </a:r>
+          </a:p>
+          <a:p>
+            <a:pPr lvl="1"/>
+            <a:endParaRPr lang="en-US" dirty="0"/>
+          </a:p>
+          <a:p>
+            <a:pPr lvl="1"/>
+            <a:endParaRPr lang="en-US" dirty="0"/>
+          </a:p>
+        </p:txBody>
+      </p:sp>
+      <p:sp>
+        <p:nvSpPr>
+          <p:cNvPr id="4" name="Footer Placeholder 3">
+            <a:extLst>
+              <a:ext uri="{FF2B5EF4-FFF2-40B4-BE49-F238E27FC236}">
+                <a16:creationId xmlns:a16="http://schemas.microsoft.com/office/drawing/2014/main" id="{CFAD5227-5900-5EB0-C79F-3D89B24F34CC}"/>
+              </a:ext>
+            </a:extLst>
+          </p:cNvPr>
+          <p:cNvSpPr>
+            <a:spLocks noGrp="1"/>
+          </p:cNvSpPr>
+          <p:nvPr>
+            <p:ph type="ftr" sz="quarter" idx="11"/>
+          </p:nvPr>
+        </p:nvSpPr>
+        <p:spPr/>
+        <p:txBody>
+          <a:bodyPr/>
+          <a:lstStyle/>
+          <a:p>
+            <a:r>
+              <a:rPr lang="en-US"/>
+              <a:t>Week 8</a:t>
+            </a:r>
+          </a:p>
+        </p:txBody>
+      </p:sp>
+      <p:sp>
+        <p:nvSpPr>
+          <p:cNvPr id="5" name="Slide Number Placeholder 4">
+            <a:extLst>
+              <a:ext uri="{FF2B5EF4-FFF2-40B4-BE49-F238E27FC236}">
+                <a16:creationId xmlns:a16="http://schemas.microsoft.com/office/drawing/2014/main" id="{3B2AD682-58DA-C97B-7528-0131668F9E27}"/>
+              </a:ext>
+            </a:extLst>
+          </p:cNvPr>
+          <p:cNvSpPr>
+            <a:spLocks noGrp="1"/>
+          </p:cNvSpPr>
+          <p:nvPr>
+            <p:ph type="sldNum" sz="quarter" idx="12"/>
+          </p:nvPr>
+        </p:nvSpPr>
+        <p:spPr/>
+        <p:txBody>
+          <a:bodyPr/>
+          <a:lstStyle/>
+          <a:p>
+            <a:fld id="{3EC9E123-0CB8-4CD3-A52F-DDEB9B17898B}" type="slidenum">
+              <a:rPr lang="en-US" smtClean="0"/>
+              <a:t>60</a:t>
+            </a:fld>
+            <a:endParaRPr lang="en-US"/>
+          </a:p>
+        </p:txBody>
+      </p:sp>
+    </p:spTree>
+    <p:extLst>
+      <p:ext uri="{BB962C8B-B14F-4D97-AF65-F5344CB8AC3E}">
+        <p14:creationId xmlns:p14="http://schemas.microsoft.com/office/powerpoint/2010/main" val="200136004"/>
+      </p:ext>
+    </p:extLst>
+  </p:cSld>
+  <p:clrMapOvr>
+    <a:masterClrMapping/>
+  </p:clrMapOvr>
+</p:sld>
+</file>
+
+<file path=ppt/slides/slide61.xml><?xml version="1.0" encoding="utf-8"?>
+<p:sld xmlns:a="http://schemas.openxmlformats.org/drawingml/2006/main" xmlns:r="http://schemas.openxmlformats.org/officeDocument/2006/relationships" xmlns:p="http://schemas.openxmlformats.org/presentationml/2006/main">
+  <p:cSld>
+    <p:spTree>
+      <p:nvGrpSpPr>
+        <p:cNvPr id="1" name=""/>
+        <p:cNvGrpSpPr/>
+        <p:nvPr/>
+      </p:nvGrpSpPr>
+      <p:grpSpPr>
+        <a:xfrm>
+          <a:off x="0" y="0"/>
+          <a:ext cx="0" cy="0"/>
+          <a:chOff x="0" y="0"/>
+          <a:chExt cx="0" cy="0"/>
+        </a:xfrm>
+      </p:grpSpPr>
+      <p:sp>
+        <p:nvSpPr>
+          <p:cNvPr id="2" name="Title 1">
+            <a:extLst>
+              <a:ext uri="{FF2B5EF4-FFF2-40B4-BE49-F238E27FC236}">
+                <a16:creationId xmlns:a16="http://schemas.microsoft.com/office/drawing/2014/main" id="{9DA941D1-AE79-0E37-8933-B650171AFB68}"/>
+              </a:ext>
+            </a:extLst>
+          </p:cNvPr>
+          <p:cNvSpPr>
+            <a:spLocks noGrp="1"/>
+          </p:cNvSpPr>
+          <p:nvPr>
+            <p:ph type="title"/>
+          </p:nvPr>
+        </p:nvSpPr>
+        <p:spPr/>
+        <p:txBody>
+          <a:bodyPr/>
+          <a:lstStyle/>
+          <a:p>
+            <a:r>
+              <a:rPr lang="en-US" dirty="0"/>
+              <a:t>Names are sequence of characters</a:t>
+            </a:r>
+          </a:p>
+        </p:txBody>
+      </p:sp>
+      <p:sp>
+        <p:nvSpPr>
+          <p:cNvPr id="3" name="Content Placeholder 2">
+            <a:extLst>
+              <a:ext uri="{FF2B5EF4-FFF2-40B4-BE49-F238E27FC236}">
+                <a16:creationId xmlns:a16="http://schemas.microsoft.com/office/drawing/2014/main" id="{7438EEE2-73BD-6E50-9DEF-FC96FB8C7401}"/>
+              </a:ext>
+            </a:extLst>
+          </p:cNvPr>
+          <p:cNvSpPr>
+            <a:spLocks noGrp="1"/>
+          </p:cNvSpPr>
+          <p:nvPr>
+            <p:ph idx="1"/>
+          </p:nvPr>
+        </p:nvSpPr>
+        <p:spPr/>
+        <p:txBody>
+          <a:bodyPr/>
+          <a:lstStyle/>
+          <a:p>
+            <a:r>
+              <a:rPr lang="en-US" dirty="0"/>
+              <a:t>char name[100];</a:t>
+            </a:r>
+          </a:p>
+          <a:p>
+            <a:r>
+              <a:rPr lang="en-US" dirty="0"/>
+              <a:t>Characters arrays are </a:t>
+            </a:r>
+            <a:r>
+              <a:rPr lang="en-US" b="1" dirty="0"/>
+              <a:t>‘null’</a:t>
+            </a:r>
+            <a:r>
+              <a:rPr lang="en-US" dirty="0"/>
+              <a:t> terminated</a:t>
+            </a:r>
+          </a:p>
+          <a:p>
+            <a:pPr lvl="1"/>
+            <a:r>
+              <a:rPr lang="en-US" dirty="0" err="1"/>
+              <a:t>E.g</a:t>
+            </a:r>
+            <a:r>
+              <a:rPr lang="en-US" dirty="0"/>
+              <a:t> name = “ChatGPT”;</a:t>
+            </a:r>
+          </a:p>
+          <a:p>
+            <a:pPr lvl="1"/>
+            <a:r>
+              <a:rPr lang="en-US" dirty="0"/>
+              <a:t>if (name[7]== ‘/0’) would be true. </a:t>
+            </a:r>
+          </a:p>
+          <a:p>
+            <a:r>
+              <a:rPr lang="en-US" dirty="0"/>
+              <a:t>So if names are array of chars…</a:t>
+            </a:r>
+          </a:p>
+          <a:p>
+            <a:pPr lvl="1"/>
+            <a:r>
+              <a:rPr lang="en-US" dirty="0"/>
+              <a:t>What is array of names ??</a:t>
+            </a:r>
+          </a:p>
+        </p:txBody>
+      </p:sp>
+      <p:sp>
+        <p:nvSpPr>
+          <p:cNvPr id="4" name="Footer Placeholder 3">
+            <a:extLst>
+              <a:ext uri="{FF2B5EF4-FFF2-40B4-BE49-F238E27FC236}">
+                <a16:creationId xmlns:a16="http://schemas.microsoft.com/office/drawing/2014/main" id="{BB6F3241-B9DB-8500-D573-C1F19380646C}"/>
+              </a:ext>
+            </a:extLst>
+          </p:cNvPr>
+          <p:cNvSpPr>
+            <a:spLocks noGrp="1"/>
+          </p:cNvSpPr>
+          <p:nvPr>
+            <p:ph type="ftr" sz="quarter" idx="11"/>
+          </p:nvPr>
+        </p:nvSpPr>
+        <p:spPr/>
+        <p:txBody>
+          <a:bodyPr/>
+          <a:lstStyle/>
+          <a:p>
+            <a:r>
+              <a:rPr lang="en-US"/>
+              <a:t>Week 8</a:t>
+            </a:r>
+          </a:p>
+        </p:txBody>
+      </p:sp>
+      <p:sp>
+        <p:nvSpPr>
+          <p:cNvPr id="5" name="Slide Number Placeholder 4">
+            <a:extLst>
+              <a:ext uri="{FF2B5EF4-FFF2-40B4-BE49-F238E27FC236}">
+                <a16:creationId xmlns:a16="http://schemas.microsoft.com/office/drawing/2014/main" id="{0535CD53-FEDB-81A6-5896-F38321D41D8C}"/>
+              </a:ext>
+            </a:extLst>
+          </p:cNvPr>
+          <p:cNvSpPr>
+            <a:spLocks noGrp="1"/>
+          </p:cNvSpPr>
+          <p:nvPr>
+            <p:ph type="sldNum" sz="quarter" idx="12"/>
+          </p:nvPr>
+        </p:nvSpPr>
+        <p:spPr/>
+        <p:txBody>
+          <a:bodyPr/>
+          <a:lstStyle/>
+          <a:p>
+            <a:fld id="{3EC9E123-0CB8-4CD3-A52F-DDEB9B17898B}" type="slidenum">
+              <a:rPr lang="en-US" smtClean="0"/>
+              <a:t>61</a:t>
+            </a:fld>
+            <a:endParaRPr lang="en-US"/>
+          </a:p>
+        </p:txBody>
+      </p:sp>
+    </p:spTree>
+    <p:extLst>
+      <p:ext uri="{BB962C8B-B14F-4D97-AF65-F5344CB8AC3E}">
+        <p14:creationId xmlns:p14="http://schemas.microsoft.com/office/powerpoint/2010/main" val="2768744603"/>
+      </p:ext>
+    </p:extLst>
+  </p:cSld>
+  <p:clrMapOvr>
+    <a:masterClrMapping/>
+  </p:clrMapOvr>
+</p:sld>
+</file>
+
+<file path=ppt/slides/slide62.xml><?xml version="1.0" encoding="utf-8"?>
+<p:sld xmlns:a="http://schemas.openxmlformats.org/drawingml/2006/main" xmlns:r="http://schemas.openxmlformats.org/officeDocument/2006/relationships" xmlns:p="http://schemas.openxmlformats.org/presentationml/2006/main">
+  <p:cSld>
+    <p:spTree>
+      <p:nvGrpSpPr>
+        <p:cNvPr id="1" name=""/>
+        <p:cNvGrpSpPr/>
+        <p:nvPr/>
+      </p:nvGrpSpPr>
+      <p:grpSpPr>
+        <a:xfrm>
+          <a:off x="0" y="0"/>
+          <a:ext cx="0" cy="0"/>
+          <a:chOff x="0" y="0"/>
+          <a:chExt cx="0" cy="0"/>
+        </a:xfrm>
+      </p:grpSpPr>
+      <p:sp>
+        <p:nvSpPr>
+          <p:cNvPr id="2" name="Title 1">
+            <a:extLst>
+              <a:ext uri="{FF2B5EF4-FFF2-40B4-BE49-F238E27FC236}">
+                <a16:creationId xmlns:a16="http://schemas.microsoft.com/office/drawing/2014/main" id="{21E1C272-8E9B-4F64-9D95-1BAFBDB31248}"/>
+              </a:ext>
+            </a:extLst>
+          </p:cNvPr>
+          <p:cNvSpPr>
+            <a:spLocks noGrp="1"/>
+          </p:cNvSpPr>
+          <p:nvPr>
+            <p:ph type="title"/>
+          </p:nvPr>
+        </p:nvSpPr>
+        <p:spPr/>
+        <p:txBody>
+          <a:bodyPr/>
+          <a:lstStyle/>
+          <a:p>
+            <a:r>
+              <a:rPr lang="en-US" dirty="0"/>
+              <a:t>Double dimension arrays</a:t>
+            </a:r>
+          </a:p>
+        </p:txBody>
+      </p:sp>
+      <p:sp>
+        <p:nvSpPr>
+          <p:cNvPr id="3" name="Content Placeholder 2">
+            <a:extLst>
+              <a:ext uri="{FF2B5EF4-FFF2-40B4-BE49-F238E27FC236}">
+                <a16:creationId xmlns:a16="http://schemas.microsoft.com/office/drawing/2014/main" id="{EFBAB157-A403-25FE-0545-667A93803180}"/>
+              </a:ext>
+            </a:extLst>
+          </p:cNvPr>
+          <p:cNvSpPr>
+            <a:spLocks noGrp="1"/>
+          </p:cNvSpPr>
+          <p:nvPr>
+            <p:ph idx="1"/>
+          </p:nvPr>
+        </p:nvSpPr>
+        <p:spPr/>
+        <p:txBody>
+          <a:bodyPr/>
+          <a:lstStyle/>
+          <a:p>
+            <a:r>
+              <a:rPr lang="en-US" dirty="0"/>
+              <a:t>int </a:t>
+            </a:r>
+            <a:r>
+              <a:rPr lang="en-US" dirty="0" err="1"/>
+              <a:t>nums</a:t>
+            </a:r>
+            <a:r>
+              <a:rPr lang="en-US" dirty="0"/>
+              <a:t>[5][3] ;</a:t>
+            </a:r>
+          </a:p>
+          <a:p>
+            <a:pPr lvl="1"/>
+            <a:r>
+              <a:rPr lang="en-US" dirty="0"/>
+              <a:t>5 row of 3 integers each </a:t>
+            </a:r>
+          </a:p>
+          <a:p>
+            <a:pPr lvl="1"/>
+            <a:r>
+              <a:rPr lang="en-US" dirty="0"/>
+              <a:t>5 x 3 = 15 total integers</a:t>
+            </a:r>
+          </a:p>
+          <a:p>
+            <a:r>
+              <a:rPr lang="en-US" dirty="0"/>
+              <a:t>char names[15][100];</a:t>
+            </a:r>
+          </a:p>
+          <a:p>
+            <a:pPr lvl="1"/>
+            <a:r>
+              <a:rPr lang="en-US" dirty="0"/>
+              <a:t>15 names … max size of 100 each. </a:t>
+            </a:r>
+          </a:p>
+          <a:p>
+            <a:pPr lvl="1"/>
+            <a:r>
+              <a:rPr lang="en-US" dirty="0"/>
+              <a:t>15 x 100 = 1500 characters</a:t>
+            </a:r>
+          </a:p>
+          <a:p>
+            <a:r>
+              <a:rPr lang="en-US" dirty="0"/>
+              <a:t>How to create 10 rows of 100 floats each ?</a:t>
+            </a:r>
+          </a:p>
+          <a:p>
+            <a:pPr lvl="1"/>
+            <a:r>
+              <a:rPr lang="en-US" dirty="0"/>
+              <a:t>What is the total number of floats used ?</a:t>
+            </a:r>
+          </a:p>
+          <a:p>
+            <a:pPr lvl="1"/>
+            <a:r>
+              <a:rPr lang="en-US" dirty="0"/>
+              <a:t>What is the total memory size.</a:t>
+            </a:r>
+          </a:p>
+          <a:p>
+            <a:endParaRPr lang="en-US" dirty="0"/>
+          </a:p>
+          <a:p>
+            <a:endParaRPr lang="en-US" dirty="0"/>
+          </a:p>
+        </p:txBody>
+      </p:sp>
+      <p:sp>
+        <p:nvSpPr>
+          <p:cNvPr id="4" name="Footer Placeholder 3">
+            <a:extLst>
+              <a:ext uri="{FF2B5EF4-FFF2-40B4-BE49-F238E27FC236}">
+                <a16:creationId xmlns:a16="http://schemas.microsoft.com/office/drawing/2014/main" id="{C36B9ECF-7CAF-F5DA-E6B9-79B63940021F}"/>
+              </a:ext>
+            </a:extLst>
+          </p:cNvPr>
+          <p:cNvSpPr>
+            <a:spLocks noGrp="1"/>
+          </p:cNvSpPr>
+          <p:nvPr>
+            <p:ph type="ftr" sz="quarter" idx="11"/>
+          </p:nvPr>
+        </p:nvSpPr>
+        <p:spPr/>
+        <p:txBody>
+          <a:bodyPr/>
+          <a:lstStyle/>
+          <a:p>
+            <a:r>
+              <a:rPr lang="en-US"/>
+              <a:t>Week 8</a:t>
+            </a:r>
+          </a:p>
+        </p:txBody>
+      </p:sp>
+      <p:sp>
+        <p:nvSpPr>
+          <p:cNvPr id="5" name="Slide Number Placeholder 4">
+            <a:extLst>
+              <a:ext uri="{FF2B5EF4-FFF2-40B4-BE49-F238E27FC236}">
+                <a16:creationId xmlns:a16="http://schemas.microsoft.com/office/drawing/2014/main" id="{8274AA82-234C-569C-6B4E-A744342D39AD}"/>
+              </a:ext>
+            </a:extLst>
+          </p:cNvPr>
+          <p:cNvSpPr>
+            <a:spLocks noGrp="1"/>
+          </p:cNvSpPr>
+          <p:nvPr>
+            <p:ph type="sldNum" sz="quarter" idx="12"/>
+          </p:nvPr>
+        </p:nvSpPr>
+        <p:spPr/>
+        <p:txBody>
+          <a:bodyPr/>
+          <a:lstStyle/>
+          <a:p>
+            <a:fld id="{3EC9E123-0CB8-4CD3-A52F-DDEB9B17898B}" type="slidenum">
+              <a:rPr lang="en-US" smtClean="0"/>
+              <a:t>62</a:t>
+            </a:fld>
+            <a:endParaRPr lang="en-US"/>
+          </a:p>
+        </p:txBody>
+      </p:sp>
+    </p:spTree>
+    <p:extLst>
+      <p:ext uri="{BB962C8B-B14F-4D97-AF65-F5344CB8AC3E}">
+        <p14:creationId xmlns:p14="http://schemas.microsoft.com/office/powerpoint/2010/main" val="2486881191"/>
+      </p:ext>
+    </p:extLst>
+  </p:cSld>
+  <p:clrMapOvr>
+    <a:masterClrMapping/>
+  </p:clrMapOvr>
+</p:sld>
+</file>
+
+<file path=ppt/slides/slide63.xml><?xml version="1.0" encoding="utf-8"?>
+<p:sld xmlns:a="http://schemas.openxmlformats.org/drawingml/2006/main" xmlns:r="http://schemas.openxmlformats.org/officeDocument/2006/relationships" xmlns:p="http://schemas.openxmlformats.org/presentationml/2006/main">
+  <p:cSld>
+    <p:spTree>
+      <p:nvGrpSpPr>
+        <p:cNvPr id="1" name=""/>
+        <p:cNvGrpSpPr/>
+        <p:nvPr/>
+      </p:nvGrpSpPr>
+      <p:grpSpPr>
+        <a:xfrm>
+          <a:off x="0" y="0"/>
+          <a:ext cx="0" cy="0"/>
+          <a:chOff x="0" y="0"/>
+          <a:chExt cx="0" cy="0"/>
+        </a:xfrm>
+      </p:grpSpPr>
+      <p:sp>
+        <p:nvSpPr>
+          <p:cNvPr id="2" name="Title 1">
+            <a:extLst>
+              <a:ext uri="{FF2B5EF4-FFF2-40B4-BE49-F238E27FC236}">
+                <a16:creationId xmlns:a16="http://schemas.microsoft.com/office/drawing/2014/main" id="{9A00239E-4125-B7AD-6D55-FC30CD6391AB}"/>
+              </a:ext>
+            </a:extLst>
+          </p:cNvPr>
+          <p:cNvSpPr>
+            <a:spLocks noGrp="1"/>
+          </p:cNvSpPr>
+          <p:nvPr>
+            <p:ph type="title"/>
+          </p:nvPr>
+        </p:nvSpPr>
+        <p:spPr/>
+        <p:txBody>
+          <a:bodyPr/>
+          <a:lstStyle/>
+          <a:p>
+            <a:r>
+              <a:rPr lang="en-US" dirty="0"/>
+              <a:t>Memory layout : double dimension</a:t>
+            </a:r>
+          </a:p>
+        </p:txBody>
+      </p:sp>
+      <p:sp>
+        <p:nvSpPr>
+          <p:cNvPr id="3" name="Content Placeholder 2">
+            <a:extLst>
+              <a:ext uri="{FF2B5EF4-FFF2-40B4-BE49-F238E27FC236}">
+                <a16:creationId xmlns:a16="http://schemas.microsoft.com/office/drawing/2014/main" id="{1FF7F06E-E5D7-EC84-0429-98A456427408}"/>
+              </a:ext>
+            </a:extLst>
+          </p:cNvPr>
+          <p:cNvSpPr>
+            <a:spLocks noGrp="1"/>
+          </p:cNvSpPr>
+          <p:nvPr>
+            <p:ph idx="1"/>
+          </p:nvPr>
+        </p:nvSpPr>
+        <p:spPr>
+          <a:xfrm>
+            <a:off x="854704" y="1825625"/>
+            <a:ext cx="10515600" cy="4351338"/>
+          </a:xfrm>
+        </p:spPr>
+        <p:txBody>
+          <a:bodyPr/>
+          <a:lstStyle/>
+          <a:p>
+            <a:r>
+              <a:rPr lang="en-US" dirty="0"/>
+              <a:t>int </a:t>
+            </a:r>
+            <a:r>
+              <a:rPr lang="en-US" dirty="0" err="1"/>
+              <a:t>nums</a:t>
+            </a:r>
+            <a:r>
+              <a:rPr lang="en-US" dirty="0"/>
+              <a:t>[5][3] ;</a:t>
+            </a:r>
+          </a:p>
+          <a:p>
+            <a:pPr lvl="1"/>
+            <a:r>
+              <a:rPr lang="en-US" dirty="0"/>
+              <a:t>2 dimension = 2d Matrix </a:t>
+            </a:r>
+          </a:p>
+          <a:p>
+            <a:pPr lvl="1"/>
+            <a:r>
+              <a:rPr lang="en-US" dirty="0"/>
+              <a:t>Rows are horizontal</a:t>
+            </a:r>
+          </a:p>
+          <a:p>
+            <a:pPr lvl="1"/>
+            <a:r>
+              <a:rPr lang="en-US" dirty="0"/>
+              <a:t>Columns are vertical </a:t>
+            </a:r>
+          </a:p>
+          <a:p>
+            <a:pPr lvl="1"/>
+            <a:r>
+              <a:rPr lang="en-US" dirty="0"/>
+              <a:t>Total 5x3 = 5 cells</a:t>
+            </a:r>
+          </a:p>
+          <a:p>
+            <a:endParaRPr lang="en-US" dirty="0"/>
+          </a:p>
+          <a:p>
+            <a:endParaRPr lang="en-US" dirty="0"/>
+          </a:p>
+        </p:txBody>
+      </p:sp>
+      <p:graphicFrame>
+        <p:nvGraphicFramePr>
+          <p:cNvPr id="5" name="Table 4">
+            <a:extLst>
+              <a:ext uri="{FF2B5EF4-FFF2-40B4-BE49-F238E27FC236}">
+                <a16:creationId xmlns:a16="http://schemas.microsoft.com/office/drawing/2014/main" id="{94C41612-4D6D-6719-E5EE-FA2593863267}"/>
+              </a:ext>
+            </a:extLst>
+          </p:cNvPr>
+          <p:cNvGraphicFramePr>
+            <a:graphicFrameLocks noGrp="1"/>
+          </p:cNvGraphicFramePr>
+          <p:nvPr>
+            <p:extLst>
+              <p:ext uri="{D42A27DB-BD31-4B8C-83A1-F6EECF244321}">
+                <p14:modId xmlns:p14="http://schemas.microsoft.com/office/powerpoint/2010/main" val="4256368292"/>
+              </p:ext>
+            </p:extLst>
+          </p:nvPr>
+        </p:nvGraphicFramePr>
+        <p:xfrm>
+          <a:off x="6412974" y="2788655"/>
+          <a:ext cx="1920567" cy="1879516"/>
+        </p:xfrm>
+        <a:graphic>
+          <a:graphicData uri="http://schemas.openxmlformats.org/drawingml/2006/table">
+            <a:tbl>
+              <a:tblPr firstRow="1" bandRow="1">
+                <a:tableStyleId>{5940675A-B579-460E-94D1-54222C63F5DA}</a:tableStyleId>
+              </a:tblPr>
+              <a:tblGrid>
+                <a:gridCol w="640189">
+                  <a:extLst>
+                    <a:ext uri="{9D8B030D-6E8A-4147-A177-3AD203B41FA5}">
+                      <a16:colId xmlns:a16="http://schemas.microsoft.com/office/drawing/2014/main" val="667305362"/>
+                    </a:ext>
+                  </a:extLst>
+                </a:gridCol>
+                <a:gridCol w="640189">
+                  <a:extLst>
+                    <a:ext uri="{9D8B030D-6E8A-4147-A177-3AD203B41FA5}">
+                      <a16:colId xmlns:a16="http://schemas.microsoft.com/office/drawing/2014/main" val="3266066857"/>
+                    </a:ext>
+                  </a:extLst>
+                </a:gridCol>
+                <a:gridCol w="640189">
+                  <a:extLst>
+                    <a:ext uri="{9D8B030D-6E8A-4147-A177-3AD203B41FA5}">
+                      <a16:colId xmlns:a16="http://schemas.microsoft.com/office/drawing/2014/main" val="3298742964"/>
+                    </a:ext>
+                  </a:extLst>
+                </a:gridCol>
+              </a:tblGrid>
+              <a:tr h="371772">
+                <a:tc>
+                  <a:txBody>
+                    <a:bodyPr/>
+                    <a:lstStyle/>
+                    <a:p>
+                      <a:endParaRPr lang="en-US" dirty="0"/>
+                    </a:p>
+                  </a:txBody>
+                  <a:tcPr>
+                    <a:solidFill>
+                      <a:schemeClr val="bg1">
+                        <a:lumMod val="50000"/>
+                      </a:schemeClr>
+                    </a:solidFill>
+                  </a:tcPr>
+                </a:tc>
+                <a:tc>
+                  <a:txBody>
+                    <a:bodyPr/>
+                    <a:lstStyle/>
+                    <a:p>
+                      <a:endParaRPr lang="en-US" dirty="0"/>
+                    </a:p>
+                  </a:txBody>
+                  <a:tcPr>
+                    <a:solidFill>
+                      <a:schemeClr val="bg1">
+                        <a:lumMod val="50000"/>
+                      </a:schemeClr>
+                    </a:solidFill>
+                  </a:tcPr>
+                </a:tc>
+                <a:tc>
+                  <a:txBody>
+                    <a:bodyPr/>
+                    <a:lstStyle/>
+                    <a:p>
+                      <a:endParaRPr lang="en-US" dirty="0"/>
+                    </a:p>
+                  </a:txBody>
+                  <a:tcPr>
+                    <a:solidFill>
+                      <a:schemeClr val="bg1">
+                        <a:lumMod val="50000"/>
+                      </a:schemeClr>
+                    </a:solidFill>
+                  </a:tcPr>
+                </a:tc>
+                <a:extLst>
+                  <a:ext uri="{0D108BD9-81ED-4DB2-BD59-A6C34878D82A}">
+                    <a16:rowId xmlns:a16="http://schemas.microsoft.com/office/drawing/2014/main" val="998759530"/>
+                  </a:ext>
+                </a:extLst>
+              </a:tr>
+              <a:tr h="376936">
+                <a:tc>
+                  <a:txBody>
+                    <a:bodyPr/>
+                    <a:lstStyle/>
+                    <a:p>
+                      <a:endParaRPr lang="en-US" dirty="0"/>
+                    </a:p>
+                  </a:txBody>
+                  <a:tcPr>
+                    <a:solidFill>
+                      <a:schemeClr val="bg1">
+                        <a:lumMod val="50000"/>
+                      </a:schemeClr>
+                    </a:solidFill>
+                  </a:tcPr>
+                </a:tc>
+                <a:tc>
+                  <a:txBody>
+                    <a:bodyPr/>
+                    <a:lstStyle/>
+                    <a:p>
+                      <a:endParaRPr lang="en-US" dirty="0"/>
+                    </a:p>
+                  </a:txBody>
+                  <a:tcPr>
+                    <a:solidFill>
+                      <a:schemeClr val="bg1">
+                        <a:lumMod val="50000"/>
+                      </a:schemeClr>
+                    </a:solidFill>
+                  </a:tcPr>
+                </a:tc>
+                <a:tc>
+                  <a:txBody>
+                    <a:bodyPr/>
+                    <a:lstStyle/>
+                    <a:p>
+                      <a:endParaRPr lang="en-US"/>
+                    </a:p>
+                  </a:txBody>
+                  <a:tcPr>
+                    <a:solidFill>
+                      <a:schemeClr val="bg1">
+                        <a:lumMod val="50000"/>
+                      </a:schemeClr>
+                    </a:solidFill>
+                  </a:tcPr>
+                </a:tc>
+                <a:extLst>
+                  <a:ext uri="{0D108BD9-81ED-4DB2-BD59-A6C34878D82A}">
+                    <a16:rowId xmlns:a16="http://schemas.microsoft.com/office/drawing/2014/main" val="3671070608"/>
+                  </a:ext>
+                </a:extLst>
+              </a:tr>
+              <a:tr h="376936">
+                <a:tc>
+                  <a:txBody>
+                    <a:bodyPr/>
+                    <a:lstStyle/>
+                    <a:p>
+                      <a:endParaRPr lang="en-US"/>
+                    </a:p>
+                  </a:txBody>
+                  <a:tcPr>
+                    <a:solidFill>
+                      <a:schemeClr val="bg1">
+                        <a:lumMod val="50000"/>
+                      </a:schemeClr>
+                    </a:solidFill>
+                  </a:tcPr>
+                </a:tc>
+                <a:tc>
+                  <a:txBody>
+                    <a:bodyPr/>
+                    <a:lstStyle/>
+                    <a:p>
+                      <a:endParaRPr lang="en-US" dirty="0"/>
+                    </a:p>
+                  </a:txBody>
+                  <a:tcPr>
+                    <a:solidFill>
+                      <a:schemeClr val="bg1">
+                        <a:lumMod val="50000"/>
+                      </a:schemeClr>
+                    </a:solidFill>
+                  </a:tcPr>
+                </a:tc>
+                <a:tc>
+                  <a:txBody>
+                    <a:bodyPr/>
+                    <a:lstStyle/>
+                    <a:p>
+                      <a:endParaRPr lang="en-US" dirty="0"/>
+                    </a:p>
+                  </a:txBody>
+                  <a:tcPr>
+                    <a:solidFill>
+                      <a:schemeClr val="bg1">
+                        <a:lumMod val="50000"/>
+                      </a:schemeClr>
+                    </a:solidFill>
+                  </a:tcPr>
+                </a:tc>
+                <a:extLst>
+                  <a:ext uri="{0D108BD9-81ED-4DB2-BD59-A6C34878D82A}">
+                    <a16:rowId xmlns:a16="http://schemas.microsoft.com/office/drawing/2014/main" val="184557809"/>
+                  </a:ext>
+                </a:extLst>
+              </a:tr>
+              <a:tr h="376936">
+                <a:tc>
+                  <a:txBody>
+                    <a:bodyPr/>
+                    <a:lstStyle/>
+                    <a:p>
+                      <a:endParaRPr lang="en-US"/>
+                    </a:p>
+                  </a:txBody>
+                  <a:tcPr>
+                    <a:solidFill>
+                      <a:schemeClr val="bg1">
+                        <a:lumMod val="50000"/>
+                      </a:schemeClr>
+                    </a:solidFill>
+                  </a:tcPr>
+                </a:tc>
+                <a:tc>
+                  <a:txBody>
+                    <a:bodyPr/>
+                    <a:lstStyle/>
+                    <a:p>
+                      <a:endParaRPr lang="en-US"/>
+                    </a:p>
+                  </a:txBody>
+                  <a:tcPr>
+                    <a:solidFill>
+                      <a:schemeClr val="bg1">
+                        <a:lumMod val="50000"/>
+                      </a:schemeClr>
+                    </a:solidFill>
+                  </a:tcPr>
+                </a:tc>
+                <a:tc>
+                  <a:txBody>
+                    <a:bodyPr/>
+                    <a:lstStyle/>
+                    <a:p>
+                      <a:endParaRPr lang="en-US" dirty="0"/>
+                    </a:p>
+                  </a:txBody>
+                  <a:tcPr>
+                    <a:solidFill>
+                      <a:schemeClr val="bg1">
+                        <a:lumMod val="50000"/>
+                      </a:schemeClr>
+                    </a:solidFill>
+                  </a:tcPr>
+                </a:tc>
+                <a:extLst>
+                  <a:ext uri="{0D108BD9-81ED-4DB2-BD59-A6C34878D82A}">
+                    <a16:rowId xmlns:a16="http://schemas.microsoft.com/office/drawing/2014/main" val="19312108"/>
+                  </a:ext>
+                </a:extLst>
+              </a:tr>
+              <a:tr h="376936">
+                <a:tc>
+                  <a:txBody>
+                    <a:bodyPr/>
+                    <a:lstStyle/>
+                    <a:p>
+                      <a:endParaRPr lang="en-US"/>
+                    </a:p>
+                  </a:txBody>
+                  <a:tcPr>
+                    <a:solidFill>
+                      <a:schemeClr val="bg1">
+                        <a:lumMod val="50000"/>
+                      </a:schemeClr>
+                    </a:solidFill>
+                  </a:tcPr>
+                </a:tc>
+                <a:tc>
+                  <a:txBody>
+                    <a:bodyPr/>
+                    <a:lstStyle/>
+                    <a:p>
+                      <a:endParaRPr lang="en-US"/>
+                    </a:p>
+                  </a:txBody>
+                  <a:tcPr>
+                    <a:solidFill>
+                      <a:schemeClr val="bg1">
+                        <a:lumMod val="50000"/>
+                      </a:schemeClr>
+                    </a:solidFill>
+                  </a:tcPr>
+                </a:tc>
+                <a:tc>
+                  <a:txBody>
+                    <a:bodyPr/>
+                    <a:lstStyle/>
+                    <a:p>
+                      <a:endParaRPr lang="en-US" dirty="0"/>
+                    </a:p>
+                  </a:txBody>
+                  <a:tcPr>
+                    <a:solidFill>
+                      <a:schemeClr val="bg1">
+                        <a:lumMod val="50000"/>
+                      </a:schemeClr>
+                    </a:solidFill>
+                  </a:tcPr>
+                </a:tc>
+                <a:extLst>
+                  <a:ext uri="{0D108BD9-81ED-4DB2-BD59-A6C34878D82A}">
+                    <a16:rowId xmlns:a16="http://schemas.microsoft.com/office/drawing/2014/main" val="4172938823"/>
+                  </a:ext>
+                </a:extLst>
+              </a:tr>
+            </a:tbl>
+          </a:graphicData>
+        </a:graphic>
+      </p:graphicFrame>
+      <p:graphicFrame>
+        <p:nvGraphicFramePr>
+          <p:cNvPr id="6" name="Table 5">
+            <a:extLst>
+              <a:ext uri="{FF2B5EF4-FFF2-40B4-BE49-F238E27FC236}">
+                <a16:creationId xmlns:a16="http://schemas.microsoft.com/office/drawing/2014/main" id="{D1407E39-5CE3-E51D-5CF1-F590D9F54454}"/>
+              </a:ext>
+            </a:extLst>
+          </p:cNvPr>
+          <p:cNvGraphicFramePr>
+            <a:graphicFrameLocks noGrp="1"/>
+          </p:cNvGraphicFramePr>
+          <p:nvPr>
+            <p:extLst>
+              <p:ext uri="{D42A27DB-BD31-4B8C-83A1-F6EECF244321}">
+                <p14:modId xmlns:p14="http://schemas.microsoft.com/office/powerpoint/2010/main" val="3388017638"/>
+              </p:ext>
+            </p:extLst>
+          </p:nvPr>
+        </p:nvGraphicFramePr>
+        <p:xfrm>
+          <a:off x="5653547" y="2766703"/>
+          <a:ext cx="589761" cy="1876150"/>
+        </p:xfrm>
+        <a:graphic>
+          <a:graphicData uri="http://schemas.openxmlformats.org/drawingml/2006/table">
+            <a:tbl>
+              <a:tblPr firstRow="1" bandRow="1">
+                <a:tableStyleId>{5940675A-B579-460E-94D1-54222C63F5DA}</a:tableStyleId>
+              </a:tblPr>
+              <a:tblGrid>
+                <a:gridCol w="589761">
+                  <a:extLst>
+                    <a:ext uri="{9D8B030D-6E8A-4147-A177-3AD203B41FA5}">
+                      <a16:colId xmlns:a16="http://schemas.microsoft.com/office/drawing/2014/main" val="1096332463"/>
+                    </a:ext>
+                  </a:extLst>
+                </a:gridCol>
+              </a:tblGrid>
+              <a:tr h="375230">
+                <a:tc>
+                  <a:txBody>
+                    <a:bodyPr/>
+                    <a:lstStyle/>
+                    <a:p>
+                      <a:pPr algn="ctr"/>
+                      <a:r>
+                        <a:rPr lang="en-US" dirty="0"/>
+                        <a:t>0 </a:t>
+                      </a:r>
+                    </a:p>
+                  </a:txBody>
+                  <a:tcPr>
+                    <a:solidFill>
+                      <a:schemeClr val="bg1">
+                        <a:lumMod val="95000"/>
+                      </a:schemeClr>
+                    </a:solidFill>
+                  </a:tcPr>
+                </a:tc>
+                <a:extLst>
+                  <a:ext uri="{0D108BD9-81ED-4DB2-BD59-A6C34878D82A}">
+                    <a16:rowId xmlns:a16="http://schemas.microsoft.com/office/drawing/2014/main" val="2082221590"/>
+                  </a:ext>
+                </a:extLst>
+              </a:tr>
+              <a:tr h="375230">
+                <a:tc>
+                  <a:txBody>
+                    <a:bodyPr/>
+                    <a:lstStyle/>
+                    <a:p>
+                      <a:pPr algn="ctr"/>
+                      <a:r>
+                        <a:rPr lang="en-US" dirty="0"/>
+                        <a:t>1</a:t>
+                      </a:r>
+                    </a:p>
+                  </a:txBody>
+                  <a:tcPr>
+                    <a:solidFill>
+                      <a:schemeClr val="bg1">
+                        <a:lumMod val="95000"/>
+                      </a:schemeClr>
+                    </a:solidFill>
+                  </a:tcPr>
+                </a:tc>
+                <a:extLst>
+                  <a:ext uri="{0D108BD9-81ED-4DB2-BD59-A6C34878D82A}">
+                    <a16:rowId xmlns:a16="http://schemas.microsoft.com/office/drawing/2014/main" val="3331228234"/>
+                  </a:ext>
+                </a:extLst>
+              </a:tr>
+              <a:tr h="375230">
+                <a:tc>
+                  <a:txBody>
+                    <a:bodyPr/>
+                    <a:lstStyle/>
+                    <a:p>
+                      <a:pPr algn="ctr"/>
+                      <a:r>
+                        <a:rPr lang="en-US" dirty="0"/>
+                        <a:t>2</a:t>
+                      </a:r>
+                    </a:p>
+                  </a:txBody>
+                  <a:tcPr>
+                    <a:solidFill>
+                      <a:schemeClr val="bg1">
+                        <a:lumMod val="95000"/>
+                      </a:schemeClr>
+                    </a:solidFill>
+                  </a:tcPr>
+                </a:tc>
+                <a:extLst>
+                  <a:ext uri="{0D108BD9-81ED-4DB2-BD59-A6C34878D82A}">
+                    <a16:rowId xmlns:a16="http://schemas.microsoft.com/office/drawing/2014/main" val="2565367690"/>
+                  </a:ext>
+                </a:extLst>
+              </a:tr>
+              <a:tr h="375230">
+                <a:tc>
+                  <a:txBody>
+                    <a:bodyPr/>
+                    <a:lstStyle/>
+                    <a:p>
+                      <a:pPr algn="ctr"/>
+                      <a:r>
+                        <a:rPr lang="en-US" dirty="0"/>
+                        <a:t>3</a:t>
+                      </a:r>
+                    </a:p>
+                  </a:txBody>
+                  <a:tcPr>
+                    <a:solidFill>
+                      <a:schemeClr val="bg1">
+                        <a:lumMod val="95000"/>
+                      </a:schemeClr>
+                    </a:solidFill>
+                  </a:tcPr>
+                </a:tc>
+                <a:extLst>
+                  <a:ext uri="{0D108BD9-81ED-4DB2-BD59-A6C34878D82A}">
+                    <a16:rowId xmlns:a16="http://schemas.microsoft.com/office/drawing/2014/main" val="4068000108"/>
+                  </a:ext>
+                </a:extLst>
+              </a:tr>
+              <a:tr h="375230">
+                <a:tc>
+                  <a:txBody>
+                    <a:bodyPr/>
+                    <a:lstStyle/>
+                    <a:p>
+                      <a:pPr algn="ctr"/>
+                      <a:r>
+                        <a:rPr lang="en-US" dirty="0"/>
+                        <a:t>4</a:t>
+                      </a:r>
+                    </a:p>
+                  </a:txBody>
+                  <a:tcPr>
+                    <a:solidFill>
+                      <a:schemeClr val="bg1">
+                        <a:lumMod val="95000"/>
+                      </a:schemeClr>
+                    </a:solidFill>
+                  </a:tcPr>
+                </a:tc>
+                <a:extLst>
+                  <a:ext uri="{0D108BD9-81ED-4DB2-BD59-A6C34878D82A}">
+                    <a16:rowId xmlns:a16="http://schemas.microsoft.com/office/drawing/2014/main" val="1034150542"/>
+                  </a:ext>
+                </a:extLst>
+              </a:tr>
+            </a:tbl>
+          </a:graphicData>
+        </a:graphic>
+      </p:graphicFrame>
+      <p:graphicFrame>
+        <p:nvGraphicFramePr>
+          <p:cNvPr id="7" name="Table 6">
+            <a:extLst>
+              <a:ext uri="{FF2B5EF4-FFF2-40B4-BE49-F238E27FC236}">
+                <a16:creationId xmlns:a16="http://schemas.microsoft.com/office/drawing/2014/main" id="{7E485088-0801-B340-EC49-5EF0157773C1}"/>
+              </a:ext>
+            </a:extLst>
+          </p:cNvPr>
+          <p:cNvGraphicFramePr>
+            <a:graphicFrameLocks noGrp="1"/>
+          </p:cNvGraphicFramePr>
+          <p:nvPr>
+            <p:extLst>
+              <p:ext uri="{D42A27DB-BD31-4B8C-83A1-F6EECF244321}">
+                <p14:modId xmlns:p14="http://schemas.microsoft.com/office/powerpoint/2010/main" val="1628673760"/>
+              </p:ext>
+            </p:extLst>
+          </p:nvPr>
+        </p:nvGraphicFramePr>
+        <p:xfrm>
+          <a:off x="6412974" y="2282878"/>
+          <a:ext cx="1920567" cy="370840"/>
+        </p:xfrm>
+        <a:graphic>
+          <a:graphicData uri="http://schemas.openxmlformats.org/drawingml/2006/table">
+            <a:tbl>
+              <a:tblPr firstRow="1" bandRow="1">
+                <a:tableStyleId>{5940675A-B579-460E-94D1-54222C63F5DA}</a:tableStyleId>
+              </a:tblPr>
+              <a:tblGrid>
+                <a:gridCol w="640189">
+                  <a:extLst>
+                    <a:ext uri="{9D8B030D-6E8A-4147-A177-3AD203B41FA5}">
+                      <a16:colId xmlns:a16="http://schemas.microsoft.com/office/drawing/2014/main" val="333275768"/>
+                    </a:ext>
+                  </a:extLst>
+                </a:gridCol>
+                <a:gridCol w="640189">
+                  <a:extLst>
+                    <a:ext uri="{9D8B030D-6E8A-4147-A177-3AD203B41FA5}">
+                      <a16:colId xmlns:a16="http://schemas.microsoft.com/office/drawing/2014/main" val="1174786515"/>
+                    </a:ext>
+                  </a:extLst>
+                </a:gridCol>
+                <a:gridCol w="640189">
+                  <a:extLst>
+                    <a:ext uri="{9D8B030D-6E8A-4147-A177-3AD203B41FA5}">
+                      <a16:colId xmlns:a16="http://schemas.microsoft.com/office/drawing/2014/main" val="3353613315"/>
+                    </a:ext>
+                  </a:extLst>
+                </a:gridCol>
+              </a:tblGrid>
+              <a:tr h="370840">
+                <a:tc>
+                  <a:txBody>
+                    <a:bodyPr/>
+                    <a:lstStyle/>
+                    <a:p>
+                      <a:pPr algn="ctr"/>
+                      <a:r>
+                        <a:rPr lang="en-US" dirty="0"/>
+                        <a:t>0</a:t>
+                      </a:r>
+                    </a:p>
+                  </a:txBody>
+                  <a:tcPr/>
+                </a:tc>
+                <a:tc>
+                  <a:txBody>
+                    <a:bodyPr/>
+                    <a:lstStyle/>
+                    <a:p>
+                      <a:pPr algn="ctr"/>
+                      <a:r>
+                        <a:rPr lang="en-US" dirty="0"/>
+                        <a:t> 1</a:t>
+                      </a:r>
+                    </a:p>
+                  </a:txBody>
+                  <a:tcPr/>
+                </a:tc>
+                <a:tc>
+                  <a:txBody>
+                    <a:bodyPr/>
+                    <a:lstStyle/>
+                    <a:p>
+                      <a:pPr algn="ctr"/>
+                      <a:r>
+                        <a:rPr lang="en-US" dirty="0"/>
+                        <a:t>2</a:t>
+                      </a:r>
+                    </a:p>
+                  </a:txBody>
+                  <a:tcPr/>
+                </a:tc>
+                <a:extLst>
+                  <a:ext uri="{0D108BD9-81ED-4DB2-BD59-A6C34878D82A}">
+                    <a16:rowId xmlns:a16="http://schemas.microsoft.com/office/drawing/2014/main" val="1237595280"/>
+                  </a:ext>
+                </a:extLst>
+              </a:tr>
+            </a:tbl>
+          </a:graphicData>
+        </a:graphic>
+      </p:graphicFrame>
+      <p:sp>
+        <p:nvSpPr>
+          <p:cNvPr id="8" name="Footer Placeholder 7">
+            <a:extLst>
+              <a:ext uri="{FF2B5EF4-FFF2-40B4-BE49-F238E27FC236}">
+                <a16:creationId xmlns:a16="http://schemas.microsoft.com/office/drawing/2014/main" id="{6610DD5F-25FA-929F-E33E-DCFB9CE259F2}"/>
+              </a:ext>
+            </a:extLst>
+          </p:cNvPr>
+          <p:cNvSpPr>
+            <a:spLocks noGrp="1"/>
+          </p:cNvSpPr>
+          <p:nvPr>
+            <p:ph type="ftr" sz="quarter" idx="11"/>
+          </p:nvPr>
+        </p:nvSpPr>
+        <p:spPr/>
+        <p:txBody>
+          <a:bodyPr/>
+          <a:lstStyle/>
+          <a:p>
+            <a:r>
+              <a:rPr lang="en-US"/>
+              <a:t>Week 8</a:t>
+            </a:r>
+          </a:p>
+        </p:txBody>
+      </p:sp>
+      <p:sp>
+        <p:nvSpPr>
+          <p:cNvPr id="9" name="Slide Number Placeholder 8">
+            <a:extLst>
+              <a:ext uri="{FF2B5EF4-FFF2-40B4-BE49-F238E27FC236}">
+                <a16:creationId xmlns:a16="http://schemas.microsoft.com/office/drawing/2014/main" id="{E6746F0A-63DE-6EDE-2432-1E478BC0E8B0}"/>
+              </a:ext>
+            </a:extLst>
+          </p:cNvPr>
+          <p:cNvSpPr>
+            <a:spLocks noGrp="1"/>
+          </p:cNvSpPr>
+          <p:nvPr>
+            <p:ph type="sldNum" sz="quarter" idx="12"/>
+          </p:nvPr>
+        </p:nvSpPr>
+        <p:spPr/>
+        <p:txBody>
+          <a:bodyPr/>
+          <a:lstStyle/>
+          <a:p>
+            <a:fld id="{3EC9E123-0CB8-4CD3-A52F-DDEB9B17898B}" type="slidenum">
+              <a:rPr lang="en-US" smtClean="0"/>
+              <a:t>63</a:t>
+            </a:fld>
+            <a:endParaRPr lang="en-US"/>
+          </a:p>
+        </p:txBody>
+      </p:sp>
+    </p:spTree>
+    <p:extLst>
+      <p:ext uri="{BB962C8B-B14F-4D97-AF65-F5344CB8AC3E}">
+        <p14:creationId xmlns:p14="http://schemas.microsoft.com/office/powerpoint/2010/main" val="4257614842"/>
+      </p:ext>
+    </p:extLst>
+  </p:cSld>
+  <p:clrMapOvr>
+    <a:masterClrMapping/>
+  </p:clrMapOvr>
+</p:sld>
+</file>
+
+<file path=ppt/slides/slide64.xml><?xml version="1.0" encoding="utf-8"?>
+<p:sld xmlns:a="http://schemas.openxmlformats.org/drawingml/2006/main" xmlns:r="http://schemas.openxmlformats.org/officeDocument/2006/relationships" xmlns:p="http://schemas.openxmlformats.org/presentationml/2006/main">
+  <p:cSld>
+    <p:spTree>
+      <p:nvGrpSpPr>
+        <p:cNvPr id="1" name=""/>
+        <p:cNvGrpSpPr/>
+        <p:nvPr/>
+      </p:nvGrpSpPr>
+      <p:grpSpPr>
+        <a:xfrm>
+          <a:off x="0" y="0"/>
+          <a:ext cx="0" cy="0"/>
+          <a:chOff x="0" y="0"/>
+          <a:chExt cx="0" cy="0"/>
+        </a:xfrm>
+      </p:grpSpPr>
+      <p:sp>
+        <p:nvSpPr>
+          <p:cNvPr id="2" name="Title 1">
+            <a:extLst>
+              <a:ext uri="{FF2B5EF4-FFF2-40B4-BE49-F238E27FC236}">
+                <a16:creationId xmlns:a16="http://schemas.microsoft.com/office/drawing/2014/main" id="{116DD671-06F7-8F13-7B7C-A47B9A0FBCD1}"/>
+              </a:ext>
+            </a:extLst>
+          </p:cNvPr>
+          <p:cNvSpPr>
+            <a:spLocks noGrp="1"/>
+          </p:cNvSpPr>
+          <p:nvPr>
+            <p:ph type="title"/>
+          </p:nvPr>
+        </p:nvSpPr>
+        <p:spPr/>
+        <p:txBody>
+          <a:bodyPr/>
+          <a:lstStyle/>
+          <a:p>
+            <a:r>
+              <a:rPr lang="en-US" dirty="0"/>
+              <a:t>Assignment 1</a:t>
+            </a:r>
+          </a:p>
+        </p:txBody>
+      </p:sp>
+      <p:sp>
+        <p:nvSpPr>
+          <p:cNvPr id="3" name="Content Placeholder 2">
+            <a:extLst>
+              <a:ext uri="{FF2B5EF4-FFF2-40B4-BE49-F238E27FC236}">
+                <a16:creationId xmlns:a16="http://schemas.microsoft.com/office/drawing/2014/main" id="{53FF11D8-5259-DABE-6C3A-D7FFB0B81F20}"/>
+              </a:ext>
+            </a:extLst>
+          </p:cNvPr>
+          <p:cNvSpPr>
+            <a:spLocks noGrp="1"/>
+          </p:cNvSpPr>
+          <p:nvPr>
+            <p:ph idx="1"/>
+          </p:nvPr>
+        </p:nvSpPr>
+        <p:spPr>
+          <a:xfrm>
+            <a:off x="838200" y="1834052"/>
+            <a:ext cx="10515600" cy="4351338"/>
+          </a:xfrm>
+        </p:spPr>
+        <p:txBody>
+          <a:bodyPr/>
+          <a:lstStyle/>
+          <a:p>
+            <a:r>
+              <a:rPr lang="en-US" dirty="0"/>
+              <a:t>Get 5 numbers  from user</a:t>
+            </a:r>
+          </a:p>
+          <a:p>
+            <a:pPr lvl="1"/>
+            <a:r>
+              <a:rPr lang="en-US" dirty="0"/>
+              <a:t>Print the highest number from the five.</a:t>
+            </a:r>
+          </a:p>
+          <a:p>
+            <a:pPr lvl="1"/>
+            <a:r>
+              <a:rPr lang="en-US" dirty="0"/>
+              <a:t>E.g. user enters 5,6,2,3,7</a:t>
+            </a:r>
+          </a:p>
+          <a:p>
+            <a:pPr lvl="1"/>
+            <a:r>
+              <a:rPr lang="en-US" dirty="0"/>
+              <a:t>Print </a:t>
+            </a:r>
+          </a:p>
+          <a:p>
+            <a:pPr lvl="2"/>
+            <a:r>
+              <a:rPr lang="en-US" dirty="0"/>
+              <a:t>The highest number is : 7</a:t>
+            </a:r>
+          </a:p>
+          <a:p>
+            <a:pPr lvl="1"/>
+            <a:endParaRPr lang="en-US" dirty="0"/>
+          </a:p>
+        </p:txBody>
+      </p:sp>
+      <p:sp>
+        <p:nvSpPr>
+          <p:cNvPr id="4" name="Footer Placeholder 3">
+            <a:extLst>
+              <a:ext uri="{FF2B5EF4-FFF2-40B4-BE49-F238E27FC236}">
+                <a16:creationId xmlns:a16="http://schemas.microsoft.com/office/drawing/2014/main" id="{13F01011-0ADC-E95F-52D7-8EAC1C24AF08}"/>
+              </a:ext>
+            </a:extLst>
+          </p:cNvPr>
+          <p:cNvSpPr>
+            <a:spLocks noGrp="1"/>
+          </p:cNvSpPr>
+          <p:nvPr>
+            <p:ph type="ftr" sz="quarter" idx="11"/>
+          </p:nvPr>
+        </p:nvSpPr>
+        <p:spPr/>
+        <p:txBody>
+          <a:bodyPr/>
+          <a:lstStyle/>
+          <a:p>
+            <a:r>
+              <a:rPr lang="en-US"/>
+              <a:t>Week 8</a:t>
+            </a:r>
+          </a:p>
+        </p:txBody>
+      </p:sp>
+      <p:sp>
+        <p:nvSpPr>
+          <p:cNvPr id="5" name="Slide Number Placeholder 4">
+            <a:extLst>
+              <a:ext uri="{FF2B5EF4-FFF2-40B4-BE49-F238E27FC236}">
+                <a16:creationId xmlns:a16="http://schemas.microsoft.com/office/drawing/2014/main" id="{E0AD4B1A-BAF2-A5D3-B5B9-2FCDB44B3993}"/>
+              </a:ext>
+            </a:extLst>
+          </p:cNvPr>
+          <p:cNvSpPr>
+            <a:spLocks noGrp="1"/>
+          </p:cNvSpPr>
+          <p:nvPr>
+            <p:ph type="sldNum" sz="quarter" idx="12"/>
+          </p:nvPr>
+        </p:nvSpPr>
+        <p:spPr/>
+        <p:txBody>
+          <a:bodyPr/>
+          <a:lstStyle/>
+          <a:p>
+            <a:fld id="{3EC9E123-0CB8-4CD3-A52F-DDEB9B17898B}" type="slidenum">
+              <a:rPr lang="en-US" smtClean="0"/>
+              <a:t>64</a:t>
+            </a:fld>
+            <a:endParaRPr lang="en-US"/>
+          </a:p>
+        </p:txBody>
+      </p:sp>
+    </p:spTree>
+    <p:extLst>
+      <p:ext uri="{BB962C8B-B14F-4D97-AF65-F5344CB8AC3E}">
+        <p14:creationId xmlns:p14="http://schemas.microsoft.com/office/powerpoint/2010/main" val="3113783236"/>
+      </p:ext>
+    </p:extLst>
+  </p:cSld>
+  <p:clrMapOvr>
+    <a:masterClrMapping/>
+  </p:clrMapOvr>
+</p:sld>
+</file>
+
+<file path=ppt/slides/slide65.xml><?xml version="1.0" encoding="utf-8"?>
+<p:sld xmlns:a="http://schemas.openxmlformats.org/drawingml/2006/main" xmlns:r="http://schemas.openxmlformats.org/officeDocument/2006/relationships" xmlns:p="http://schemas.openxmlformats.org/presentationml/2006/main">
+  <p:cSld>
+    <p:spTree>
+      <p:nvGrpSpPr>
+        <p:cNvPr id="1" name=""/>
+        <p:cNvGrpSpPr/>
+        <p:nvPr/>
+      </p:nvGrpSpPr>
+      <p:grpSpPr>
+        <a:xfrm>
+          <a:off x="0" y="0"/>
+          <a:ext cx="0" cy="0"/>
+          <a:chOff x="0" y="0"/>
+          <a:chExt cx="0" cy="0"/>
+        </a:xfrm>
+      </p:grpSpPr>
+      <p:sp>
+        <p:nvSpPr>
+          <p:cNvPr id="2" name="Title 1">
+            <a:extLst>
+              <a:ext uri="{FF2B5EF4-FFF2-40B4-BE49-F238E27FC236}">
+                <a16:creationId xmlns:a16="http://schemas.microsoft.com/office/drawing/2014/main" id="{C16BF889-A300-F262-D830-21E1F33EB80D}"/>
+              </a:ext>
+            </a:extLst>
+          </p:cNvPr>
+          <p:cNvSpPr>
+            <a:spLocks noGrp="1"/>
+          </p:cNvSpPr>
+          <p:nvPr>
+            <p:ph type="title"/>
+          </p:nvPr>
+        </p:nvSpPr>
+        <p:spPr/>
+        <p:txBody>
+          <a:bodyPr/>
+          <a:lstStyle/>
+          <a:p>
+            <a:r>
+              <a:rPr lang="en-US" dirty="0"/>
+              <a:t>Boss :Assignment</a:t>
+            </a:r>
+          </a:p>
+        </p:txBody>
+      </p:sp>
+      <p:sp>
+        <p:nvSpPr>
+          <p:cNvPr id="3" name="Content Placeholder 2">
+            <a:extLst>
+              <a:ext uri="{FF2B5EF4-FFF2-40B4-BE49-F238E27FC236}">
+                <a16:creationId xmlns:a16="http://schemas.microsoft.com/office/drawing/2014/main" id="{E8DC181A-D2A2-CFB5-2B73-8E9EBE5D7B23}"/>
+              </a:ext>
+            </a:extLst>
+          </p:cNvPr>
+          <p:cNvSpPr>
+            <a:spLocks noGrp="1"/>
+          </p:cNvSpPr>
+          <p:nvPr>
+            <p:ph idx="1"/>
+          </p:nvPr>
+        </p:nvSpPr>
+        <p:spPr/>
+        <p:txBody>
+          <a:bodyPr/>
+          <a:lstStyle/>
+          <a:p>
+            <a:r>
+              <a:rPr lang="en-US" dirty="0"/>
+              <a:t>Get 5 numbers from user</a:t>
+            </a:r>
+          </a:p>
+          <a:p>
+            <a:pPr lvl="1"/>
+            <a:r>
+              <a:rPr lang="en-US" dirty="0"/>
+              <a:t>Print all the numbers in sorted order</a:t>
+            </a:r>
+          </a:p>
+          <a:p>
+            <a:pPr lvl="1"/>
+            <a:r>
+              <a:rPr lang="en-US" dirty="0"/>
+              <a:t>E.g. user enters 5,6,2,3,7</a:t>
+            </a:r>
+          </a:p>
+          <a:p>
+            <a:pPr lvl="1"/>
+            <a:r>
+              <a:rPr lang="en-US" dirty="0"/>
+              <a:t>Print </a:t>
+            </a:r>
+          </a:p>
+          <a:p>
+            <a:pPr lvl="2"/>
+            <a:r>
+              <a:rPr lang="en-US" dirty="0"/>
+              <a:t>2,3,5,6,7</a:t>
+            </a:r>
+          </a:p>
+          <a:p>
+            <a:r>
+              <a:rPr lang="en-US" dirty="0"/>
+              <a:t>Hint </a:t>
+            </a:r>
+          </a:p>
+          <a:p>
+            <a:pPr lvl="1"/>
+            <a:r>
+              <a:rPr lang="en-US" dirty="0"/>
+              <a:t>* would need multiple loops </a:t>
+            </a:r>
+          </a:p>
+          <a:p>
+            <a:pPr lvl="1"/>
+            <a:r>
+              <a:rPr lang="en-US" dirty="0"/>
+              <a:t>* may need to know how to SORT data</a:t>
+            </a:r>
+          </a:p>
+          <a:p>
+            <a:pPr lvl="2"/>
+            <a:r>
+              <a:rPr lang="en-US" dirty="0"/>
+              <a:t>This is not taught , do best you can. </a:t>
+            </a:r>
+          </a:p>
+        </p:txBody>
+      </p:sp>
+      <p:sp>
+        <p:nvSpPr>
+          <p:cNvPr id="4" name="Footer Placeholder 3">
+            <a:extLst>
+              <a:ext uri="{FF2B5EF4-FFF2-40B4-BE49-F238E27FC236}">
+                <a16:creationId xmlns:a16="http://schemas.microsoft.com/office/drawing/2014/main" id="{255962AF-2088-57A9-C2EE-0E98F2C46F6F}"/>
+              </a:ext>
+            </a:extLst>
+          </p:cNvPr>
+          <p:cNvSpPr>
+            <a:spLocks noGrp="1"/>
+          </p:cNvSpPr>
+          <p:nvPr>
+            <p:ph type="ftr" sz="quarter" idx="11"/>
+          </p:nvPr>
+        </p:nvSpPr>
+        <p:spPr/>
+        <p:txBody>
+          <a:bodyPr/>
+          <a:lstStyle/>
+          <a:p>
+            <a:r>
+              <a:rPr lang="en-US"/>
+              <a:t>Week 8</a:t>
+            </a:r>
+          </a:p>
+        </p:txBody>
+      </p:sp>
+      <p:sp>
+        <p:nvSpPr>
+          <p:cNvPr id="5" name="Slide Number Placeholder 4">
+            <a:extLst>
+              <a:ext uri="{FF2B5EF4-FFF2-40B4-BE49-F238E27FC236}">
+                <a16:creationId xmlns:a16="http://schemas.microsoft.com/office/drawing/2014/main" id="{0E13F6CF-4B48-9E81-1DFF-BDA7415AAB25}"/>
+              </a:ext>
+            </a:extLst>
+          </p:cNvPr>
+          <p:cNvSpPr>
+            <a:spLocks noGrp="1"/>
+          </p:cNvSpPr>
+          <p:nvPr>
+            <p:ph type="sldNum" sz="quarter" idx="12"/>
+          </p:nvPr>
+        </p:nvSpPr>
+        <p:spPr/>
+        <p:txBody>
+          <a:bodyPr/>
+          <a:lstStyle/>
+          <a:p>
+            <a:fld id="{3EC9E123-0CB8-4CD3-A52F-DDEB9B17898B}" type="slidenum">
+              <a:rPr lang="en-US" smtClean="0"/>
+              <a:t>65</a:t>
+            </a:fld>
+            <a:endParaRPr lang="en-US"/>
+          </a:p>
+        </p:txBody>
+      </p:sp>
+    </p:spTree>
+    <p:extLst>
+      <p:ext uri="{BB962C8B-B14F-4D97-AF65-F5344CB8AC3E}">
+        <p14:creationId xmlns:p14="http://schemas.microsoft.com/office/powerpoint/2010/main" val="137043859"/>
+      </p:ext>
+    </p:extLst>
+  </p:cSld>
+  <p:clrMapOvr>
+    <a:masterClrMapping/>
+  </p:clrMapOvr>
+</p:sld>
+</file>
+
+<file path=ppt/slides/slide66.xml><?xml version="1.0" encoding="utf-8"?>
+<p:sld xmlns:a="http://schemas.openxmlformats.org/drawingml/2006/main" xmlns:r="http://schemas.openxmlformats.org/officeDocument/2006/relationships" xmlns:p="http://schemas.openxmlformats.org/presentationml/2006/main">
+  <p:cSld>
+    <p:spTree>
+      <p:nvGrpSpPr>
+        <p:cNvPr id="1" name=""/>
+        <p:cNvGrpSpPr/>
+        <p:nvPr/>
+      </p:nvGrpSpPr>
+      <p:grpSpPr>
+        <a:xfrm>
+          <a:off x="0" y="0"/>
+          <a:ext cx="0" cy="0"/>
+          <a:chOff x="0" y="0"/>
+          <a:chExt cx="0" cy="0"/>
+        </a:xfrm>
+      </p:grpSpPr>
+      <p:sp>
+        <p:nvSpPr>
+          <p:cNvPr id="2" name="Title 1">
+            <a:extLst>
+              <a:ext uri="{FF2B5EF4-FFF2-40B4-BE49-F238E27FC236}">
+                <a16:creationId xmlns:a16="http://schemas.microsoft.com/office/drawing/2014/main" id="{7F3F2022-DBA0-F8BB-70DA-B01A01136D53}"/>
+              </a:ext>
+            </a:extLst>
+          </p:cNvPr>
+          <p:cNvSpPr>
+            <a:spLocks noGrp="1"/>
+          </p:cNvSpPr>
+          <p:nvPr>
+            <p:ph type="title"/>
+          </p:nvPr>
+        </p:nvSpPr>
+        <p:spPr/>
+        <p:txBody>
+          <a:bodyPr/>
+          <a:lstStyle/>
+          <a:p>
+            <a:r>
+              <a:rPr lang="en-US" dirty="0"/>
+              <a:t>string data type</a:t>
+            </a:r>
+          </a:p>
+        </p:txBody>
+      </p:sp>
+      <p:sp>
+        <p:nvSpPr>
+          <p:cNvPr id="3" name="Content Placeholder 2">
+            <a:extLst>
+              <a:ext uri="{FF2B5EF4-FFF2-40B4-BE49-F238E27FC236}">
+                <a16:creationId xmlns:a16="http://schemas.microsoft.com/office/drawing/2014/main" id="{12C7C63C-7B86-C453-D132-93C8AB055AC5}"/>
+              </a:ext>
+            </a:extLst>
+          </p:cNvPr>
+          <p:cNvSpPr>
+            <a:spLocks noGrp="1"/>
+          </p:cNvSpPr>
+          <p:nvPr>
+            <p:ph idx="1"/>
+          </p:nvPr>
+        </p:nvSpPr>
+        <p:spPr/>
+        <p:txBody>
+          <a:bodyPr>
+            <a:normAutofit fontScale="92500" lnSpcReduction="10000"/>
+          </a:bodyPr>
+          <a:lstStyle/>
+          <a:p>
+            <a:r>
+              <a:rPr lang="en-US" dirty="0"/>
+              <a:t>We already know few built in types</a:t>
+            </a:r>
+          </a:p>
+          <a:p>
+            <a:pPr lvl="1"/>
+            <a:r>
+              <a:rPr lang="en-US" dirty="0"/>
+              <a:t>int , float , char, bool</a:t>
+            </a:r>
+          </a:p>
+          <a:p>
+            <a:r>
+              <a:rPr lang="en-US" dirty="0"/>
+              <a:t>string </a:t>
+            </a:r>
+          </a:p>
+          <a:p>
+            <a:pPr lvl="1"/>
+            <a:r>
+              <a:rPr lang="en-US" dirty="0"/>
+              <a:t>Is a derived data type, </a:t>
+            </a:r>
+          </a:p>
+          <a:p>
+            <a:pPr lvl="1"/>
+            <a:r>
+              <a:rPr lang="en-US" dirty="0"/>
+              <a:t>Useful for names, description etc. </a:t>
+            </a:r>
+          </a:p>
+          <a:p>
+            <a:r>
+              <a:rPr lang="en-US" dirty="0"/>
+              <a:t>Header </a:t>
+            </a:r>
+          </a:p>
+          <a:p>
+            <a:pPr lvl="1"/>
+            <a:r>
+              <a:rPr lang="en-US" dirty="0"/>
+              <a:t>#include&lt;string&gt;</a:t>
+            </a:r>
+          </a:p>
+          <a:p>
+            <a:r>
+              <a:rPr lang="en-US" dirty="0"/>
+              <a:t>Usage </a:t>
+            </a:r>
+          </a:p>
+          <a:p>
+            <a:pPr lvl="1"/>
+            <a:r>
+              <a:rPr lang="en-US" dirty="0"/>
+              <a:t>string name;</a:t>
+            </a:r>
+          </a:p>
+          <a:p>
+            <a:pPr lvl="1"/>
+            <a:r>
+              <a:rPr lang="en-US" dirty="0" err="1"/>
+              <a:t>cin</a:t>
+            </a:r>
+            <a:r>
+              <a:rPr lang="en-US" dirty="0"/>
+              <a:t> &gt;&gt; name;</a:t>
+            </a:r>
+          </a:p>
+          <a:p>
+            <a:pPr lvl="1"/>
+            <a:r>
+              <a:rPr lang="en-US" dirty="0" err="1"/>
+              <a:t>cout</a:t>
+            </a:r>
+            <a:r>
+              <a:rPr lang="en-US" dirty="0"/>
+              <a:t> &lt;&lt;name;</a:t>
+            </a:r>
+            <a:br>
+              <a:rPr lang="en-US" dirty="0"/>
+            </a:br>
+            <a:endParaRPr lang="en-US" dirty="0"/>
+          </a:p>
+        </p:txBody>
+      </p:sp>
+      <p:sp>
+        <p:nvSpPr>
+          <p:cNvPr id="4" name="Footer Placeholder 3">
+            <a:extLst>
+              <a:ext uri="{FF2B5EF4-FFF2-40B4-BE49-F238E27FC236}">
+                <a16:creationId xmlns:a16="http://schemas.microsoft.com/office/drawing/2014/main" id="{975DF1C2-BCB7-988E-2E18-DF5C6412B181}"/>
+              </a:ext>
+            </a:extLst>
+          </p:cNvPr>
+          <p:cNvSpPr>
+            <a:spLocks noGrp="1"/>
+          </p:cNvSpPr>
+          <p:nvPr>
+            <p:ph type="ftr" sz="quarter" idx="11"/>
+          </p:nvPr>
+        </p:nvSpPr>
+        <p:spPr/>
+        <p:txBody>
+          <a:bodyPr/>
+          <a:lstStyle/>
+          <a:p>
+            <a:r>
+              <a:rPr lang="en-US"/>
+              <a:t>Week 4</a:t>
+            </a:r>
+          </a:p>
+        </p:txBody>
+      </p:sp>
+      <p:sp>
+        <p:nvSpPr>
+          <p:cNvPr id="5" name="Slide Number Placeholder 4">
+            <a:extLst>
+              <a:ext uri="{FF2B5EF4-FFF2-40B4-BE49-F238E27FC236}">
+                <a16:creationId xmlns:a16="http://schemas.microsoft.com/office/drawing/2014/main" id="{43357A0E-A54D-5BCE-A42F-833CB4760EC1}"/>
+              </a:ext>
+            </a:extLst>
+          </p:cNvPr>
+          <p:cNvSpPr>
+            <a:spLocks noGrp="1"/>
+          </p:cNvSpPr>
+          <p:nvPr>
+            <p:ph type="sldNum" sz="quarter" idx="12"/>
+          </p:nvPr>
+        </p:nvSpPr>
+        <p:spPr/>
+        <p:txBody>
+          <a:bodyPr/>
+          <a:lstStyle/>
+          <a:p>
+            <a:fld id="{3EC9E123-0CB8-4CD3-A52F-DDEB9B17898B}" type="slidenum">
+              <a:rPr lang="en-US" smtClean="0"/>
+              <a:t>66</a:t>
+            </a:fld>
+            <a:endParaRPr lang="en-US"/>
+          </a:p>
+        </p:txBody>
+      </p:sp>
+    </p:spTree>
+    <p:extLst>
+      <p:ext uri="{BB962C8B-B14F-4D97-AF65-F5344CB8AC3E}">
+        <p14:creationId xmlns:p14="http://schemas.microsoft.com/office/powerpoint/2010/main" val="4193919016"/>
       </p:ext>
     </p:extLst>
   </p:cSld>

--- a/all/Intro to Programming_all.pptx
+++ b/all/Intro to Programming_all.pptx
@@ -5,7 +5,7 @@
     <p:sldMasterId id="2147483648" r:id="rId1"/>
   </p:sldMasterIdLst>
   <p:notesMasterIdLst>
-    <p:notesMasterId r:id="rId68"/>
+    <p:notesMasterId r:id="rId77"/>
   </p:notesMasterIdLst>
   <p:sldIdLst>
     <p:sldId id="256" r:id="rId2"/>
@@ -73,7 +73,16 @@
     <p:sldId id="320" r:id="rId64"/>
     <p:sldId id="323" r:id="rId65"/>
     <p:sldId id="324" r:id="rId66"/>
-    <p:sldId id="281" r:id="rId67"/>
+    <p:sldId id="325" r:id="rId67"/>
+    <p:sldId id="326" r:id="rId68"/>
+    <p:sldId id="327" r:id="rId69"/>
+    <p:sldId id="328" r:id="rId70"/>
+    <p:sldId id="329" r:id="rId71"/>
+    <p:sldId id="331" r:id="rId72"/>
+    <p:sldId id="332" r:id="rId73"/>
+    <p:sldId id="330" r:id="rId74"/>
+    <p:sldId id="333" r:id="rId75"/>
+    <p:sldId id="281" r:id="rId76"/>
   </p:sldIdLst>
   <p:sldSz cx="12192000" cy="6858000"/>
   <p:notesSz cx="7315200" cy="9601200"/>
@@ -242,6 +251,15 @@
             <p14:sldId id="320"/>
             <p14:sldId id="323"/>
             <p14:sldId id="324"/>
+            <p14:sldId id="325"/>
+            <p14:sldId id="326"/>
+            <p14:sldId id="327"/>
+            <p14:sldId id="328"/>
+            <p14:sldId id="329"/>
+            <p14:sldId id="331"/>
+            <p14:sldId id="332"/>
+            <p14:sldId id="330"/>
+            <p14:sldId id="333"/>
             <p14:sldId id="281"/>
           </p14:sldIdLst>
         </p14:section>
@@ -336,7 +354,7 @@
           <a:p>
             <a:fld id="{03FEC988-D264-4851-9784-E262DEC12FF7}" type="datetimeFigureOut">
               <a:rPr lang="en-US" smtClean="0"/>
-              <a:t>11/6/2025</a:t>
+              <a:t>11/13/2025</a:t>
             </a:fld>
             <a:endParaRPr lang="en-US"/>
           </a:p>
@@ -750,7 +768,7 @@
           <a:p>
             <a:fld id="{FC9FB2DD-DF35-4B84-9135-C0E6A5E9FBB3}" type="datetimeFigureOut">
               <a:rPr lang="en-US" smtClean="0"/>
-              <a:t>11/6/2025</a:t>
+              <a:t>11/13/2025</a:t>
             </a:fld>
             <a:endParaRPr lang="en-US"/>
           </a:p>
@@ -948,7 +966,7 @@
           <a:p>
             <a:fld id="{FC9FB2DD-DF35-4B84-9135-C0E6A5E9FBB3}" type="datetimeFigureOut">
               <a:rPr lang="en-US" smtClean="0"/>
-              <a:t>11/6/2025</a:t>
+              <a:t>11/13/2025</a:t>
             </a:fld>
             <a:endParaRPr lang="en-US"/>
           </a:p>
@@ -1156,7 +1174,7 @@
           <a:p>
             <a:fld id="{FC9FB2DD-DF35-4B84-9135-C0E6A5E9FBB3}" type="datetimeFigureOut">
               <a:rPr lang="en-US" smtClean="0"/>
-              <a:t>11/6/2025</a:t>
+              <a:t>11/13/2025</a:t>
             </a:fld>
             <a:endParaRPr lang="en-US"/>
           </a:p>
@@ -1354,7 +1372,7 @@
           <a:p>
             <a:fld id="{FC9FB2DD-DF35-4B84-9135-C0E6A5E9FBB3}" type="datetimeFigureOut">
               <a:rPr lang="en-US" smtClean="0"/>
-              <a:t>11/6/2025</a:t>
+              <a:t>11/13/2025</a:t>
             </a:fld>
             <a:endParaRPr lang="en-US"/>
           </a:p>
@@ -1629,7 +1647,7 @@
           <a:p>
             <a:fld id="{FC9FB2DD-DF35-4B84-9135-C0E6A5E9FBB3}" type="datetimeFigureOut">
               <a:rPr lang="en-US" smtClean="0"/>
-              <a:t>11/6/2025</a:t>
+              <a:t>11/13/2025</a:t>
             </a:fld>
             <a:endParaRPr lang="en-US"/>
           </a:p>
@@ -1894,7 +1912,7 @@
           <a:p>
             <a:fld id="{FC9FB2DD-DF35-4B84-9135-C0E6A5E9FBB3}" type="datetimeFigureOut">
               <a:rPr lang="en-US" smtClean="0"/>
-              <a:t>11/6/2025</a:t>
+              <a:t>11/13/2025</a:t>
             </a:fld>
             <a:endParaRPr lang="en-US"/>
           </a:p>
@@ -2306,7 +2324,7 @@
           <a:p>
             <a:fld id="{FC9FB2DD-DF35-4B84-9135-C0E6A5E9FBB3}" type="datetimeFigureOut">
               <a:rPr lang="en-US" smtClean="0"/>
-              <a:t>11/6/2025</a:t>
+              <a:t>11/13/2025</a:t>
             </a:fld>
             <a:endParaRPr lang="en-US"/>
           </a:p>
@@ -2447,7 +2465,7 @@
           <a:p>
             <a:fld id="{FC9FB2DD-DF35-4B84-9135-C0E6A5E9FBB3}" type="datetimeFigureOut">
               <a:rPr lang="en-US" smtClean="0"/>
-              <a:t>11/6/2025</a:t>
+              <a:t>11/13/2025</a:t>
             </a:fld>
             <a:endParaRPr lang="en-US"/>
           </a:p>
@@ -2560,7 +2578,7 @@
           <a:p>
             <a:fld id="{FC9FB2DD-DF35-4B84-9135-C0E6A5E9FBB3}" type="datetimeFigureOut">
               <a:rPr lang="en-US" smtClean="0"/>
-              <a:t>11/6/2025</a:t>
+              <a:t>11/13/2025</a:t>
             </a:fld>
             <a:endParaRPr lang="en-US"/>
           </a:p>
@@ -2871,7 +2889,7 @@
           <a:p>
             <a:fld id="{FC9FB2DD-DF35-4B84-9135-C0E6A5E9FBB3}" type="datetimeFigureOut">
               <a:rPr lang="en-US" smtClean="0"/>
-              <a:t>11/6/2025</a:t>
+              <a:t>11/13/2025</a:t>
             </a:fld>
             <a:endParaRPr lang="en-US"/>
           </a:p>
@@ -3159,7 +3177,7 @@
           <a:p>
             <a:fld id="{FC9FB2DD-DF35-4B84-9135-C0E6A5E9FBB3}" type="datetimeFigureOut">
               <a:rPr lang="en-US" smtClean="0"/>
-              <a:t>11/6/2025</a:t>
+              <a:t>11/13/2025</a:t>
             </a:fld>
             <a:endParaRPr lang="en-US"/>
           </a:p>
@@ -3400,7 +3418,7 @@
           <a:p>
             <a:fld id="{FC9FB2DD-DF35-4B84-9135-C0E6A5E9FBB3}" type="datetimeFigureOut">
               <a:rPr lang="en-US" smtClean="0"/>
-              <a:t>11/6/2025</a:t>
+              <a:t>11/13/2025</a:t>
             </a:fld>
             <a:endParaRPr lang="en-US"/>
           </a:p>
@@ -18711,7 +18729,7 @@
             <a:pPr lvl="1"/>
             <a:r>
               <a:rPr lang="en-US" dirty="0"/>
-              <a:t>if (name[7]== ‘/0’) would be true. </a:t>
+              <a:t>if (name[7]== ‘\0’) would be true. </a:t>
             </a:r>
           </a:p>
           <a:p>
@@ -20118,8 +20136,8 @@
           <a:p>
             <a:pPr lvl="2"/>
             <a:r>
-              <a:rPr lang="en-US" dirty="0"/>
-              <a:t>This is not taught , do best you can. </a:t>
+              <a:rPr lang="en-US" i="1" dirty="0"/>
+              <a:t>Sorts have not been taught ,do the best you can. </a:t>
             </a:r>
           </a:p>
         </p:txBody>
@@ -20216,7 +20234,7 @@
           <p:cNvPr id="2" name="Title 1">
             <a:extLst>
               <a:ext uri="{FF2B5EF4-FFF2-40B4-BE49-F238E27FC236}">
-                <a16:creationId xmlns:a16="http://schemas.microsoft.com/office/drawing/2014/main" id="{7F3F2022-DBA0-F8BB-70DA-B01A01136D53}"/>
+                <a16:creationId xmlns:a16="http://schemas.microsoft.com/office/drawing/2014/main" id="{16CFA5A9-9576-AB4A-CB03-55BD6F74664A}"/>
               </a:ext>
             </a:extLst>
           </p:cNvPr>
@@ -20234,7 +20252,7 @@
           <a:p>
             <a:r>
               <a:rPr lang="en-US" dirty="0"/>
-              <a:t>string data type</a:t>
+              <a:t>Reuse, organize, simplify code</a:t>
             </a:r>
           </a:p>
         </p:txBody>
@@ -20244,7 +20262,7 @@
           <p:cNvPr id="3" name="Content Placeholder 2">
             <a:extLst>
               <a:ext uri="{FF2B5EF4-FFF2-40B4-BE49-F238E27FC236}">
-                <a16:creationId xmlns:a16="http://schemas.microsoft.com/office/drawing/2014/main" id="{12C7C63C-7B86-C453-D132-93C8AB055AC5}"/>
+                <a16:creationId xmlns:a16="http://schemas.microsoft.com/office/drawing/2014/main" id="{83E3F512-EEB2-36DB-D0D3-42D379DB4B3F}"/>
               </a:ext>
             </a:extLst>
           </p:cNvPr>
@@ -20257,95 +20275,107 @@
         </p:nvSpPr>
         <p:spPr/>
         <p:txBody>
-          <a:bodyPr>
-            <a:normAutofit fontScale="92500" lnSpcReduction="10000"/>
-          </a:bodyPr>
-          <a:lstStyle/>
-          <a:p>
-            <a:r>
-              <a:rPr lang="en-US" dirty="0"/>
-              <a:t>We already know few built in types</a:t>
-            </a:r>
-          </a:p>
-          <a:p>
-            <a:pPr lvl="1"/>
-            <a:r>
-              <a:rPr lang="en-US" dirty="0"/>
-              <a:t>int , float , char, bool</a:t>
-            </a:r>
-          </a:p>
-          <a:p>
-            <a:r>
-              <a:rPr lang="en-US" dirty="0"/>
-              <a:t>string </a:t>
-            </a:r>
-          </a:p>
-          <a:p>
-            <a:pPr lvl="1"/>
-            <a:r>
-              <a:rPr lang="en-US" dirty="0"/>
-              <a:t>Is a derived data type, </a:t>
-            </a:r>
-          </a:p>
-          <a:p>
-            <a:pPr lvl="1"/>
-            <a:r>
-              <a:rPr lang="en-US" dirty="0"/>
-              <a:t>Useful for names, description etc. </a:t>
-            </a:r>
-          </a:p>
-          <a:p>
-            <a:r>
-              <a:rPr lang="en-US" dirty="0"/>
-              <a:t>Header </a:t>
-            </a:r>
-          </a:p>
-          <a:p>
-            <a:pPr lvl="1"/>
-            <a:r>
-              <a:rPr lang="en-US" dirty="0"/>
-              <a:t>#include&lt;string&gt;</a:t>
-            </a:r>
-          </a:p>
-          <a:p>
-            <a:r>
-              <a:rPr lang="en-US" dirty="0"/>
-              <a:t>Usage </a:t>
-            </a:r>
-          </a:p>
-          <a:p>
-            <a:pPr lvl="1"/>
-            <a:r>
-              <a:rPr lang="en-US" dirty="0"/>
-              <a:t>string name;</a:t>
-            </a:r>
-          </a:p>
-          <a:p>
-            <a:pPr lvl="1"/>
-            <a:r>
-              <a:rPr lang="en-US" dirty="0" err="1"/>
-              <a:t>cin</a:t>
-            </a:r>
-            <a:r>
-              <a:rPr lang="en-US" dirty="0"/>
-              <a:t> &gt;&gt; name;</a:t>
-            </a:r>
-          </a:p>
-          <a:p>
-            <a:pPr lvl="1"/>
-            <a:r>
-              <a:rPr lang="en-US" dirty="0" err="1"/>
-              <a:t>cout</a:t>
-            </a:r>
-            <a:r>
-              <a:rPr lang="en-US" dirty="0"/>
-              <a:t> &lt;&lt;name;</a:t>
-            </a:r>
-            <a:br>
-              <a:rPr lang="en-US" dirty="0"/>
-            </a:br>
+          <a:bodyPr/>
+          <a:lstStyle/>
+          <a:p>
+            <a:r>
+              <a:rPr lang="en-US" dirty="0"/>
+              <a:t>How would you …</a:t>
+            </a:r>
+          </a:p>
+          <a:p>
+            <a:pPr lvl="1"/>
+            <a:r>
+              <a:rPr lang="en-US" dirty="0"/>
+              <a:t>Reuse the functionality that you have already implemented ?</a:t>
+            </a:r>
+          </a:p>
+          <a:p>
+            <a:pPr lvl="1"/>
+            <a:r>
+              <a:rPr lang="en-US" dirty="0"/>
+              <a:t>Simplify your code that you can work on it independently</a:t>
+            </a:r>
+          </a:p>
+          <a:p>
+            <a:pPr lvl="1"/>
+            <a:r>
+              <a:rPr lang="en-US" dirty="0"/>
+              <a:t>Organize your code for easy readability / maintainability …</a:t>
+            </a:r>
+          </a:p>
+          <a:p>
+            <a:r>
+              <a:rPr lang="en-US" dirty="0"/>
+              <a:t>Best programming Tool</a:t>
+            </a:r>
+          </a:p>
+          <a:p>
+            <a:pPr lvl="1"/>
+            <a:r>
+              <a:rPr lang="en-US" dirty="0"/>
+              <a:t>Functions</a:t>
+            </a:r>
+          </a:p>
+          <a:p>
+            <a:r>
+              <a:rPr lang="en-US" dirty="0"/>
+              <a:t>Best Principle </a:t>
+            </a:r>
+          </a:p>
+          <a:p>
+            <a:pPr lvl="1"/>
+            <a:r>
+              <a:rPr lang="en-US" dirty="0"/>
+              <a:t> DRY </a:t>
+            </a:r>
+            <a:r>
+              <a:rPr lang="en-US" dirty="0">
+                <a:sym typeface="Wingdings" panose="05000000000000000000" pitchFamily="2" charset="2"/>
+              </a:rPr>
+              <a:t> </a:t>
+            </a:r>
+            <a:r>
+              <a:rPr lang="en-US" b="1" dirty="0">
+                <a:sym typeface="Wingdings" panose="05000000000000000000" pitchFamily="2" charset="2"/>
+              </a:rPr>
+              <a:t>D</a:t>
+            </a:r>
+            <a:r>
+              <a:rPr lang="en-US" dirty="0">
+                <a:sym typeface="Wingdings" panose="05000000000000000000" pitchFamily="2" charset="2"/>
+              </a:rPr>
+              <a:t>on’t </a:t>
+            </a:r>
+            <a:r>
+              <a:rPr lang="en-US" b="1" dirty="0">
+                <a:sym typeface="Wingdings" panose="05000000000000000000" pitchFamily="2" charset="2"/>
+              </a:rPr>
+              <a:t>R</a:t>
+            </a:r>
+            <a:r>
+              <a:rPr lang="en-US" dirty="0">
+                <a:sym typeface="Wingdings" panose="05000000000000000000" pitchFamily="2" charset="2"/>
+              </a:rPr>
+              <a:t>epeat </a:t>
+            </a:r>
+            <a:r>
+              <a:rPr lang="en-US" b="1" dirty="0">
+                <a:sym typeface="Wingdings" panose="05000000000000000000" pitchFamily="2" charset="2"/>
+              </a:rPr>
+              <a:t>Y</a:t>
+            </a:r>
+            <a:r>
+              <a:rPr lang="en-US" dirty="0">
+                <a:sym typeface="Wingdings" panose="05000000000000000000" pitchFamily="2" charset="2"/>
+              </a:rPr>
+              <a:t>ourself ( i.e. in code )</a:t>
+            </a:r>
             <a:endParaRPr lang="en-US" dirty="0"/>
           </a:p>
+          <a:p>
+            <a:endParaRPr lang="en-US" dirty="0"/>
+          </a:p>
         </p:txBody>
       </p:sp>
       <p:sp>
@@ -20353,7 +20383,7 @@
           <p:cNvPr id="4" name="Footer Placeholder 3">
             <a:extLst>
               <a:ext uri="{FF2B5EF4-FFF2-40B4-BE49-F238E27FC236}">
-                <a16:creationId xmlns:a16="http://schemas.microsoft.com/office/drawing/2014/main" id="{975DF1C2-BCB7-988E-2E18-DF5C6412B181}"/>
+                <a16:creationId xmlns:a16="http://schemas.microsoft.com/office/drawing/2014/main" id="{3DF5C9A0-0820-64A0-E1A9-B4B82F6F6E93}"/>
               </a:ext>
             </a:extLst>
           </p:cNvPr>
@@ -20371,7 +20401,7 @@
           <a:p>
             <a:r>
               <a:rPr lang="en-US"/>
-              <a:t>Week 4</a:t>
+              <a:t>Week 9</a:t>
             </a:r>
           </a:p>
         </p:txBody>
@@ -20381,7 +20411,7 @@
           <p:cNvPr id="5" name="Slide Number Placeholder 4">
             <a:extLst>
               <a:ext uri="{FF2B5EF4-FFF2-40B4-BE49-F238E27FC236}">
-                <a16:creationId xmlns:a16="http://schemas.microsoft.com/office/drawing/2014/main" id="{43357A0E-A54D-5BCE-A42F-833CB4760EC1}"/>
+                <a16:creationId xmlns:a16="http://schemas.microsoft.com/office/drawing/2014/main" id="{8FEE51A6-B2A3-1AA5-D2C8-AF9C35148B18}"/>
               </a:ext>
             </a:extLst>
           </p:cNvPr>
@@ -20408,7 +20438,705 @@
     </p:spTree>
     <p:extLst>
       <p:ext uri="{BB962C8B-B14F-4D97-AF65-F5344CB8AC3E}">
-        <p14:creationId xmlns:p14="http://schemas.microsoft.com/office/powerpoint/2010/main" val="4193919016"/>
+        <p14:creationId xmlns:p14="http://schemas.microsoft.com/office/powerpoint/2010/main" val="2542087679"/>
+      </p:ext>
+    </p:extLst>
+  </p:cSld>
+  <p:clrMapOvr>
+    <a:masterClrMapping/>
+  </p:clrMapOvr>
+</p:sld>
+</file>
+
+<file path=ppt/slides/slide67.xml><?xml version="1.0" encoding="utf-8"?>
+<p:sld xmlns:a="http://schemas.openxmlformats.org/drawingml/2006/main" xmlns:r="http://schemas.openxmlformats.org/officeDocument/2006/relationships" xmlns:p="http://schemas.openxmlformats.org/presentationml/2006/main">
+  <p:cSld>
+    <p:spTree>
+      <p:nvGrpSpPr>
+        <p:cNvPr id="1" name=""/>
+        <p:cNvGrpSpPr/>
+        <p:nvPr/>
+      </p:nvGrpSpPr>
+      <p:grpSpPr>
+        <a:xfrm>
+          <a:off x="0" y="0"/>
+          <a:ext cx="0" cy="0"/>
+          <a:chOff x="0" y="0"/>
+          <a:chExt cx="0" cy="0"/>
+        </a:xfrm>
+      </p:grpSpPr>
+      <p:sp>
+        <p:nvSpPr>
+          <p:cNvPr id="2" name="Title 1">
+            <a:extLst>
+              <a:ext uri="{FF2B5EF4-FFF2-40B4-BE49-F238E27FC236}">
+                <a16:creationId xmlns:a16="http://schemas.microsoft.com/office/drawing/2014/main" id="{2D42CA2E-7E6C-8F4B-A3E6-3AF862782DA2}"/>
+              </a:ext>
+            </a:extLst>
+          </p:cNvPr>
+          <p:cNvSpPr>
+            <a:spLocks noGrp="1"/>
+          </p:cNvSpPr>
+          <p:nvPr>
+            <p:ph type="title"/>
+          </p:nvPr>
+        </p:nvSpPr>
+        <p:spPr/>
+        <p:txBody>
+          <a:bodyPr/>
+          <a:lstStyle/>
+          <a:p>
+            <a:r>
+              <a:rPr lang="en-US" dirty="0"/>
+              <a:t>Functions : Need</a:t>
+            </a:r>
+          </a:p>
+        </p:txBody>
+      </p:sp>
+      <p:sp>
+        <p:nvSpPr>
+          <p:cNvPr id="7" name="Content Placeholder 6">
+            <a:extLst>
+              <a:ext uri="{FF2B5EF4-FFF2-40B4-BE49-F238E27FC236}">
+                <a16:creationId xmlns:a16="http://schemas.microsoft.com/office/drawing/2014/main" id="{14E4AD69-A5F6-AC69-82E4-4B41CEA9D6EA}"/>
+              </a:ext>
+            </a:extLst>
+          </p:cNvPr>
+          <p:cNvSpPr>
+            <a:spLocks noGrp="1"/>
+          </p:cNvSpPr>
+          <p:nvPr>
+            <p:ph idx="1"/>
+          </p:nvPr>
+        </p:nvSpPr>
+        <p:spPr>
+          <a:xfrm>
+            <a:off x="838200" y="1817197"/>
+            <a:ext cx="10515600" cy="4351338"/>
+          </a:xfrm>
+        </p:spPr>
+        <p:txBody>
+          <a:bodyPr/>
+          <a:lstStyle/>
+          <a:p>
+            <a:r>
+              <a:rPr lang="en-US" dirty="0"/>
+              <a:t>How to do you make spaghetti ?</a:t>
+            </a:r>
+          </a:p>
+          <a:p>
+            <a:pPr lvl="1"/>
+            <a:r>
+              <a:rPr lang="en-US" dirty="0"/>
+              <a:t>Write a big enough program</a:t>
+            </a:r>
+          </a:p>
+          <a:p>
+            <a:r>
+              <a:rPr lang="en-US" dirty="0"/>
+              <a:t>Who/what is most popular in C/C++</a:t>
+            </a:r>
+          </a:p>
+          <a:p>
+            <a:pPr lvl="1"/>
+            <a:r>
+              <a:rPr lang="en-US" dirty="0"/>
+              <a:t>The main function </a:t>
+            </a:r>
+            <a:endParaRPr lang="en-US" dirty="0">
+              <a:sym typeface="Wingdings" panose="05000000000000000000" pitchFamily="2" charset="2"/>
+            </a:endParaRPr>
+          </a:p>
+          <a:p>
+            <a:pPr lvl="2"/>
+            <a:r>
+              <a:rPr lang="en-US" dirty="0">
+                <a:sym typeface="Wingdings" panose="05000000000000000000" pitchFamily="2" charset="2"/>
+              </a:rPr>
+              <a:t>Nothing happens without the main …</a:t>
+            </a:r>
+          </a:p>
+          <a:p>
+            <a:r>
+              <a:rPr lang="en-US" dirty="0">
+                <a:sym typeface="Wingdings" panose="05000000000000000000" pitchFamily="2" charset="2"/>
+              </a:rPr>
+              <a:t>Principle </a:t>
+            </a:r>
+          </a:p>
+          <a:p>
+            <a:pPr lvl="1"/>
+            <a:r>
+              <a:rPr lang="en-US" dirty="0">
+                <a:sym typeface="Wingdings" panose="05000000000000000000" pitchFamily="2" charset="2"/>
+              </a:rPr>
+              <a:t>Make spaghetti to eat but not in code.</a:t>
+            </a:r>
+          </a:p>
+          <a:p>
+            <a:pPr lvl="1"/>
+            <a:r>
+              <a:rPr lang="en-US" dirty="0"/>
+              <a:t>Write a function , and it will be popular.</a:t>
+            </a:r>
+          </a:p>
+          <a:p>
+            <a:pPr marL="0" indent="0">
+              <a:buNone/>
+            </a:pPr>
+            <a:endParaRPr lang="en-US" dirty="0"/>
+          </a:p>
+        </p:txBody>
+      </p:sp>
+      <p:pic>
+        <p:nvPicPr>
+          <p:cNvPr id="9" name="Picture 8">
+            <a:extLst>
+              <a:ext uri="{FF2B5EF4-FFF2-40B4-BE49-F238E27FC236}">
+                <a16:creationId xmlns:a16="http://schemas.microsoft.com/office/drawing/2014/main" id="{0300CA94-8BA9-7ED7-7F11-232DCD64D009}"/>
+              </a:ext>
+            </a:extLst>
+          </p:cNvPr>
+          <p:cNvPicPr>
+            <a:picLocks noChangeAspect="1"/>
+          </p:cNvPicPr>
+          <p:nvPr/>
+        </p:nvPicPr>
+        <p:blipFill>
+          <a:blip r:embed="rId2">
+            <a:extLst>
+              <a:ext uri="{28A0092B-C50C-407E-A947-70E740481C1C}">
+                <a14:useLocalDpi xmlns:a14="http://schemas.microsoft.com/office/drawing/2010/main" val="0"/>
+              </a:ext>
+            </a:extLst>
+          </a:blip>
+          <a:stretch>
+            <a:fillRect/>
+          </a:stretch>
+        </p:blipFill>
+        <p:spPr>
+          <a:xfrm>
+            <a:off x="6861765" y="429810"/>
+            <a:ext cx="3728705" cy="6300298"/>
+          </a:xfrm>
+          <a:prstGeom prst="rect">
+            <a:avLst/>
+          </a:prstGeom>
+        </p:spPr>
+      </p:pic>
+      <p:sp>
+        <p:nvSpPr>
+          <p:cNvPr id="3" name="Footer Placeholder 2">
+            <a:extLst>
+              <a:ext uri="{FF2B5EF4-FFF2-40B4-BE49-F238E27FC236}">
+                <a16:creationId xmlns:a16="http://schemas.microsoft.com/office/drawing/2014/main" id="{CB2E0A05-1E99-C1A8-9341-71FC3970891E}"/>
+              </a:ext>
+            </a:extLst>
+          </p:cNvPr>
+          <p:cNvSpPr>
+            <a:spLocks noGrp="1"/>
+          </p:cNvSpPr>
+          <p:nvPr>
+            <p:ph type="ftr" sz="quarter" idx="11"/>
+          </p:nvPr>
+        </p:nvSpPr>
+        <p:spPr/>
+        <p:txBody>
+          <a:bodyPr/>
+          <a:lstStyle/>
+          <a:p>
+            <a:r>
+              <a:rPr lang="en-US"/>
+              <a:t>Week 9</a:t>
+            </a:r>
+          </a:p>
+        </p:txBody>
+      </p:sp>
+      <p:sp>
+        <p:nvSpPr>
+          <p:cNvPr id="4" name="Slide Number Placeholder 3">
+            <a:extLst>
+              <a:ext uri="{FF2B5EF4-FFF2-40B4-BE49-F238E27FC236}">
+                <a16:creationId xmlns:a16="http://schemas.microsoft.com/office/drawing/2014/main" id="{8BEA2B2F-A8DC-02CA-F24C-0F0868B58ECE}"/>
+              </a:ext>
+            </a:extLst>
+          </p:cNvPr>
+          <p:cNvSpPr>
+            <a:spLocks noGrp="1"/>
+          </p:cNvSpPr>
+          <p:nvPr>
+            <p:ph type="sldNum" sz="quarter" idx="12"/>
+          </p:nvPr>
+        </p:nvSpPr>
+        <p:spPr/>
+        <p:txBody>
+          <a:bodyPr/>
+          <a:lstStyle/>
+          <a:p>
+            <a:fld id="{3EC9E123-0CB8-4CD3-A52F-DDEB9B17898B}" type="slidenum">
+              <a:rPr lang="en-US" smtClean="0"/>
+              <a:t>67</a:t>
+            </a:fld>
+            <a:endParaRPr lang="en-US"/>
+          </a:p>
+        </p:txBody>
+      </p:sp>
+    </p:spTree>
+    <p:extLst>
+      <p:ext uri="{BB962C8B-B14F-4D97-AF65-F5344CB8AC3E}">
+        <p14:creationId xmlns:p14="http://schemas.microsoft.com/office/powerpoint/2010/main" val="4072416753"/>
+      </p:ext>
+    </p:extLst>
+  </p:cSld>
+  <p:clrMapOvr>
+    <a:masterClrMapping/>
+  </p:clrMapOvr>
+</p:sld>
+</file>
+
+<file path=ppt/slides/slide68.xml><?xml version="1.0" encoding="utf-8"?>
+<p:sld xmlns:a="http://schemas.openxmlformats.org/drawingml/2006/main" xmlns:r="http://schemas.openxmlformats.org/officeDocument/2006/relationships" xmlns:p="http://schemas.openxmlformats.org/presentationml/2006/main">
+  <p:cSld>
+    <p:spTree>
+      <p:nvGrpSpPr>
+        <p:cNvPr id="1" name=""/>
+        <p:cNvGrpSpPr/>
+        <p:nvPr/>
+      </p:nvGrpSpPr>
+      <p:grpSpPr>
+        <a:xfrm>
+          <a:off x="0" y="0"/>
+          <a:ext cx="0" cy="0"/>
+          <a:chOff x="0" y="0"/>
+          <a:chExt cx="0" cy="0"/>
+        </a:xfrm>
+      </p:grpSpPr>
+      <p:sp>
+        <p:nvSpPr>
+          <p:cNvPr id="2" name="Title 1">
+            <a:extLst>
+              <a:ext uri="{FF2B5EF4-FFF2-40B4-BE49-F238E27FC236}">
+                <a16:creationId xmlns:a16="http://schemas.microsoft.com/office/drawing/2014/main" id="{B96479A6-B2F6-63BE-7632-FFCE505538CD}"/>
+              </a:ext>
+            </a:extLst>
+          </p:cNvPr>
+          <p:cNvSpPr>
+            <a:spLocks noGrp="1"/>
+          </p:cNvSpPr>
+          <p:nvPr>
+            <p:ph type="title"/>
+          </p:nvPr>
+        </p:nvSpPr>
+        <p:spPr/>
+        <p:txBody>
+          <a:bodyPr/>
+          <a:lstStyle/>
+          <a:p>
+            <a:r>
+              <a:rPr lang="en-US" dirty="0"/>
+              <a:t>Functions : How  ?</a:t>
+            </a:r>
+          </a:p>
+        </p:txBody>
+      </p:sp>
+      <p:sp>
+        <p:nvSpPr>
+          <p:cNvPr id="3" name="Content Placeholder 2">
+            <a:extLst>
+              <a:ext uri="{FF2B5EF4-FFF2-40B4-BE49-F238E27FC236}">
+                <a16:creationId xmlns:a16="http://schemas.microsoft.com/office/drawing/2014/main" id="{E8CD8E4A-221F-917E-AE7F-709B0ABC72AE}"/>
+              </a:ext>
+            </a:extLst>
+          </p:cNvPr>
+          <p:cNvSpPr>
+            <a:spLocks noGrp="1"/>
+          </p:cNvSpPr>
+          <p:nvPr>
+            <p:ph idx="1"/>
+          </p:nvPr>
+        </p:nvSpPr>
+        <p:spPr/>
+        <p:txBody>
+          <a:bodyPr/>
+          <a:lstStyle/>
+          <a:p>
+            <a:r>
+              <a:rPr lang="en-US" dirty="0"/>
+              <a:t>Write a function</a:t>
+            </a:r>
+          </a:p>
+          <a:p>
+            <a:pPr lvl="1"/>
+            <a:r>
+              <a:rPr lang="en-US" b="1" dirty="0"/>
+              <a:t>O</a:t>
+            </a:r>
+            <a:r>
+              <a:rPr lang="en-US" b="1"/>
+              <a:t>nce</a:t>
+            </a:r>
+            <a:endParaRPr lang="en-US" b="1" dirty="0"/>
+          </a:p>
+          <a:p>
+            <a:r>
+              <a:rPr lang="en-US" dirty="0"/>
+              <a:t>Use a function  </a:t>
+            </a:r>
+          </a:p>
+          <a:p>
+            <a:pPr lvl="1"/>
+            <a:r>
+              <a:rPr lang="en-US" b="1" dirty="0"/>
+              <a:t>Many</a:t>
+            </a:r>
+            <a:r>
+              <a:rPr lang="en-US" dirty="0"/>
+              <a:t> times</a:t>
+            </a:r>
+          </a:p>
+          <a:p>
+            <a:pPr marL="0" indent="0">
+              <a:buNone/>
+            </a:pPr>
+            <a:endParaRPr lang="en-US" dirty="0"/>
+          </a:p>
+          <a:p>
+            <a:endParaRPr lang="en-US" dirty="0"/>
+          </a:p>
+          <a:p>
+            <a:endParaRPr lang="en-US" dirty="0"/>
+          </a:p>
+        </p:txBody>
+      </p:sp>
+      <p:pic>
+        <p:nvPicPr>
+          <p:cNvPr id="9" name="Picture 8">
+            <a:extLst>
+              <a:ext uri="{FF2B5EF4-FFF2-40B4-BE49-F238E27FC236}">
+                <a16:creationId xmlns:a16="http://schemas.microsoft.com/office/drawing/2014/main" id="{266FA356-CBBC-36C5-E1CE-992DBA2A36A7}"/>
+              </a:ext>
+            </a:extLst>
+          </p:cNvPr>
+          <p:cNvPicPr>
+            <a:picLocks noChangeAspect="1"/>
+          </p:cNvPicPr>
+          <p:nvPr/>
+        </p:nvPicPr>
+        <p:blipFill>
+          <a:blip r:embed="rId2"/>
+          <a:stretch>
+            <a:fillRect/>
+          </a:stretch>
+        </p:blipFill>
+        <p:spPr>
+          <a:xfrm>
+            <a:off x="5760298" y="2130137"/>
+            <a:ext cx="3559318" cy="3385491"/>
+          </a:xfrm>
+          <a:prstGeom prst="rect">
+            <a:avLst/>
+          </a:prstGeom>
+        </p:spPr>
+      </p:pic>
+      <p:sp>
+        <p:nvSpPr>
+          <p:cNvPr id="4" name="Footer Placeholder 3">
+            <a:extLst>
+              <a:ext uri="{FF2B5EF4-FFF2-40B4-BE49-F238E27FC236}">
+                <a16:creationId xmlns:a16="http://schemas.microsoft.com/office/drawing/2014/main" id="{18E7434D-D8EC-2711-BCC0-55D6E40980E2}"/>
+              </a:ext>
+            </a:extLst>
+          </p:cNvPr>
+          <p:cNvSpPr>
+            <a:spLocks noGrp="1"/>
+          </p:cNvSpPr>
+          <p:nvPr>
+            <p:ph type="ftr" sz="quarter" idx="11"/>
+          </p:nvPr>
+        </p:nvSpPr>
+        <p:spPr/>
+        <p:txBody>
+          <a:bodyPr/>
+          <a:lstStyle/>
+          <a:p>
+            <a:r>
+              <a:rPr lang="en-US"/>
+              <a:t>Week 9</a:t>
+            </a:r>
+          </a:p>
+        </p:txBody>
+      </p:sp>
+      <p:sp>
+        <p:nvSpPr>
+          <p:cNvPr id="5" name="Slide Number Placeholder 4">
+            <a:extLst>
+              <a:ext uri="{FF2B5EF4-FFF2-40B4-BE49-F238E27FC236}">
+                <a16:creationId xmlns:a16="http://schemas.microsoft.com/office/drawing/2014/main" id="{21092192-A5E3-508C-2A08-E16AB96E3F4D}"/>
+              </a:ext>
+            </a:extLst>
+          </p:cNvPr>
+          <p:cNvSpPr>
+            <a:spLocks noGrp="1"/>
+          </p:cNvSpPr>
+          <p:nvPr>
+            <p:ph type="sldNum" sz="quarter" idx="12"/>
+          </p:nvPr>
+        </p:nvSpPr>
+        <p:spPr/>
+        <p:txBody>
+          <a:bodyPr/>
+          <a:lstStyle/>
+          <a:p>
+            <a:fld id="{3EC9E123-0CB8-4CD3-A52F-DDEB9B17898B}" type="slidenum">
+              <a:rPr lang="en-US" smtClean="0"/>
+              <a:t>68</a:t>
+            </a:fld>
+            <a:endParaRPr lang="en-US"/>
+          </a:p>
+        </p:txBody>
+      </p:sp>
+    </p:spTree>
+    <p:extLst>
+      <p:ext uri="{BB962C8B-B14F-4D97-AF65-F5344CB8AC3E}">
+        <p14:creationId xmlns:p14="http://schemas.microsoft.com/office/powerpoint/2010/main" val="4082802089"/>
+      </p:ext>
+    </p:extLst>
+  </p:cSld>
+  <p:clrMapOvr>
+    <a:masterClrMapping/>
+  </p:clrMapOvr>
+</p:sld>
+</file>
+
+<file path=ppt/slides/slide69.xml><?xml version="1.0" encoding="utf-8"?>
+<p:sld xmlns:a="http://schemas.openxmlformats.org/drawingml/2006/main" xmlns:r="http://schemas.openxmlformats.org/officeDocument/2006/relationships" xmlns:p="http://schemas.openxmlformats.org/presentationml/2006/main">
+  <p:cSld>
+    <p:spTree>
+      <p:nvGrpSpPr>
+        <p:cNvPr id="1" name=""/>
+        <p:cNvGrpSpPr/>
+        <p:nvPr/>
+      </p:nvGrpSpPr>
+      <p:grpSpPr>
+        <a:xfrm>
+          <a:off x="0" y="0"/>
+          <a:ext cx="0" cy="0"/>
+          <a:chOff x="0" y="0"/>
+          <a:chExt cx="0" cy="0"/>
+        </a:xfrm>
+      </p:grpSpPr>
+      <p:sp>
+        <p:nvSpPr>
+          <p:cNvPr id="2" name="Title 1">
+            <a:extLst>
+              <a:ext uri="{FF2B5EF4-FFF2-40B4-BE49-F238E27FC236}">
+                <a16:creationId xmlns:a16="http://schemas.microsoft.com/office/drawing/2014/main" id="{FC7A488D-B992-BF69-8EA8-7EA1CEF4222F}"/>
+              </a:ext>
+            </a:extLst>
+          </p:cNvPr>
+          <p:cNvSpPr>
+            <a:spLocks noGrp="1"/>
+          </p:cNvSpPr>
+          <p:nvPr>
+            <p:ph type="title"/>
+          </p:nvPr>
+        </p:nvSpPr>
+        <p:spPr/>
+        <p:txBody>
+          <a:bodyPr/>
+          <a:lstStyle/>
+          <a:p>
+            <a:r>
+              <a:rPr lang="en-US" dirty="0"/>
+              <a:t>Lab : lets revisit calculator</a:t>
+            </a:r>
+          </a:p>
+        </p:txBody>
+      </p:sp>
+      <p:sp>
+        <p:nvSpPr>
+          <p:cNvPr id="3" name="Content Placeholder 2">
+            <a:extLst>
+              <a:ext uri="{FF2B5EF4-FFF2-40B4-BE49-F238E27FC236}">
+                <a16:creationId xmlns:a16="http://schemas.microsoft.com/office/drawing/2014/main" id="{F09C5F2D-3ABD-66A7-9E93-08D2E3174638}"/>
+              </a:ext>
+            </a:extLst>
+          </p:cNvPr>
+          <p:cNvSpPr>
+            <a:spLocks noGrp="1"/>
+          </p:cNvSpPr>
+          <p:nvPr>
+            <p:ph idx="1"/>
+          </p:nvPr>
+        </p:nvSpPr>
+        <p:spPr/>
+        <p:txBody>
+          <a:bodyPr/>
+          <a:lstStyle/>
+          <a:p>
+            <a:r>
+              <a:rPr lang="en-US" dirty="0"/>
+              <a:t>Create a calculator </a:t>
+            </a:r>
+          </a:p>
+          <a:p>
+            <a:pPr lvl="1"/>
+            <a:r>
+              <a:rPr lang="en-US" dirty="0"/>
+              <a:t>Take 2 numbers from user  ( x, y)</a:t>
+            </a:r>
+          </a:p>
+          <a:p>
+            <a:pPr lvl="1"/>
+            <a:r>
+              <a:rPr lang="en-US" dirty="0"/>
+              <a:t>Take options 1 to 4 from user </a:t>
+            </a:r>
+          </a:p>
+          <a:p>
+            <a:pPr lvl="2"/>
+            <a:r>
+              <a:rPr lang="en-US" dirty="0"/>
+              <a:t>Based on option print the following </a:t>
+            </a:r>
+            <a:r>
+              <a:rPr lang="en-US" b="1" dirty="0"/>
+              <a:t>(use functions)</a:t>
+            </a:r>
+          </a:p>
+          <a:p>
+            <a:pPr lvl="3"/>
+            <a:r>
+              <a:rPr lang="en-US" dirty="0"/>
+              <a:t>1</a:t>
+            </a:r>
+            <a:r>
+              <a:rPr lang="en-US" dirty="0">
+                <a:sym typeface="Wingdings" panose="05000000000000000000" pitchFamily="2" charset="2"/>
+              </a:rPr>
+              <a:t> </a:t>
+            </a:r>
+            <a:r>
+              <a:rPr lang="en-US" dirty="0" err="1">
+                <a:sym typeface="Wingdings" panose="05000000000000000000" pitchFamily="2" charset="2"/>
+              </a:rPr>
+              <a:t>x+y</a:t>
+            </a:r>
+            <a:r>
+              <a:rPr lang="en-US" dirty="0">
+                <a:sym typeface="Wingdings" panose="05000000000000000000" pitchFamily="2" charset="2"/>
+              </a:rPr>
+              <a:t>;</a:t>
+            </a:r>
+          </a:p>
+          <a:p>
+            <a:pPr lvl="3"/>
+            <a:r>
+              <a:rPr lang="en-US" dirty="0">
+                <a:sym typeface="Wingdings" panose="05000000000000000000" pitchFamily="2" charset="2"/>
+              </a:rPr>
+              <a:t>2 x-y;</a:t>
+            </a:r>
+          </a:p>
+          <a:p>
+            <a:pPr lvl="3"/>
+            <a:r>
+              <a:rPr lang="en-US" dirty="0">
+                <a:sym typeface="Wingdings" panose="05000000000000000000" pitchFamily="2" charset="2"/>
+              </a:rPr>
+              <a:t>3 x*y;</a:t>
+            </a:r>
+          </a:p>
+          <a:p>
+            <a:pPr lvl="3"/>
+            <a:r>
+              <a:rPr lang="en-US" dirty="0">
+                <a:sym typeface="Wingdings" panose="05000000000000000000" pitchFamily="2" charset="2"/>
+              </a:rPr>
+              <a:t>4x/y</a:t>
+            </a:r>
+          </a:p>
+          <a:p>
+            <a:pPr lvl="3"/>
+            <a:r>
+              <a:rPr lang="en-US" dirty="0">
+                <a:sym typeface="Wingdings" panose="05000000000000000000" pitchFamily="2" charset="2"/>
+              </a:rPr>
+              <a:t>5  exit the program</a:t>
+            </a:r>
+          </a:p>
+          <a:p>
+            <a:pPr lvl="3"/>
+            <a:r>
+              <a:rPr lang="en-US" dirty="0">
+                <a:sym typeface="Wingdings" panose="05000000000000000000" pitchFamily="2" charset="2"/>
+              </a:rPr>
+              <a:t>(option &lt;1 || option &gt;5 )  “chose between 1 to 4”</a:t>
+            </a:r>
+          </a:p>
+        </p:txBody>
+      </p:sp>
+      <p:sp>
+        <p:nvSpPr>
+          <p:cNvPr id="4" name="Footer Placeholder 3">
+            <a:extLst>
+              <a:ext uri="{FF2B5EF4-FFF2-40B4-BE49-F238E27FC236}">
+                <a16:creationId xmlns:a16="http://schemas.microsoft.com/office/drawing/2014/main" id="{FEBD907C-FB8B-22EF-064B-3C89514AEB4F}"/>
+              </a:ext>
+            </a:extLst>
+          </p:cNvPr>
+          <p:cNvSpPr>
+            <a:spLocks noGrp="1"/>
+          </p:cNvSpPr>
+          <p:nvPr>
+            <p:ph type="ftr" sz="quarter" idx="11"/>
+          </p:nvPr>
+        </p:nvSpPr>
+        <p:spPr/>
+        <p:txBody>
+          <a:bodyPr/>
+          <a:lstStyle/>
+          <a:p>
+            <a:r>
+              <a:rPr lang="en-US"/>
+              <a:t>Week 9</a:t>
+            </a:r>
+          </a:p>
+        </p:txBody>
+      </p:sp>
+      <p:sp>
+        <p:nvSpPr>
+          <p:cNvPr id="5" name="Slide Number Placeholder 4">
+            <a:extLst>
+              <a:ext uri="{FF2B5EF4-FFF2-40B4-BE49-F238E27FC236}">
+                <a16:creationId xmlns:a16="http://schemas.microsoft.com/office/drawing/2014/main" id="{1FDD28D7-6E50-D742-F2AC-6EBEAE5B06BE}"/>
+              </a:ext>
+            </a:extLst>
+          </p:cNvPr>
+          <p:cNvSpPr>
+            <a:spLocks noGrp="1"/>
+          </p:cNvSpPr>
+          <p:nvPr>
+            <p:ph type="sldNum" sz="quarter" idx="12"/>
+          </p:nvPr>
+        </p:nvSpPr>
+        <p:spPr/>
+        <p:txBody>
+          <a:bodyPr/>
+          <a:lstStyle/>
+          <a:p>
+            <a:fld id="{3EC9E123-0CB8-4CD3-A52F-DDEB9B17898B}" type="slidenum">
+              <a:rPr lang="en-US" smtClean="0"/>
+              <a:t>69</a:t>
+            </a:fld>
+            <a:endParaRPr lang="en-US"/>
+          </a:p>
+        </p:txBody>
+      </p:sp>
+    </p:spTree>
+    <p:extLst>
+      <p:ext uri="{BB962C8B-B14F-4D97-AF65-F5344CB8AC3E}">
+        <p14:creationId xmlns:p14="http://schemas.microsoft.com/office/powerpoint/2010/main" val="3774608129"/>
       </p:ext>
     </p:extLst>
   </p:cSld>
@@ -20644,6 +21372,1333 @@
     <p:extLst>
       <p:ext uri="{BB962C8B-B14F-4D97-AF65-F5344CB8AC3E}">
         <p14:creationId xmlns:p14="http://schemas.microsoft.com/office/powerpoint/2010/main" val="1515338575"/>
+      </p:ext>
+    </p:extLst>
+  </p:cSld>
+  <p:clrMapOvr>
+    <a:masterClrMapping/>
+  </p:clrMapOvr>
+</p:sld>
+</file>
+
+<file path=ppt/slides/slide70.xml><?xml version="1.0" encoding="utf-8"?>
+<p:sld xmlns:a="http://schemas.openxmlformats.org/drawingml/2006/main" xmlns:r="http://schemas.openxmlformats.org/officeDocument/2006/relationships" xmlns:p="http://schemas.openxmlformats.org/presentationml/2006/main">
+  <p:cSld>
+    <p:spTree>
+      <p:nvGrpSpPr>
+        <p:cNvPr id="1" name=""/>
+        <p:cNvGrpSpPr/>
+        <p:nvPr/>
+      </p:nvGrpSpPr>
+      <p:grpSpPr>
+        <a:xfrm>
+          <a:off x="0" y="0"/>
+          <a:ext cx="0" cy="0"/>
+          <a:chOff x="0" y="0"/>
+          <a:chExt cx="0" cy="0"/>
+        </a:xfrm>
+      </p:grpSpPr>
+      <p:sp>
+        <p:nvSpPr>
+          <p:cNvPr id="2" name="Title 1">
+            <a:extLst>
+              <a:ext uri="{FF2B5EF4-FFF2-40B4-BE49-F238E27FC236}">
+                <a16:creationId xmlns:a16="http://schemas.microsoft.com/office/drawing/2014/main" id="{DA042029-DF4C-3088-1614-4A8AF543078C}"/>
+              </a:ext>
+            </a:extLst>
+          </p:cNvPr>
+          <p:cNvSpPr>
+            <a:spLocks noGrp="1"/>
+          </p:cNvSpPr>
+          <p:nvPr>
+            <p:ph type="title"/>
+          </p:nvPr>
+        </p:nvSpPr>
+        <p:spPr/>
+        <p:txBody>
+          <a:bodyPr/>
+          <a:lstStyle/>
+          <a:p>
+            <a:r>
+              <a:rPr lang="en-US" dirty="0"/>
+              <a:t>Flowchart View</a:t>
+            </a:r>
+          </a:p>
+        </p:txBody>
+      </p:sp>
+      <p:sp>
+        <p:nvSpPr>
+          <p:cNvPr id="3" name="Content Placeholder 2">
+            <a:extLst>
+              <a:ext uri="{FF2B5EF4-FFF2-40B4-BE49-F238E27FC236}">
+                <a16:creationId xmlns:a16="http://schemas.microsoft.com/office/drawing/2014/main" id="{0F7692BD-30E4-CDE4-47DC-F39D054E25AF}"/>
+              </a:ext>
+            </a:extLst>
+          </p:cNvPr>
+          <p:cNvSpPr>
+            <a:spLocks noGrp="1"/>
+          </p:cNvSpPr>
+          <p:nvPr>
+            <p:ph idx="1"/>
+          </p:nvPr>
+        </p:nvSpPr>
+        <p:spPr/>
+        <p:txBody>
+          <a:bodyPr/>
+          <a:lstStyle/>
+          <a:p>
+            <a:r>
+              <a:rPr lang="en-US" dirty="0"/>
+              <a:t>Function ~ Circle</a:t>
+            </a:r>
+          </a:p>
+          <a:p>
+            <a:r>
+              <a:rPr lang="en-US" dirty="0"/>
+              <a:t>Return ~ Back Circle</a:t>
+            </a:r>
+          </a:p>
+          <a:p>
+            <a:r>
+              <a:rPr lang="en-US" dirty="0"/>
+              <a:t>Lets code this …</a:t>
+            </a:r>
+          </a:p>
+        </p:txBody>
+      </p:sp>
+      <p:pic>
+        <p:nvPicPr>
+          <p:cNvPr id="7" name="Picture 6">
+            <a:extLst>
+              <a:ext uri="{FF2B5EF4-FFF2-40B4-BE49-F238E27FC236}">
+                <a16:creationId xmlns:a16="http://schemas.microsoft.com/office/drawing/2014/main" id="{83668CF4-55CC-C3C9-4EE7-FAB88CE2DC53}"/>
+              </a:ext>
+            </a:extLst>
+          </p:cNvPr>
+          <p:cNvPicPr>
+            <a:picLocks noChangeAspect="1"/>
+          </p:cNvPicPr>
+          <p:nvPr/>
+        </p:nvPicPr>
+        <p:blipFill>
+          <a:blip r:embed="rId2"/>
+          <a:stretch>
+            <a:fillRect/>
+          </a:stretch>
+        </p:blipFill>
+        <p:spPr>
+          <a:xfrm>
+            <a:off x="5090300" y="232725"/>
+            <a:ext cx="6669866" cy="5952061"/>
+          </a:xfrm>
+          <a:prstGeom prst="rect">
+            <a:avLst/>
+          </a:prstGeom>
+        </p:spPr>
+      </p:pic>
+      <p:sp>
+        <p:nvSpPr>
+          <p:cNvPr id="4" name="Footer Placeholder 3">
+            <a:extLst>
+              <a:ext uri="{FF2B5EF4-FFF2-40B4-BE49-F238E27FC236}">
+                <a16:creationId xmlns:a16="http://schemas.microsoft.com/office/drawing/2014/main" id="{13DEAE3B-3367-F592-F5F9-0417D3306A6B}"/>
+              </a:ext>
+            </a:extLst>
+          </p:cNvPr>
+          <p:cNvSpPr>
+            <a:spLocks noGrp="1"/>
+          </p:cNvSpPr>
+          <p:nvPr>
+            <p:ph type="ftr" sz="quarter" idx="11"/>
+          </p:nvPr>
+        </p:nvSpPr>
+        <p:spPr/>
+        <p:txBody>
+          <a:bodyPr/>
+          <a:lstStyle/>
+          <a:p>
+            <a:r>
+              <a:rPr lang="en-US"/>
+              <a:t>Week 9</a:t>
+            </a:r>
+          </a:p>
+        </p:txBody>
+      </p:sp>
+      <p:sp>
+        <p:nvSpPr>
+          <p:cNvPr id="5" name="Slide Number Placeholder 4">
+            <a:extLst>
+              <a:ext uri="{FF2B5EF4-FFF2-40B4-BE49-F238E27FC236}">
+                <a16:creationId xmlns:a16="http://schemas.microsoft.com/office/drawing/2014/main" id="{A8DA4E46-5752-BB10-53D3-552C850B472E}"/>
+              </a:ext>
+            </a:extLst>
+          </p:cNvPr>
+          <p:cNvSpPr>
+            <a:spLocks noGrp="1"/>
+          </p:cNvSpPr>
+          <p:nvPr>
+            <p:ph type="sldNum" sz="quarter" idx="12"/>
+          </p:nvPr>
+        </p:nvSpPr>
+        <p:spPr/>
+        <p:txBody>
+          <a:bodyPr/>
+          <a:lstStyle/>
+          <a:p>
+            <a:fld id="{3EC9E123-0CB8-4CD3-A52F-DDEB9B17898B}" type="slidenum">
+              <a:rPr lang="en-US" smtClean="0"/>
+              <a:t>70</a:t>
+            </a:fld>
+            <a:endParaRPr lang="en-US"/>
+          </a:p>
+        </p:txBody>
+      </p:sp>
+    </p:spTree>
+    <p:extLst>
+      <p:ext uri="{BB962C8B-B14F-4D97-AF65-F5344CB8AC3E}">
+        <p14:creationId xmlns:p14="http://schemas.microsoft.com/office/powerpoint/2010/main" val="3275367485"/>
+      </p:ext>
+    </p:extLst>
+  </p:cSld>
+  <p:clrMapOvr>
+    <a:masterClrMapping/>
+  </p:clrMapOvr>
+</p:sld>
+</file>
+
+<file path=ppt/slides/slide71.xml><?xml version="1.0" encoding="utf-8"?>
+<p:sld xmlns:a="http://schemas.openxmlformats.org/drawingml/2006/main" xmlns:r="http://schemas.openxmlformats.org/officeDocument/2006/relationships" xmlns:p="http://schemas.openxmlformats.org/presentationml/2006/main">
+  <p:cSld>
+    <p:spTree>
+      <p:nvGrpSpPr>
+        <p:cNvPr id="1" name=""/>
+        <p:cNvGrpSpPr/>
+        <p:nvPr/>
+      </p:nvGrpSpPr>
+      <p:grpSpPr>
+        <a:xfrm>
+          <a:off x="0" y="0"/>
+          <a:ext cx="0" cy="0"/>
+          <a:chOff x="0" y="0"/>
+          <a:chExt cx="0" cy="0"/>
+        </a:xfrm>
+      </p:grpSpPr>
+      <p:sp>
+        <p:nvSpPr>
+          <p:cNvPr id="2" name="Title 1">
+            <a:extLst>
+              <a:ext uri="{FF2B5EF4-FFF2-40B4-BE49-F238E27FC236}">
+                <a16:creationId xmlns:a16="http://schemas.microsoft.com/office/drawing/2014/main" id="{27F1C634-D470-3CB4-8283-6655D69658D2}"/>
+              </a:ext>
+            </a:extLst>
+          </p:cNvPr>
+          <p:cNvSpPr>
+            <a:spLocks noGrp="1"/>
+          </p:cNvSpPr>
+          <p:nvPr>
+            <p:ph type="title"/>
+          </p:nvPr>
+        </p:nvSpPr>
+        <p:spPr/>
+        <p:txBody>
+          <a:bodyPr/>
+          <a:lstStyle/>
+          <a:p>
+            <a:r>
+              <a:rPr lang="en-US" dirty="0"/>
+              <a:t>Anatomy of a function</a:t>
+            </a:r>
+          </a:p>
+        </p:txBody>
+      </p:sp>
+      <p:pic>
+        <p:nvPicPr>
+          <p:cNvPr id="5" name="Content Placeholder 4">
+            <a:extLst>
+              <a:ext uri="{FF2B5EF4-FFF2-40B4-BE49-F238E27FC236}">
+                <a16:creationId xmlns:a16="http://schemas.microsoft.com/office/drawing/2014/main" id="{B31A9639-73CA-AC87-3861-F5FA0EE9808B}"/>
+              </a:ext>
+            </a:extLst>
+          </p:cNvPr>
+          <p:cNvPicPr>
+            <a:picLocks noGrp="1" noChangeAspect="1"/>
+          </p:cNvPicPr>
+          <p:nvPr>
+            <p:ph idx="1"/>
+          </p:nvPr>
+        </p:nvPicPr>
+        <p:blipFill>
+          <a:blip r:embed="rId2">
+            <a:extLst>
+              <a:ext uri="{28A0092B-C50C-407E-A947-70E740481C1C}">
+                <a14:useLocalDpi xmlns:a14="http://schemas.microsoft.com/office/drawing/2010/main" val="0"/>
+              </a:ext>
+            </a:extLst>
+          </a:blip>
+          <a:stretch>
+            <a:fillRect/>
+          </a:stretch>
+        </p:blipFill>
+        <p:spPr>
+          <a:xfrm>
+            <a:off x="1489671" y="1946787"/>
+            <a:ext cx="6625107" cy="3796152"/>
+          </a:xfrm>
+        </p:spPr>
+      </p:pic>
+      <p:sp>
+        <p:nvSpPr>
+          <p:cNvPr id="3" name="Footer Placeholder 2">
+            <a:extLst>
+              <a:ext uri="{FF2B5EF4-FFF2-40B4-BE49-F238E27FC236}">
+                <a16:creationId xmlns:a16="http://schemas.microsoft.com/office/drawing/2014/main" id="{C0092499-2790-48DB-B2F5-DC04230C3534}"/>
+              </a:ext>
+            </a:extLst>
+          </p:cNvPr>
+          <p:cNvSpPr>
+            <a:spLocks noGrp="1"/>
+          </p:cNvSpPr>
+          <p:nvPr>
+            <p:ph type="ftr" sz="quarter" idx="11"/>
+          </p:nvPr>
+        </p:nvSpPr>
+        <p:spPr/>
+        <p:txBody>
+          <a:bodyPr/>
+          <a:lstStyle/>
+          <a:p>
+            <a:r>
+              <a:rPr lang="en-US"/>
+              <a:t>Week 9</a:t>
+            </a:r>
+          </a:p>
+        </p:txBody>
+      </p:sp>
+      <p:sp>
+        <p:nvSpPr>
+          <p:cNvPr id="4" name="Slide Number Placeholder 3">
+            <a:extLst>
+              <a:ext uri="{FF2B5EF4-FFF2-40B4-BE49-F238E27FC236}">
+                <a16:creationId xmlns:a16="http://schemas.microsoft.com/office/drawing/2014/main" id="{7714138B-EE91-8E3E-5407-C348CC28CECB}"/>
+              </a:ext>
+            </a:extLst>
+          </p:cNvPr>
+          <p:cNvSpPr>
+            <a:spLocks noGrp="1"/>
+          </p:cNvSpPr>
+          <p:nvPr>
+            <p:ph type="sldNum" sz="quarter" idx="12"/>
+          </p:nvPr>
+        </p:nvSpPr>
+        <p:spPr/>
+        <p:txBody>
+          <a:bodyPr/>
+          <a:lstStyle/>
+          <a:p>
+            <a:fld id="{3EC9E123-0CB8-4CD3-A52F-DDEB9B17898B}" type="slidenum">
+              <a:rPr lang="en-US" smtClean="0"/>
+              <a:t>71</a:t>
+            </a:fld>
+            <a:endParaRPr lang="en-US"/>
+          </a:p>
+        </p:txBody>
+      </p:sp>
+    </p:spTree>
+    <p:extLst>
+      <p:ext uri="{BB962C8B-B14F-4D97-AF65-F5344CB8AC3E}">
+        <p14:creationId xmlns:p14="http://schemas.microsoft.com/office/powerpoint/2010/main" val="688674138"/>
+      </p:ext>
+    </p:extLst>
+  </p:cSld>
+  <p:clrMapOvr>
+    <a:masterClrMapping/>
+  </p:clrMapOvr>
+</p:sld>
+</file>
+
+<file path=ppt/slides/slide72.xml><?xml version="1.0" encoding="utf-8"?>
+<p:sld xmlns:a="http://schemas.openxmlformats.org/drawingml/2006/main" xmlns:r="http://schemas.openxmlformats.org/officeDocument/2006/relationships" xmlns:p="http://schemas.openxmlformats.org/presentationml/2006/main">
+  <p:cSld>
+    <p:spTree>
+      <p:nvGrpSpPr>
+        <p:cNvPr id="1" name=""/>
+        <p:cNvGrpSpPr/>
+        <p:nvPr/>
+      </p:nvGrpSpPr>
+      <p:grpSpPr>
+        <a:xfrm>
+          <a:off x="0" y="0"/>
+          <a:ext cx="0" cy="0"/>
+          <a:chOff x="0" y="0"/>
+          <a:chExt cx="0" cy="0"/>
+        </a:xfrm>
+      </p:grpSpPr>
+      <p:sp>
+        <p:nvSpPr>
+          <p:cNvPr id="2" name="Title 1">
+            <a:extLst>
+              <a:ext uri="{FF2B5EF4-FFF2-40B4-BE49-F238E27FC236}">
+                <a16:creationId xmlns:a16="http://schemas.microsoft.com/office/drawing/2014/main" id="{18D8BFB9-8B5C-5E7F-8D7E-1298713E2519}"/>
+              </a:ext>
+            </a:extLst>
+          </p:cNvPr>
+          <p:cNvSpPr>
+            <a:spLocks noGrp="1"/>
+          </p:cNvSpPr>
+          <p:nvPr>
+            <p:ph type="title"/>
+          </p:nvPr>
+        </p:nvSpPr>
+        <p:spPr/>
+        <p:txBody>
+          <a:bodyPr/>
+          <a:lstStyle/>
+          <a:p>
+            <a:r>
+              <a:rPr lang="en-US" dirty="0"/>
+              <a:t>More function nuances</a:t>
+            </a:r>
+          </a:p>
+        </p:txBody>
+      </p:sp>
+      <p:sp>
+        <p:nvSpPr>
+          <p:cNvPr id="3" name="Content Placeholder 2">
+            <a:extLst>
+              <a:ext uri="{FF2B5EF4-FFF2-40B4-BE49-F238E27FC236}">
+                <a16:creationId xmlns:a16="http://schemas.microsoft.com/office/drawing/2014/main" id="{333F46EF-2D26-A230-501D-8271A3FCE7B9}"/>
+              </a:ext>
+            </a:extLst>
+          </p:cNvPr>
+          <p:cNvSpPr>
+            <a:spLocks noGrp="1"/>
+          </p:cNvSpPr>
+          <p:nvPr>
+            <p:ph idx="1"/>
+          </p:nvPr>
+        </p:nvSpPr>
+        <p:spPr/>
+        <p:txBody>
+          <a:bodyPr/>
+          <a:lstStyle/>
+          <a:p>
+            <a:r>
+              <a:rPr lang="en-US" dirty="0"/>
+              <a:t>Function don’t have to return a value</a:t>
+            </a:r>
+          </a:p>
+          <a:p>
+            <a:pPr lvl="1"/>
+            <a:r>
+              <a:rPr lang="en-US" dirty="0"/>
+              <a:t>Then must use “void” as return type.</a:t>
+            </a:r>
+          </a:p>
+          <a:p>
+            <a:pPr lvl="2"/>
+            <a:r>
+              <a:rPr lang="en-US" dirty="0"/>
+              <a:t>void Print(int x) {..}</a:t>
+            </a:r>
+          </a:p>
+          <a:p>
+            <a:r>
+              <a:rPr lang="en-US" dirty="0"/>
+              <a:t>Function can exist without  parameters</a:t>
+            </a:r>
+          </a:p>
+          <a:p>
+            <a:pPr lvl="1"/>
+            <a:r>
+              <a:rPr lang="en-US" dirty="0"/>
+              <a:t>void Print(){..}</a:t>
+            </a:r>
+          </a:p>
+          <a:p>
+            <a:r>
+              <a:rPr lang="en-US" dirty="0"/>
+              <a:t>Functions can call other functions  (</a:t>
+            </a:r>
+            <a:r>
+              <a:rPr lang="en-US" i="1" dirty="0"/>
+              <a:t>nested functions</a:t>
+            </a:r>
+            <a:r>
+              <a:rPr lang="en-US" dirty="0"/>
+              <a:t>)</a:t>
+            </a:r>
+          </a:p>
+          <a:p>
+            <a:pPr lvl="1"/>
+            <a:r>
+              <a:rPr lang="en-US" dirty="0"/>
+              <a:t>Like main calls add </a:t>
+            </a:r>
+          </a:p>
+          <a:p>
+            <a:r>
+              <a:rPr lang="en-US" dirty="0"/>
+              <a:t>A function can call itself (</a:t>
+            </a:r>
+            <a:r>
+              <a:rPr lang="en-US" i="1" dirty="0"/>
+              <a:t>recursion</a:t>
+            </a:r>
+            <a:r>
+              <a:rPr lang="en-US" dirty="0"/>
+              <a:t>)</a:t>
+            </a:r>
+            <a:br>
+              <a:rPr lang="en-US" dirty="0"/>
+            </a:br>
+            <a:endParaRPr lang="en-US" dirty="0"/>
+          </a:p>
+          <a:p>
+            <a:endParaRPr lang="en-US" dirty="0"/>
+          </a:p>
+        </p:txBody>
+      </p:sp>
+      <p:sp>
+        <p:nvSpPr>
+          <p:cNvPr id="4" name="Footer Placeholder 3">
+            <a:extLst>
+              <a:ext uri="{FF2B5EF4-FFF2-40B4-BE49-F238E27FC236}">
+                <a16:creationId xmlns:a16="http://schemas.microsoft.com/office/drawing/2014/main" id="{AA935383-3738-2B12-6003-6E94288C2999}"/>
+              </a:ext>
+            </a:extLst>
+          </p:cNvPr>
+          <p:cNvSpPr>
+            <a:spLocks noGrp="1"/>
+          </p:cNvSpPr>
+          <p:nvPr>
+            <p:ph type="ftr" sz="quarter" idx="11"/>
+          </p:nvPr>
+        </p:nvSpPr>
+        <p:spPr/>
+        <p:txBody>
+          <a:bodyPr/>
+          <a:lstStyle/>
+          <a:p>
+            <a:r>
+              <a:rPr lang="en-US"/>
+              <a:t>Week 9</a:t>
+            </a:r>
+          </a:p>
+        </p:txBody>
+      </p:sp>
+      <p:sp>
+        <p:nvSpPr>
+          <p:cNvPr id="5" name="Slide Number Placeholder 4">
+            <a:extLst>
+              <a:ext uri="{FF2B5EF4-FFF2-40B4-BE49-F238E27FC236}">
+                <a16:creationId xmlns:a16="http://schemas.microsoft.com/office/drawing/2014/main" id="{C8DC13F0-621C-50B7-CF92-2150D434C918}"/>
+              </a:ext>
+            </a:extLst>
+          </p:cNvPr>
+          <p:cNvSpPr>
+            <a:spLocks noGrp="1"/>
+          </p:cNvSpPr>
+          <p:nvPr>
+            <p:ph type="sldNum" sz="quarter" idx="12"/>
+          </p:nvPr>
+        </p:nvSpPr>
+        <p:spPr/>
+        <p:txBody>
+          <a:bodyPr/>
+          <a:lstStyle/>
+          <a:p>
+            <a:fld id="{3EC9E123-0CB8-4CD3-A52F-DDEB9B17898B}" type="slidenum">
+              <a:rPr lang="en-US" smtClean="0"/>
+              <a:t>72</a:t>
+            </a:fld>
+            <a:endParaRPr lang="en-US"/>
+          </a:p>
+        </p:txBody>
+      </p:sp>
+    </p:spTree>
+    <p:extLst>
+      <p:ext uri="{BB962C8B-B14F-4D97-AF65-F5344CB8AC3E}">
+        <p14:creationId xmlns:p14="http://schemas.microsoft.com/office/powerpoint/2010/main" val="2205015301"/>
+      </p:ext>
+    </p:extLst>
+  </p:cSld>
+  <p:clrMapOvr>
+    <a:masterClrMapping/>
+  </p:clrMapOvr>
+</p:sld>
+</file>
+
+<file path=ppt/slides/slide73.xml><?xml version="1.0" encoding="utf-8"?>
+<p:sld xmlns:a="http://schemas.openxmlformats.org/drawingml/2006/main" xmlns:r="http://schemas.openxmlformats.org/officeDocument/2006/relationships" xmlns:p="http://schemas.openxmlformats.org/presentationml/2006/main">
+  <p:cSld>
+    <p:spTree>
+      <p:nvGrpSpPr>
+        <p:cNvPr id="1" name=""/>
+        <p:cNvGrpSpPr/>
+        <p:nvPr/>
+      </p:nvGrpSpPr>
+      <p:grpSpPr>
+        <a:xfrm>
+          <a:off x="0" y="0"/>
+          <a:ext cx="0" cy="0"/>
+          <a:chOff x="0" y="0"/>
+          <a:chExt cx="0" cy="0"/>
+        </a:xfrm>
+      </p:grpSpPr>
+      <p:sp>
+        <p:nvSpPr>
+          <p:cNvPr id="2" name="Title 1">
+            <a:extLst>
+              <a:ext uri="{FF2B5EF4-FFF2-40B4-BE49-F238E27FC236}">
+                <a16:creationId xmlns:a16="http://schemas.microsoft.com/office/drawing/2014/main" id="{701A4847-4F31-559F-A2B3-642D5DD8D935}"/>
+              </a:ext>
+            </a:extLst>
+          </p:cNvPr>
+          <p:cNvSpPr>
+            <a:spLocks noGrp="1"/>
+          </p:cNvSpPr>
+          <p:nvPr>
+            <p:ph type="title"/>
+          </p:nvPr>
+        </p:nvSpPr>
+        <p:spPr/>
+        <p:txBody>
+          <a:bodyPr/>
+          <a:lstStyle/>
+          <a:p>
+            <a:r>
+              <a:rPr lang="en-US" dirty="0"/>
+              <a:t>Assignment</a:t>
+            </a:r>
+          </a:p>
+        </p:txBody>
+      </p:sp>
+      <p:sp>
+        <p:nvSpPr>
+          <p:cNvPr id="3" name="Content Placeholder 2">
+            <a:extLst>
+              <a:ext uri="{FF2B5EF4-FFF2-40B4-BE49-F238E27FC236}">
+                <a16:creationId xmlns:a16="http://schemas.microsoft.com/office/drawing/2014/main" id="{FECA24D6-3483-ACB9-6326-5231C71A4FF9}"/>
+              </a:ext>
+            </a:extLst>
+          </p:cNvPr>
+          <p:cNvSpPr>
+            <a:spLocks noGrp="1"/>
+          </p:cNvSpPr>
+          <p:nvPr>
+            <p:ph idx="1"/>
+          </p:nvPr>
+        </p:nvSpPr>
+        <p:spPr/>
+        <p:txBody>
+          <a:bodyPr>
+            <a:normAutofit fontScale="85000" lnSpcReduction="20000"/>
+          </a:bodyPr>
+          <a:lstStyle/>
+          <a:p>
+            <a:r>
+              <a:rPr lang="en-US" dirty="0"/>
+              <a:t>Write a program to convert </a:t>
+            </a:r>
+            <a:r>
+              <a:rPr lang="en-US" dirty="0" err="1"/>
+              <a:t>temperaturs</a:t>
+            </a:r>
+            <a:r>
+              <a:rPr lang="en-US" dirty="0"/>
+              <a:t> </a:t>
+            </a:r>
+          </a:p>
+          <a:p>
+            <a:pPr lvl="1"/>
+            <a:r>
+              <a:rPr lang="en-US" dirty="0"/>
+              <a:t>Celsius to Fahrenheit </a:t>
+            </a:r>
+          </a:p>
+          <a:p>
+            <a:pPr lvl="1"/>
+            <a:r>
+              <a:rPr lang="en-US" dirty="0"/>
+              <a:t>and Fahrenheit to Celsius</a:t>
+            </a:r>
+          </a:p>
+          <a:p>
+            <a:r>
+              <a:rPr lang="en-US" dirty="0"/>
+              <a:t>Use enters temperature and option </a:t>
+            </a:r>
+          </a:p>
+          <a:p>
+            <a:pPr lvl="1"/>
+            <a:r>
+              <a:rPr lang="en-US" dirty="0"/>
+              <a:t>Option 1</a:t>
+            </a:r>
+            <a:endParaRPr lang="en-US" dirty="0">
+              <a:sym typeface="Wingdings" panose="05000000000000000000" pitchFamily="2" charset="2"/>
+            </a:endParaRPr>
+          </a:p>
+          <a:p>
+            <a:pPr lvl="2"/>
+            <a:r>
+              <a:rPr lang="en-US" dirty="0">
+                <a:sym typeface="Wingdings" panose="05000000000000000000" pitchFamily="2" charset="2"/>
+              </a:rPr>
+              <a:t>Assume Celsius, </a:t>
+            </a:r>
+            <a:r>
+              <a:rPr lang="en-US" dirty="0"/>
+              <a:t> Convert to Fahrenheit</a:t>
+            </a:r>
+          </a:p>
+          <a:p>
+            <a:pPr lvl="2"/>
+            <a:r>
+              <a:rPr lang="en-US" dirty="0"/>
+              <a:t>e.g. 0 </a:t>
+            </a:r>
+            <a:r>
+              <a:rPr lang="en-US" dirty="0">
+                <a:sym typeface="Wingdings" panose="05000000000000000000" pitchFamily="2" charset="2"/>
+              </a:rPr>
+              <a:t></a:t>
+            </a:r>
+            <a:r>
+              <a:rPr lang="en-US" dirty="0"/>
+              <a:t> 32</a:t>
+            </a:r>
+          </a:p>
+          <a:p>
+            <a:pPr lvl="1"/>
+            <a:r>
+              <a:rPr lang="en-US" dirty="0"/>
+              <a:t>Option 2 </a:t>
+            </a:r>
+          </a:p>
+          <a:p>
+            <a:pPr lvl="2"/>
+            <a:r>
+              <a:rPr lang="en-US" dirty="0"/>
+              <a:t>Assume Fahrenheit, </a:t>
+            </a:r>
+            <a:r>
+              <a:rPr lang="en-US" dirty="0">
+                <a:sym typeface="Wingdings" panose="05000000000000000000" pitchFamily="2" charset="2"/>
+              </a:rPr>
+              <a:t> Convert to Celsius</a:t>
+            </a:r>
+          </a:p>
+          <a:p>
+            <a:pPr lvl="2"/>
+            <a:r>
+              <a:rPr lang="en-US" dirty="0">
+                <a:sym typeface="Wingdings" panose="05000000000000000000" pitchFamily="2" charset="2"/>
+              </a:rPr>
+              <a:t>e.g. 180 100</a:t>
+            </a:r>
+          </a:p>
+          <a:p>
+            <a:r>
+              <a:rPr lang="en-US" dirty="0">
+                <a:sym typeface="Wingdings" panose="05000000000000000000" pitchFamily="2" charset="2"/>
+              </a:rPr>
+              <a:t>Formula</a:t>
+            </a:r>
+          </a:p>
+          <a:p>
+            <a:pPr lvl="1"/>
+            <a:r>
+              <a:rPr lang="en-US" dirty="0">
+                <a:sym typeface="Wingdings" panose="05000000000000000000" pitchFamily="2" charset="2"/>
+              </a:rPr>
+              <a:t>F  = C * (180/100) + 32</a:t>
+            </a:r>
+          </a:p>
+          <a:p>
+            <a:pPr lvl="1"/>
+            <a:r>
+              <a:rPr lang="en-US" dirty="0">
+                <a:sym typeface="Wingdings" panose="05000000000000000000" pitchFamily="2" charset="2"/>
+              </a:rPr>
+              <a:t>C = (F -32) * 100/180</a:t>
+            </a:r>
+          </a:p>
+          <a:p>
+            <a:r>
+              <a:rPr lang="en-US" b="1" dirty="0">
+                <a:sym typeface="Wingdings" panose="05000000000000000000" pitchFamily="2" charset="2"/>
+              </a:rPr>
+              <a:t>Must use functions </a:t>
+            </a:r>
+          </a:p>
+          <a:p>
+            <a:endParaRPr lang="en-US" dirty="0"/>
+          </a:p>
+        </p:txBody>
+      </p:sp>
+      <p:sp>
+        <p:nvSpPr>
+          <p:cNvPr id="4" name="Footer Placeholder 3">
+            <a:extLst>
+              <a:ext uri="{FF2B5EF4-FFF2-40B4-BE49-F238E27FC236}">
+                <a16:creationId xmlns:a16="http://schemas.microsoft.com/office/drawing/2014/main" id="{E35092D6-8180-2D07-7D49-051EA14211ED}"/>
+              </a:ext>
+            </a:extLst>
+          </p:cNvPr>
+          <p:cNvSpPr>
+            <a:spLocks noGrp="1"/>
+          </p:cNvSpPr>
+          <p:nvPr>
+            <p:ph type="ftr" sz="quarter" idx="11"/>
+          </p:nvPr>
+        </p:nvSpPr>
+        <p:spPr/>
+        <p:txBody>
+          <a:bodyPr/>
+          <a:lstStyle/>
+          <a:p>
+            <a:r>
+              <a:rPr lang="en-US"/>
+              <a:t>Week 9</a:t>
+            </a:r>
+          </a:p>
+        </p:txBody>
+      </p:sp>
+      <p:sp>
+        <p:nvSpPr>
+          <p:cNvPr id="5" name="Slide Number Placeholder 4">
+            <a:extLst>
+              <a:ext uri="{FF2B5EF4-FFF2-40B4-BE49-F238E27FC236}">
+                <a16:creationId xmlns:a16="http://schemas.microsoft.com/office/drawing/2014/main" id="{CF1182BB-43E9-1925-E8AC-066D5E4F415E}"/>
+              </a:ext>
+            </a:extLst>
+          </p:cNvPr>
+          <p:cNvSpPr>
+            <a:spLocks noGrp="1"/>
+          </p:cNvSpPr>
+          <p:nvPr>
+            <p:ph type="sldNum" sz="quarter" idx="12"/>
+          </p:nvPr>
+        </p:nvSpPr>
+        <p:spPr/>
+        <p:txBody>
+          <a:bodyPr/>
+          <a:lstStyle/>
+          <a:p>
+            <a:fld id="{3EC9E123-0CB8-4CD3-A52F-DDEB9B17898B}" type="slidenum">
+              <a:rPr lang="en-US" smtClean="0"/>
+              <a:t>73</a:t>
+            </a:fld>
+            <a:endParaRPr lang="en-US"/>
+          </a:p>
+        </p:txBody>
+      </p:sp>
+    </p:spTree>
+    <p:extLst>
+      <p:ext uri="{BB962C8B-B14F-4D97-AF65-F5344CB8AC3E}">
+        <p14:creationId xmlns:p14="http://schemas.microsoft.com/office/powerpoint/2010/main" val="3569836967"/>
+      </p:ext>
+    </p:extLst>
+  </p:cSld>
+  <p:clrMapOvr>
+    <a:masterClrMapping/>
+  </p:clrMapOvr>
+</p:sld>
+</file>
+
+<file path=ppt/slides/slide74.xml><?xml version="1.0" encoding="utf-8"?>
+<p:sld xmlns:a="http://schemas.openxmlformats.org/drawingml/2006/main" xmlns:r="http://schemas.openxmlformats.org/officeDocument/2006/relationships" xmlns:p="http://schemas.openxmlformats.org/presentationml/2006/main">
+  <p:cSld>
+    <p:spTree>
+      <p:nvGrpSpPr>
+        <p:cNvPr id="1" name=""/>
+        <p:cNvGrpSpPr/>
+        <p:nvPr/>
+      </p:nvGrpSpPr>
+      <p:grpSpPr>
+        <a:xfrm>
+          <a:off x="0" y="0"/>
+          <a:ext cx="0" cy="0"/>
+          <a:chOff x="0" y="0"/>
+          <a:chExt cx="0" cy="0"/>
+        </a:xfrm>
+      </p:grpSpPr>
+      <p:sp>
+        <p:nvSpPr>
+          <p:cNvPr id="2" name="Title 1">
+            <a:extLst>
+              <a:ext uri="{FF2B5EF4-FFF2-40B4-BE49-F238E27FC236}">
+                <a16:creationId xmlns:a16="http://schemas.microsoft.com/office/drawing/2014/main" id="{5EABB50B-7286-8A60-CD76-A3CC349A4FD6}"/>
+              </a:ext>
+            </a:extLst>
+          </p:cNvPr>
+          <p:cNvSpPr>
+            <a:spLocks noGrp="1"/>
+          </p:cNvSpPr>
+          <p:nvPr>
+            <p:ph type="title"/>
+          </p:nvPr>
+        </p:nvSpPr>
+        <p:spPr/>
+        <p:txBody>
+          <a:bodyPr/>
+          <a:lstStyle/>
+          <a:p>
+            <a:r>
+              <a:rPr lang="en-US" dirty="0"/>
+              <a:t>Boss Assignment</a:t>
+            </a:r>
+          </a:p>
+        </p:txBody>
+      </p:sp>
+      <p:sp>
+        <p:nvSpPr>
+          <p:cNvPr id="3" name="Content Placeholder 2">
+            <a:extLst>
+              <a:ext uri="{FF2B5EF4-FFF2-40B4-BE49-F238E27FC236}">
+                <a16:creationId xmlns:a16="http://schemas.microsoft.com/office/drawing/2014/main" id="{0ECFF59E-03BD-FCB6-26BB-D419FD7CEBD8}"/>
+              </a:ext>
+            </a:extLst>
+          </p:cNvPr>
+          <p:cNvSpPr>
+            <a:spLocks noGrp="1"/>
+          </p:cNvSpPr>
+          <p:nvPr>
+            <p:ph idx="1"/>
+          </p:nvPr>
+        </p:nvSpPr>
+        <p:spPr/>
+        <p:txBody>
+          <a:bodyPr>
+            <a:normAutofit fontScale="92500" lnSpcReduction="20000"/>
+          </a:bodyPr>
+          <a:lstStyle/>
+          <a:p>
+            <a:r>
+              <a:rPr lang="en-US" dirty="0"/>
+              <a:t>Fibonacci series : 0,1,1,2,3,5,8,13,21,34,55….</a:t>
+            </a:r>
+          </a:p>
+          <a:p>
+            <a:pPr lvl="1"/>
+            <a:r>
+              <a:rPr lang="en-US" dirty="0"/>
+              <a:t>Starts with 0,1 and each number after is sum of previous 2 numbers</a:t>
+            </a:r>
+          </a:p>
+          <a:p>
+            <a:pPr lvl="1"/>
+            <a:r>
+              <a:rPr lang="en-US" dirty="0"/>
+              <a:t>0 + 1 </a:t>
+            </a:r>
+            <a:r>
+              <a:rPr lang="en-US" dirty="0">
+                <a:sym typeface="Wingdings" panose="05000000000000000000" pitchFamily="2" charset="2"/>
+              </a:rPr>
+              <a:t>  1</a:t>
+            </a:r>
+          </a:p>
+          <a:p>
+            <a:pPr lvl="1"/>
+            <a:r>
+              <a:rPr lang="en-US" dirty="0">
+                <a:sym typeface="Wingdings" panose="05000000000000000000" pitchFamily="2" charset="2"/>
+              </a:rPr>
+              <a:t>1 + 1   2</a:t>
+            </a:r>
+          </a:p>
+          <a:p>
+            <a:pPr lvl="1"/>
+            <a:r>
+              <a:rPr lang="en-US" dirty="0">
+                <a:sym typeface="Wingdings" panose="05000000000000000000" pitchFamily="2" charset="2"/>
+              </a:rPr>
+              <a:t>8+1321</a:t>
+            </a:r>
+            <a:endParaRPr lang="en-US" dirty="0"/>
+          </a:p>
+          <a:p>
+            <a:r>
+              <a:rPr lang="en-US" dirty="0"/>
+              <a:t>Task 1</a:t>
+            </a:r>
+          </a:p>
+          <a:p>
+            <a:pPr lvl="1"/>
+            <a:r>
+              <a:rPr lang="en-US" dirty="0"/>
+              <a:t>Print n</a:t>
+            </a:r>
+            <a:r>
+              <a:rPr lang="en-US" baseline="30000" dirty="0"/>
+              <a:t>th</a:t>
+            </a:r>
+            <a:r>
+              <a:rPr lang="en-US" dirty="0"/>
+              <a:t> number from Fibonacci series using functions</a:t>
+            </a:r>
+          </a:p>
+          <a:p>
+            <a:r>
+              <a:rPr lang="en-US" dirty="0"/>
+              <a:t>Task 2</a:t>
+            </a:r>
+          </a:p>
+          <a:p>
+            <a:pPr lvl="1"/>
+            <a:r>
+              <a:rPr lang="en-US" dirty="0"/>
+              <a:t>Print each Fibonacci number all the way to n</a:t>
+            </a:r>
+            <a:r>
+              <a:rPr lang="en-US" baseline="30000" dirty="0"/>
+              <a:t>th</a:t>
+            </a:r>
+            <a:r>
+              <a:rPr lang="en-US" dirty="0"/>
+              <a:t> number</a:t>
+            </a:r>
+          </a:p>
+          <a:p>
+            <a:r>
+              <a:rPr lang="en-US" dirty="0"/>
+              <a:t>Hints</a:t>
+            </a:r>
+          </a:p>
+          <a:p>
+            <a:pPr lvl="1"/>
+            <a:r>
+              <a:rPr lang="en-US" dirty="0"/>
+              <a:t>Use functions </a:t>
+            </a:r>
+          </a:p>
+          <a:p>
+            <a:pPr lvl="1"/>
+            <a:r>
+              <a:rPr lang="en-US" dirty="0"/>
+              <a:t>Use </a:t>
+            </a:r>
+            <a:r>
+              <a:rPr lang="en-US" i="1" dirty="0"/>
+              <a:t>appropriate</a:t>
+            </a:r>
+            <a:r>
+              <a:rPr lang="en-US" dirty="0"/>
+              <a:t> function parameters </a:t>
+            </a:r>
+          </a:p>
+          <a:p>
+            <a:pPr lvl="1"/>
+            <a:r>
+              <a:rPr lang="en-US" dirty="0"/>
+              <a:t>Use recursive functions </a:t>
+            </a:r>
+          </a:p>
+          <a:p>
+            <a:pPr lvl="2"/>
+            <a:endParaRPr lang="en-US" dirty="0"/>
+          </a:p>
+          <a:p>
+            <a:pPr lvl="1"/>
+            <a:endParaRPr lang="en-US" dirty="0"/>
+          </a:p>
+          <a:p>
+            <a:pPr lvl="1"/>
+            <a:endParaRPr lang="en-US" dirty="0"/>
+          </a:p>
+          <a:p>
+            <a:pPr lvl="1"/>
+            <a:endParaRPr lang="en-US" dirty="0"/>
+          </a:p>
+        </p:txBody>
+      </p:sp>
+      <p:sp>
+        <p:nvSpPr>
+          <p:cNvPr id="4" name="Footer Placeholder 3">
+            <a:extLst>
+              <a:ext uri="{FF2B5EF4-FFF2-40B4-BE49-F238E27FC236}">
+                <a16:creationId xmlns:a16="http://schemas.microsoft.com/office/drawing/2014/main" id="{49C30C14-7573-F4E9-E4C8-7CC4E03D3392}"/>
+              </a:ext>
+            </a:extLst>
+          </p:cNvPr>
+          <p:cNvSpPr>
+            <a:spLocks noGrp="1"/>
+          </p:cNvSpPr>
+          <p:nvPr>
+            <p:ph type="ftr" sz="quarter" idx="11"/>
+          </p:nvPr>
+        </p:nvSpPr>
+        <p:spPr/>
+        <p:txBody>
+          <a:bodyPr/>
+          <a:lstStyle/>
+          <a:p>
+            <a:r>
+              <a:rPr lang="en-US"/>
+              <a:t>Week 9</a:t>
+            </a:r>
+          </a:p>
+        </p:txBody>
+      </p:sp>
+      <p:sp>
+        <p:nvSpPr>
+          <p:cNvPr id="5" name="Slide Number Placeholder 4">
+            <a:extLst>
+              <a:ext uri="{FF2B5EF4-FFF2-40B4-BE49-F238E27FC236}">
+                <a16:creationId xmlns:a16="http://schemas.microsoft.com/office/drawing/2014/main" id="{0828C1C7-EE3F-ED03-E48B-A45860C5610B}"/>
+              </a:ext>
+            </a:extLst>
+          </p:cNvPr>
+          <p:cNvSpPr>
+            <a:spLocks noGrp="1"/>
+          </p:cNvSpPr>
+          <p:nvPr>
+            <p:ph type="sldNum" sz="quarter" idx="12"/>
+          </p:nvPr>
+        </p:nvSpPr>
+        <p:spPr/>
+        <p:txBody>
+          <a:bodyPr/>
+          <a:lstStyle/>
+          <a:p>
+            <a:fld id="{3EC9E123-0CB8-4CD3-A52F-DDEB9B17898B}" type="slidenum">
+              <a:rPr lang="en-US" smtClean="0"/>
+              <a:t>74</a:t>
+            </a:fld>
+            <a:endParaRPr lang="en-US"/>
+          </a:p>
+        </p:txBody>
+      </p:sp>
+    </p:spTree>
+    <p:extLst>
+      <p:ext uri="{BB962C8B-B14F-4D97-AF65-F5344CB8AC3E}">
+        <p14:creationId xmlns:p14="http://schemas.microsoft.com/office/powerpoint/2010/main" val="1390690727"/>
+      </p:ext>
+    </p:extLst>
+  </p:cSld>
+  <p:clrMapOvr>
+    <a:masterClrMapping/>
+  </p:clrMapOvr>
+</p:sld>
+</file>
+
+<file path=ppt/slides/slide75.xml><?xml version="1.0" encoding="utf-8"?>
+<p:sld xmlns:a="http://schemas.openxmlformats.org/drawingml/2006/main" xmlns:r="http://schemas.openxmlformats.org/officeDocument/2006/relationships" xmlns:p="http://schemas.openxmlformats.org/presentationml/2006/main">
+  <p:cSld>
+    <p:spTree>
+      <p:nvGrpSpPr>
+        <p:cNvPr id="1" name=""/>
+        <p:cNvGrpSpPr/>
+        <p:nvPr/>
+      </p:nvGrpSpPr>
+      <p:grpSpPr>
+        <a:xfrm>
+          <a:off x="0" y="0"/>
+          <a:ext cx="0" cy="0"/>
+          <a:chOff x="0" y="0"/>
+          <a:chExt cx="0" cy="0"/>
+        </a:xfrm>
+      </p:grpSpPr>
+      <p:sp>
+        <p:nvSpPr>
+          <p:cNvPr id="2" name="Title 1">
+            <a:extLst>
+              <a:ext uri="{FF2B5EF4-FFF2-40B4-BE49-F238E27FC236}">
+                <a16:creationId xmlns:a16="http://schemas.microsoft.com/office/drawing/2014/main" id="{7F3F2022-DBA0-F8BB-70DA-B01A01136D53}"/>
+              </a:ext>
+            </a:extLst>
+          </p:cNvPr>
+          <p:cNvSpPr>
+            <a:spLocks noGrp="1"/>
+          </p:cNvSpPr>
+          <p:nvPr>
+            <p:ph type="title"/>
+          </p:nvPr>
+        </p:nvSpPr>
+        <p:spPr/>
+        <p:txBody>
+          <a:bodyPr/>
+          <a:lstStyle/>
+          <a:p>
+            <a:r>
+              <a:rPr lang="en-US" dirty="0"/>
+              <a:t>string data type</a:t>
+            </a:r>
+          </a:p>
+        </p:txBody>
+      </p:sp>
+      <p:sp>
+        <p:nvSpPr>
+          <p:cNvPr id="3" name="Content Placeholder 2">
+            <a:extLst>
+              <a:ext uri="{FF2B5EF4-FFF2-40B4-BE49-F238E27FC236}">
+                <a16:creationId xmlns:a16="http://schemas.microsoft.com/office/drawing/2014/main" id="{12C7C63C-7B86-C453-D132-93C8AB055AC5}"/>
+              </a:ext>
+            </a:extLst>
+          </p:cNvPr>
+          <p:cNvSpPr>
+            <a:spLocks noGrp="1"/>
+          </p:cNvSpPr>
+          <p:nvPr>
+            <p:ph idx="1"/>
+          </p:nvPr>
+        </p:nvSpPr>
+        <p:spPr/>
+        <p:txBody>
+          <a:bodyPr>
+            <a:normAutofit fontScale="92500" lnSpcReduction="10000"/>
+          </a:bodyPr>
+          <a:lstStyle/>
+          <a:p>
+            <a:r>
+              <a:rPr lang="en-US" dirty="0"/>
+              <a:t>We already know few built in types</a:t>
+            </a:r>
+          </a:p>
+          <a:p>
+            <a:pPr lvl="1"/>
+            <a:r>
+              <a:rPr lang="en-US" dirty="0"/>
+              <a:t>int , float , char, bool</a:t>
+            </a:r>
+          </a:p>
+          <a:p>
+            <a:r>
+              <a:rPr lang="en-US" dirty="0"/>
+              <a:t>string </a:t>
+            </a:r>
+          </a:p>
+          <a:p>
+            <a:pPr lvl="1"/>
+            <a:r>
+              <a:rPr lang="en-US" dirty="0"/>
+              <a:t>Is a derived data type, </a:t>
+            </a:r>
+          </a:p>
+          <a:p>
+            <a:pPr lvl="1"/>
+            <a:r>
+              <a:rPr lang="en-US" dirty="0"/>
+              <a:t>Useful for names, description etc. </a:t>
+            </a:r>
+          </a:p>
+          <a:p>
+            <a:r>
+              <a:rPr lang="en-US" dirty="0"/>
+              <a:t>Header </a:t>
+            </a:r>
+          </a:p>
+          <a:p>
+            <a:pPr lvl="1"/>
+            <a:r>
+              <a:rPr lang="en-US" dirty="0"/>
+              <a:t>#include&lt;string&gt;</a:t>
+            </a:r>
+          </a:p>
+          <a:p>
+            <a:r>
+              <a:rPr lang="en-US" dirty="0"/>
+              <a:t>Usage </a:t>
+            </a:r>
+          </a:p>
+          <a:p>
+            <a:pPr lvl="1"/>
+            <a:r>
+              <a:rPr lang="en-US" dirty="0"/>
+              <a:t>string name;</a:t>
+            </a:r>
+          </a:p>
+          <a:p>
+            <a:pPr lvl="1"/>
+            <a:r>
+              <a:rPr lang="en-US" dirty="0" err="1"/>
+              <a:t>cin</a:t>
+            </a:r>
+            <a:r>
+              <a:rPr lang="en-US" dirty="0"/>
+              <a:t> &gt;&gt; name;</a:t>
+            </a:r>
+          </a:p>
+          <a:p>
+            <a:pPr lvl="1"/>
+            <a:r>
+              <a:rPr lang="en-US" dirty="0" err="1"/>
+              <a:t>cout</a:t>
+            </a:r>
+            <a:r>
+              <a:rPr lang="en-US" dirty="0"/>
+              <a:t> &lt;&lt;name;</a:t>
+            </a:r>
+            <a:br>
+              <a:rPr lang="en-US" dirty="0"/>
+            </a:br>
+            <a:endParaRPr lang="en-US" dirty="0"/>
+          </a:p>
+        </p:txBody>
+      </p:sp>
+      <p:sp>
+        <p:nvSpPr>
+          <p:cNvPr id="4" name="Footer Placeholder 3">
+            <a:extLst>
+              <a:ext uri="{FF2B5EF4-FFF2-40B4-BE49-F238E27FC236}">
+                <a16:creationId xmlns:a16="http://schemas.microsoft.com/office/drawing/2014/main" id="{975DF1C2-BCB7-988E-2E18-DF5C6412B181}"/>
+              </a:ext>
+            </a:extLst>
+          </p:cNvPr>
+          <p:cNvSpPr>
+            <a:spLocks noGrp="1"/>
+          </p:cNvSpPr>
+          <p:nvPr>
+            <p:ph type="ftr" sz="quarter" idx="11"/>
+          </p:nvPr>
+        </p:nvSpPr>
+        <p:spPr/>
+        <p:txBody>
+          <a:bodyPr/>
+          <a:lstStyle/>
+          <a:p>
+            <a:r>
+              <a:rPr lang="en-US"/>
+              <a:t>Week 4</a:t>
+            </a:r>
+          </a:p>
+        </p:txBody>
+      </p:sp>
+      <p:sp>
+        <p:nvSpPr>
+          <p:cNvPr id="5" name="Slide Number Placeholder 4">
+            <a:extLst>
+              <a:ext uri="{FF2B5EF4-FFF2-40B4-BE49-F238E27FC236}">
+                <a16:creationId xmlns:a16="http://schemas.microsoft.com/office/drawing/2014/main" id="{43357A0E-A54D-5BCE-A42F-833CB4760EC1}"/>
+              </a:ext>
+            </a:extLst>
+          </p:cNvPr>
+          <p:cNvSpPr>
+            <a:spLocks noGrp="1"/>
+          </p:cNvSpPr>
+          <p:nvPr>
+            <p:ph type="sldNum" sz="quarter" idx="12"/>
+          </p:nvPr>
+        </p:nvSpPr>
+        <p:spPr/>
+        <p:txBody>
+          <a:bodyPr/>
+          <a:lstStyle/>
+          <a:p>
+            <a:fld id="{3EC9E123-0CB8-4CD3-A52F-DDEB9B17898B}" type="slidenum">
+              <a:rPr lang="en-US" smtClean="0"/>
+              <a:t>75</a:t>
+            </a:fld>
+            <a:endParaRPr lang="en-US"/>
+          </a:p>
+        </p:txBody>
+      </p:sp>
+    </p:spTree>
+    <p:extLst>
+      <p:ext uri="{BB962C8B-B14F-4D97-AF65-F5344CB8AC3E}">
+        <p14:creationId xmlns:p14="http://schemas.microsoft.com/office/powerpoint/2010/main" val="4193919016"/>
       </p:ext>
     </p:extLst>
   </p:cSld>

--- a/all/Intro to Programming_all.pptx
+++ b/all/Intro to Programming_all.pptx
@@ -5,7 +5,7 @@
     <p:sldMasterId id="2147483648" r:id="rId1"/>
   </p:sldMasterIdLst>
   <p:notesMasterIdLst>
-    <p:notesMasterId r:id="rId77"/>
+    <p:notesMasterId r:id="rId85"/>
   </p:notesMasterIdLst>
   <p:sldIdLst>
     <p:sldId id="256" r:id="rId2"/>
@@ -82,7 +82,15 @@
     <p:sldId id="332" r:id="rId73"/>
     <p:sldId id="330" r:id="rId74"/>
     <p:sldId id="333" r:id="rId75"/>
-    <p:sldId id="281" r:id="rId76"/>
+    <p:sldId id="334" r:id="rId76"/>
+    <p:sldId id="337" r:id="rId77"/>
+    <p:sldId id="335" r:id="rId78"/>
+    <p:sldId id="336" r:id="rId79"/>
+    <p:sldId id="338" r:id="rId80"/>
+    <p:sldId id="339" r:id="rId81"/>
+    <p:sldId id="340" r:id="rId82"/>
+    <p:sldId id="341" r:id="rId83"/>
+    <p:sldId id="281" r:id="rId84"/>
   </p:sldIdLst>
   <p:sldSz cx="12192000" cy="6858000"/>
   <p:notesSz cx="7315200" cy="9601200"/>
@@ -260,6 +268,14 @@
             <p14:sldId id="332"/>
             <p14:sldId id="330"/>
             <p14:sldId id="333"/>
+            <p14:sldId id="334"/>
+            <p14:sldId id="337"/>
+            <p14:sldId id="335"/>
+            <p14:sldId id="336"/>
+            <p14:sldId id="338"/>
+            <p14:sldId id="339"/>
+            <p14:sldId id="340"/>
+            <p14:sldId id="341"/>
             <p14:sldId id="281"/>
           </p14:sldIdLst>
         </p14:section>
@@ -354,7 +370,7 @@
           <a:p>
             <a:fld id="{03FEC988-D264-4851-9784-E262DEC12FF7}" type="datetimeFigureOut">
               <a:rPr lang="en-US" smtClean="0"/>
-              <a:t>11/13/2025</a:t>
+              <a:t>12/4/2025</a:t>
             </a:fld>
             <a:endParaRPr lang="en-US"/>
           </a:p>
@@ -768,7 +784,7 @@
           <a:p>
             <a:fld id="{FC9FB2DD-DF35-4B84-9135-C0E6A5E9FBB3}" type="datetimeFigureOut">
               <a:rPr lang="en-US" smtClean="0"/>
-              <a:t>11/13/2025</a:t>
+              <a:t>12/4/2025</a:t>
             </a:fld>
             <a:endParaRPr lang="en-US"/>
           </a:p>
@@ -966,7 +982,7 @@
           <a:p>
             <a:fld id="{FC9FB2DD-DF35-4B84-9135-C0E6A5E9FBB3}" type="datetimeFigureOut">
               <a:rPr lang="en-US" smtClean="0"/>
-              <a:t>11/13/2025</a:t>
+              <a:t>12/4/2025</a:t>
             </a:fld>
             <a:endParaRPr lang="en-US"/>
           </a:p>
@@ -1174,7 +1190,7 @@
           <a:p>
             <a:fld id="{FC9FB2DD-DF35-4B84-9135-C0E6A5E9FBB3}" type="datetimeFigureOut">
               <a:rPr lang="en-US" smtClean="0"/>
-              <a:t>11/13/2025</a:t>
+              <a:t>12/4/2025</a:t>
             </a:fld>
             <a:endParaRPr lang="en-US"/>
           </a:p>
@@ -1372,7 +1388,7 @@
           <a:p>
             <a:fld id="{FC9FB2DD-DF35-4B84-9135-C0E6A5E9FBB3}" type="datetimeFigureOut">
               <a:rPr lang="en-US" smtClean="0"/>
-              <a:t>11/13/2025</a:t>
+              <a:t>12/4/2025</a:t>
             </a:fld>
             <a:endParaRPr lang="en-US"/>
           </a:p>
@@ -1647,7 +1663,7 @@
           <a:p>
             <a:fld id="{FC9FB2DD-DF35-4B84-9135-C0E6A5E9FBB3}" type="datetimeFigureOut">
               <a:rPr lang="en-US" smtClean="0"/>
-              <a:t>11/13/2025</a:t>
+              <a:t>12/4/2025</a:t>
             </a:fld>
             <a:endParaRPr lang="en-US"/>
           </a:p>
@@ -1912,7 +1928,7 @@
           <a:p>
             <a:fld id="{FC9FB2DD-DF35-4B84-9135-C0E6A5E9FBB3}" type="datetimeFigureOut">
               <a:rPr lang="en-US" smtClean="0"/>
-              <a:t>11/13/2025</a:t>
+              <a:t>12/4/2025</a:t>
             </a:fld>
             <a:endParaRPr lang="en-US"/>
           </a:p>
@@ -2324,7 +2340,7 @@
           <a:p>
             <a:fld id="{FC9FB2DD-DF35-4B84-9135-C0E6A5E9FBB3}" type="datetimeFigureOut">
               <a:rPr lang="en-US" smtClean="0"/>
-              <a:t>11/13/2025</a:t>
+              <a:t>12/4/2025</a:t>
             </a:fld>
             <a:endParaRPr lang="en-US"/>
           </a:p>
@@ -2465,7 +2481,7 @@
           <a:p>
             <a:fld id="{FC9FB2DD-DF35-4B84-9135-C0E6A5E9FBB3}" type="datetimeFigureOut">
               <a:rPr lang="en-US" smtClean="0"/>
-              <a:t>11/13/2025</a:t>
+              <a:t>12/4/2025</a:t>
             </a:fld>
             <a:endParaRPr lang="en-US"/>
           </a:p>
@@ -2578,7 +2594,7 @@
           <a:p>
             <a:fld id="{FC9FB2DD-DF35-4B84-9135-C0E6A5E9FBB3}" type="datetimeFigureOut">
               <a:rPr lang="en-US" smtClean="0"/>
-              <a:t>11/13/2025</a:t>
+              <a:t>12/4/2025</a:t>
             </a:fld>
             <a:endParaRPr lang="en-US"/>
           </a:p>
@@ -2889,7 +2905,7 @@
           <a:p>
             <a:fld id="{FC9FB2DD-DF35-4B84-9135-C0E6A5E9FBB3}" type="datetimeFigureOut">
               <a:rPr lang="en-US" smtClean="0"/>
-              <a:t>11/13/2025</a:t>
+              <a:t>12/4/2025</a:t>
             </a:fld>
             <a:endParaRPr lang="en-US"/>
           </a:p>
@@ -3177,7 +3193,7 @@
           <a:p>
             <a:fld id="{FC9FB2DD-DF35-4B84-9135-C0E6A5E9FBB3}" type="datetimeFigureOut">
               <a:rPr lang="en-US" smtClean="0"/>
-              <a:t>11/13/2025</a:t>
+              <a:t>12/4/2025</a:t>
             </a:fld>
             <a:endParaRPr lang="en-US"/>
           </a:p>
@@ -3418,7 +3434,7 @@
           <a:p>
             <a:fld id="{FC9FB2DD-DF35-4B84-9135-C0E6A5E9FBB3}" type="datetimeFigureOut">
               <a:rPr lang="en-US" smtClean="0"/>
-              <a:t>11/13/2025</a:t>
+              <a:t>12/4/2025</a:t>
             </a:fld>
             <a:endParaRPr lang="en-US"/>
           </a:p>
@@ -22506,7 +22522,7 @@
           <p:cNvPr id="2" name="Title 1">
             <a:extLst>
               <a:ext uri="{FF2B5EF4-FFF2-40B4-BE49-F238E27FC236}">
-                <a16:creationId xmlns:a16="http://schemas.microsoft.com/office/drawing/2014/main" id="{7F3F2022-DBA0-F8BB-70DA-B01A01136D53}"/>
+                <a16:creationId xmlns:a16="http://schemas.microsoft.com/office/drawing/2014/main" id="{CE403FE4-E0CF-9BBE-EED4-9CC1E506A9E5}"/>
               </a:ext>
             </a:extLst>
           </p:cNvPr>
@@ -22524,7 +22540,7 @@
           <a:p>
             <a:r>
               <a:rPr lang="en-US" dirty="0"/>
-              <a:t>string data type</a:t>
+              <a:t>Strings in C++</a:t>
             </a:r>
           </a:p>
         </p:txBody>
@@ -22534,7 +22550,7 @@
           <p:cNvPr id="3" name="Content Placeholder 2">
             <a:extLst>
               <a:ext uri="{FF2B5EF4-FFF2-40B4-BE49-F238E27FC236}">
-                <a16:creationId xmlns:a16="http://schemas.microsoft.com/office/drawing/2014/main" id="{12C7C63C-7B86-C453-D132-93C8AB055AC5}"/>
+                <a16:creationId xmlns:a16="http://schemas.microsoft.com/office/drawing/2014/main" id="{5BE118FF-F325-7813-4CD3-021084819BE1}"/>
               </a:ext>
             </a:extLst>
           </p:cNvPr>
@@ -22554,88 +22570,98 @@
           <a:p>
             <a:r>
               <a:rPr lang="en-US" dirty="0"/>
-              <a:t>We already know few built in types</a:t>
-            </a:r>
-          </a:p>
-          <a:p>
-            <a:pPr lvl="1"/>
-            <a:r>
-              <a:rPr lang="en-US" dirty="0"/>
-              <a:t>int , float , char, bool</a:t>
-            </a:r>
-          </a:p>
-          <a:p>
-            <a:r>
-              <a:rPr lang="en-US" dirty="0"/>
-              <a:t>string </a:t>
-            </a:r>
-          </a:p>
-          <a:p>
-            <a:pPr lvl="1"/>
-            <a:r>
-              <a:rPr lang="en-US" dirty="0"/>
-              <a:t>Is a derived data type, </a:t>
-            </a:r>
-          </a:p>
-          <a:p>
-            <a:pPr lvl="1"/>
-            <a:r>
-              <a:rPr lang="en-US" dirty="0"/>
-              <a:t>Useful for names, description etc. </a:t>
-            </a:r>
-          </a:p>
-          <a:p>
-            <a:r>
-              <a:rPr lang="en-US" dirty="0"/>
-              <a:t>Header </a:t>
-            </a:r>
-          </a:p>
-          <a:p>
-            <a:pPr lvl="1"/>
-            <a:r>
-              <a:rPr lang="en-US" dirty="0"/>
-              <a:t>#include&lt;string&gt;</a:t>
-            </a:r>
-          </a:p>
-          <a:p>
-            <a:r>
-              <a:rPr lang="en-US" dirty="0"/>
-              <a:t>Usage </a:t>
-            </a:r>
-          </a:p>
-          <a:p>
-            <a:pPr lvl="1"/>
-            <a:r>
-              <a:rPr lang="en-US" dirty="0"/>
-              <a:t>string name;</a:t>
-            </a:r>
-          </a:p>
-          <a:p>
-            <a:pPr lvl="1"/>
-            <a:r>
-              <a:rPr lang="en-US" dirty="0" err="1"/>
-              <a:t>cin</a:t>
-            </a:r>
-            <a:r>
-              <a:rPr lang="en-US" dirty="0"/>
-              <a:t> &gt;&gt; name;</a:t>
-            </a:r>
-          </a:p>
-          <a:p>
-            <a:pPr lvl="1"/>
-            <a:r>
-              <a:rPr lang="en-US" dirty="0" err="1"/>
-              <a:t>cout</a:t>
-            </a:r>
-            <a:r>
-              <a:rPr lang="en-US" dirty="0"/>
-              <a:t> &lt;&lt;name;</a:t>
-            </a:r>
-            <a:br>
-              <a:rPr lang="en-US" dirty="0"/>
-            </a:br>
+              <a:t>String are made of characters</a:t>
+            </a:r>
+          </a:p>
+          <a:p>
+            <a:r>
+              <a:rPr lang="en-US" dirty="0"/>
+              <a:t>Fundamentally it is array of char </a:t>
+            </a:r>
+          </a:p>
+          <a:p>
+            <a:pPr lvl="1"/>
+            <a:r>
+              <a:rPr lang="en-US" dirty="0"/>
+              <a:t>char name[10];</a:t>
+            </a:r>
+          </a:p>
+          <a:p>
+            <a:r>
+              <a:rPr lang="en-US" dirty="0"/>
+              <a:t>They are null terminated</a:t>
+            </a:r>
+          </a:p>
+          <a:p>
+            <a:pPr lvl="1"/>
+            <a:r>
+              <a:rPr lang="en-US" dirty="0"/>
+              <a:t>Last character in array is null : ‘\0’</a:t>
+            </a:r>
+          </a:p>
+          <a:p>
+            <a:r>
+              <a:rPr lang="en-US" dirty="0"/>
+              <a:t>Example</a:t>
+            </a:r>
+          </a:p>
+          <a:p>
+            <a:pPr lvl="1"/>
+            <a:r>
+              <a:rPr lang="en-US" dirty="0"/>
+              <a:t>char greeting[20] = “hello;</a:t>
+            </a:r>
+          </a:p>
+          <a:p>
+            <a:pPr lvl="1"/>
+            <a:r>
+              <a:rPr lang="en-US" dirty="0"/>
+              <a:t>char name[20] = “Adam”;</a:t>
+            </a:r>
+          </a:p>
+          <a:p>
+            <a:r>
+              <a:rPr lang="en-US" i="1" dirty="0"/>
+              <a:t>* there is a second advanced type of string in C++, </a:t>
+            </a:r>
+            <a:r>
+              <a:rPr lang="en-US" b="1" i="1" dirty="0"/>
+              <a:t>std::string</a:t>
+            </a:r>
+          </a:p>
+          <a:p>
+            <a:pPr lvl="1"/>
+            <a:r>
+              <a:rPr lang="en-US" dirty="0"/>
+              <a:t>This is fundamentally </a:t>
+            </a:r>
+            <a:r>
+              <a:rPr lang="en-US" b="1" dirty="0"/>
+              <a:t>different from array of char </a:t>
+            </a:r>
+            <a:r>
+              <a:rPr lang="en-US" dirty="0"/>
+              <a:t>above</a:t>
+            </a:r>
+          </a:p>
+          <a:p>
+            <a:pPr lvl="1"/>
+            <a:r>
+              <a:rPr lang="en-US" dirty="0"/>
+              <a:t>(But it is also very similar)</a:t>
+            </a:r>
+          </a:p>
+          <a:p>
+            <a:pPr lvl="1"/>
             <a:endParaRPr lang="en-US" dirty="0"/>
           </a:p>
+          <a:p>
+            <a:pPr lvl="1"/>
+            <a:endParaRPr lang="en-US" dirty="0"/>
+          </a:p>
+          <a:p>
+            <a:endParaRPr lang="en-US" dirty="0"/>
+          </a:p>
         </p:txBody>
       </p:sp>
       <p:sp>
@@ -22643,7 +22669,7 @@
           <p:cNvPr id="4" name="Footer Placeholder 3">
             <a:extLst>
               <a:ext uri="{FF2B5EF4-FFF2-40B4-BE49-F238E27FC236}">
-                <a16:creationId xmlns:a16="http://schemas.microsoft.com/office/drawing/2014/main" id="{975DF1C2-BCB7-988E-2E18-DF5C6412B181}"/>
+                <a16:creationId xmlns:a16="http://schemas.microsoft.com/office/drawing/2014/main" id="{6AD10A7A-9F9D-292B-D812-93EBA59C9425}"/>
               </a:ext>
             </a:extLst>
           </p:cNvPr>
@@ -22661,7 +22687,7 @@
           <a:p>
             <a:r>
               <a:rPr lang="en-US"/>
-              <a:t>Week 4</a:t>
+              <a:t>Week 11</a:t>
             </a:r>
           </a:p>
         </p:txBody>
@@ -22671,7 +22697,7 @@
           <p:cNvPr id="5" name="Slide Number Placeholder 4">
             <a:extLst>
               <a:ext uri="{FF2B5EF4-FFF2-40B4-BE49-F238E27FC236}">
-                <a16:creationId xmlns:a16="http://schemas.microsoft.com/office/drawing/2014/main" id="{43357A0E-A54D-5BCE-A42F-833CB4760EC1}"/>
+                <a16:creationId xmlns:a16="http://schemas.microsoft.com/office/drawing/2014/main" id="{450331BA-2141-9BF3-DF1D-092DBF4668FF}"/>
               </a:ext>
             </a:extLst>
           </p:cNvPr>
@@ -22698,7 +22724,707 @@
     </p:spTree>
     <p:extLst>
       <p:ext uri="{BB962C8B-B14F-4D97-AF65-F5344CB8AC3E}">
-        <p14:creationId xmlns:p14="http://schemas.microsoft.com/office/powerpoint/2010/main" val="4193919016"/>
+        <p14:creationId xmlns:p14="http://schemas.microsoft.com/office/powerpoint/2010/main" val="1586216990"/>
+      </p:ext>
+    </p:extLst>
+  </p:cSld>
+  <p:clrMapOvr>
+    <a:masterClrMapping/>
+  </p:clrMapOvr>
+</p:sld>
+</file>
+
+<file path=ppt/slides/slide76.xml><?xml version="1.0" encoding="utf-8"?>
+<p:sld xmlns:a="http://schemas.openxmlformats.org/drawingml/2006/main" xmlns:r="http://schemas.openxmlformats.org/officeDocument/2006/relationships" xmlns:p="http://schemas.openxmlformats.org/presentationml/2006/main">
+  <p:cSld>
+    <p:spTree>
+      <p:nvGrpSpPr>
+        <p:cNvPr id="1" name=""/>
+        <p:cNvGrpSpPr/>
+        <p:nvPr/>
+      </p:nvGrpSpPr>
+      <p:grpSpPr>
+        <a:xfrm>
+          <a:off x="0" y="0"/>
+          <a:ext cx="0" cy="0"/>
+          <a:chOff x="0" y="0"/>
+          <a:chExt cx="0" cy="0"/>
+        </a:xfrm>
+      </p:grpSpPr>
+      <p:sp>
+        <p:nvSpPr>
+          <p:cNvPr id="2" name="Title 1">
+            <a:extLst>
+              <a:ext uri="{FF2B5EF4-FFF2-40B4-BE49-F238E27FC236}">
+                <a16:creationId xmlns:a16="http://schemas.microsoft.com/office/drawing/2014/main" id="{A0EE08C5-527E-597A-7125-D77EBF18D8AD}"/>
+              </a:ext>
+            </a:extLst>
+          </p:cNvPr>
+          <p:cNvSpPr>
+            <a:spLocks noGrp="1"/>
+          </p:cNvSpPr>
+          <p:nvPr>
+            <p:ph type="title"/>
+          </p:nvPr>
+        </p:nvSpPr>
+        <p:spPr/>
+        <p:txBody>
+          <a:bodyPr/>
+          <a:lstStyle/>
+          <a:p>
+            <a:r>
+              <a:rPr lang="en-US" dirty="0"/>
+              <a:t>String : fundamentals</a:t>
+            </a:r>
+          </a:p>
+        </p:txBody>
+      </p:sp>
+      <p:pic>
+        <p:nvPicPr>
+          <p:cNvPr id="5" name="Content Placeholder 4">
+            <a:extLst>
+              <a:ext uri="{FF2B5EF4-FFF2-40B4-BE49-F238E27FC236}">
+                <a16:creationId xmlns:a16="http://schemas.microsoft.com/office/drawing/2014/main" id="{77D5AF42-F8C6-00B7-F2BB-9E65256CCC33}"/>
+              </a:ext>
+            </a:extLst>
+          </p:cNvPr>
+          <p:cNvPicPr>
+            <a:picLocks noGrp="1" noChangeAspect="1"/>
+          </p:cNvPicPr>
+          <p:nvPr>
+            <p:ph idx="1"/>
+          </p:nvPr>
+        </p:nvPicPr>
+        <p:blipFill>
+          <a:blip r:embed="rId2"/>
+          <a:stretch>
+            <a:fillRect/>
+          </a:stretch>
+        </p:blipFill>
+        <p:spPr>
+          <a:xfrm>
+            <a:off x="956064" y="1953282"/>
+            <a:ext cx="5931205" cy="3657788"/>
+          </a:xfrm>
+        </p:spPr>
+      </p:pic>
+      <p:sp>
+        <p:nvSpPr>
+          <p:cNvPr id="6" name="Footer Placeholder 5">
+            <a:extLst>
+              <a:ext uri="{FF2B5EF4-FFF2-40B4-BE49-F238E27FC236}">
+                <a16:creationId xmlns:a16="http://schemas.microsoft.com/office/drawing/2014/main" id="{C1775DCB-4353-DA43-A40F-6B5C6DEF1A6D}"/>
+              </a:ext>
+            </a:extLst>
+          </p:cNvPr>
+          <p:cNvSpPr>
+            <a:spLocks noGrp="1"/>
+          </p:cNvSpPr>
+          <p:nvPr>
+            <p:ph type="ftr" sz="quarter" idx="11"/>
+          </p:nvPr>
+        </p:nvSpPr>
+        <p:spPr/>
+        <p:txBody>
+          <a:bodyPr/>
+          <a:lstStyle/>
+          <a:p>
+            <a:r>
+              <a:rPr lang="en-US"/>
+              <a:t>Week 11</a:t>
+            </a:r>
+          </a:p>
+        </p:txBody>
+      </p:sp>
+      <p:sp>
+        <p:nvSpPr>
+          <p:cNvPr id="7" name="Slide Number Placeholder 6">
+            <a:extLst>
+              <a:ext uri="{FF2B5EF4-FFF2-40B4-BE49-F238E27FC236}">
+                <a16:creationId xmlns:a16="http://schemas.microsoft.com/office/drawing/2014/main" id="{761ACB1E-2C6F-15DE-B0F2-0A0ED3F127AB}"/>
+              </a:ext>
+            </a:extLst>
+          </p:cNvPr>
+          <p:cNvSpPr>
+            <a:spLocks noGrp="1"/>
+          </p:cNvSpPr>
+          <p:nvPr>
+            <p:ph type="sldNum" sz="quarter" idx="12"/>
+          </p:nvPr>
+        </p:nvSpPr>
+        <p:spPr/>
+        <p:txBody>
+          <a:bodyPr/>
+          <a:lstStyle/>
+          <a:p>
+            <a:fld id="{3EC9E123-0CB8-4CD3-A52F-DDEB9B17898B}" type="slidenum">
+              <a:rPr lang="en-US" smtClean="0"/>
+              <a:t>76</a:t>
+            </a:fld>
+            <a:endParaRPr lang="en-US"/>
+          </a:p>
+        </p:txBody>
+      </p:sp>
+    </p:spTree>
+    <p:extLst>
+      <p:ext uri="{BB962C8B-B14F-4D97-AF65-F5344CB8AC3E}">
+        <p14:creationId xmlns:p14="http://schemas.microsoft.com/office/powerpoint/2010/main" val="1559371523"/>
+      </p:ext>
+    </p:extLst>
+  </p:cSld>
+  <p:clrMapOvr>
+    <a:masterClrMapping/>
+  </p:clrMapOvr>
+</p:sld>
+</file>
+
+<file path=ppt/slides/slide77.xml><?xml version="1.0" encoding="utf-8"?>
+<p:sld xmlns:a="http://schemas.openxmlformats.org/drawingml/2006/main" xmlns:r="http://schemas.openxmlformats.org/officeDocument/2006/relationships" xmlns:p="http://schemas.openxmlformats.org/presentationml/2006/main">
+  <p:cSld>
+    <p:spTree>
+      <p:nvGrpSpPr>
+        <p:cNvPr id="1" name=""/>
+        <p:cNvGrpSpPr/>
+        <p:nvPr/>
+      </p:nvGrpSpPr>
+      <p:grpSpPr>
+        <a:xfrm>
+          <a:off x="0" y="0"/>
+          <a:ext cx="0" cy="0"/>
+          <a:chOff x="0" y="0"/>
+          <a:chExt cx="0" cy="0"/>
+        </a:xfrm>
+      </p:grpSpPr>
+      <p:sp>
+        <p:nvSpPr>
+          <p:cNvPr id="2" name="Title 1">
+            <a:extLst>
+              <a:ext uri="{FF2B5EF4-FFF2-40B4-BE49-F238E27FC236}">
+                <a16:creationId xmlns:a16="http://schemas.microsoft.com/office/drawing/2014/main" id="{5867F2C6-6830-7B54-CD06-044EA3D2C0CE}"/>
+              </a:ext>
+            </a:extLst>
+          </p:cNvPr>
+          <p:cNvSpPr>
+            <a:spLocks noGrp="1"/>
+          </p:cNvSpPr>
+          <p:nvPr>
+            <p:ph type="title"/>
+          </p:nvPr>
+        </p:nvSpPr>
+        <p:spPr/>
+        <p:txBody>
+          <a:bodyPr/>
+          <a:lstStyle/>
+          <a:p>
+            <a:r>
+              <a:rPr lang="en-US" dirty="0"/>
+              <a:t>String operations : include&lt;</a:t>
+            </a:r>
+            <a:r>
+              <a:rPr lang="en-US" dirty="0" err="1"/>
+              <a:t>string.h</a:t>
+            </a:r>
+            <a:r>
+              <a:rPr lang="en-US" dirty="0"/>
+              <a:t>&gt;</a:t>
+            </a:r>
+          </a:p>
+        </p:txBody>
+      </p:sp>
+      <p:sp>
+        <p:nvSpPr>
+          <p:cNvPr id="3" name="Content Placeholder 2">
+            <a:extLst>
+              <a:ext uri="{FF2B5EF4-FFF2-40B4-BE49-F238E27FC236}">
+                <a16:creationId xmlns:a16="http://schemas.microsoft.com/office/drawing/2014/main" id="{CBE4E3CA-1390-B84A-5813-5FD3CEBEB93C}"/>
+              </a:ext>
+            </a:extLst>
+          </p:cNvPr>
+          <p:cNvSpPr>
+            <a:spLocks noGrp="1"/>
+          </p:cNvSpPr>
+          <p:nvPr>
+            <p:ph idx="1"/>
+          </p:nvPr>
+        </p:nvSpPr>
+        <p:spPr/>
+        <p:txBody>
+          <a:bodyPr/>
+          <a:lstStyle/>
+          <a:p>
+            <a:r>
+              <a:rPr lang="en-US" dirty="0" err="1"/>
+              <a:t>strlen</a:t>
+            </a:r>
+            <a:r>
+              <a:rPr lang="en-US" dirty="0"/>
+              <a:t>(): Returns the length of a string (excluding the null terminator).</a:t>
+            </a:r>
+          </a:p>
+          <a:p>
+            <a:r>
+              <a:rPr lang="en-US" dirty="0" err="1"/>
+              <a:t>strcpy</a:t>
+            </a:r>
+            <a:r>
+              <a:rPr lang="en-US" dirty="0"/>
+              <a:t>(): Copies one string to another.</a:t>
+            </a:r>
+          </a:p>
+          <a:p>
+            <a:r>
+              <a:rPr lang="en-US" dirty="0" err="1"/>
+              <a:t>strcat</a:t>
+            </a:r>
+            <a:r>
+              <a:rPr lang="en-US" dirty="0"/>
+              <a:t>(): Concatenates two strings.</a:t>
+            </a:r>
+          </a:p>
+          <a:p>
+            <a:r>
+              <a:rPr lang="en-US" dirty="0" err="1"/>
+              <a:t>strcmp</a:t>
+            </a:r>
+            <a:r>
+              <a:rPr lang="en-US" dirty="0"/>
+              <a:t>(): Compares two strings.</a:t>
+            </a:r>
+          </a:p>
+          <a:p>
+            <a:r>
+              <a:rPr lang="en-US" dirty="0" err="1"/>
+              <a:t>strstr</a:t>
+            </a:r>
+            <a:r>
+              <a:rPr lang="en-US" dirty="0"/>
+              <a:t>(): Finds the first occurrence of a substring within a string.</a:t>
+            </a:r>
+          </a:p>
+          <a:p>
+            <a:r>
+              <a:rPr lang="en-US" dirty="0"/>
+              <a:t>Some compiler will require to use _s versions of these functions</a:t>
+            </a:r>
+          </a:p>
+          <a:p>
+            <a:pPr lvl="1"/>
+            <a:r>
+              <a:rPr lang="en-US" dirty="0"/>
+              <a:t>E.g. </a:t>
+            </a:r>
+            <a:r>
+              <a:rPr lang="en-US" dirty="0" err="1"/>
+              <a:t>strcpy_s</a:t>
+            </a:r>
+            <a:r>
+              <a:rPr lang="en-US" dirty="0"/>
+              <a:t> instead of </a:t>
+            </a:r>
+            <a:r>
+              <a:rPr lang="en-US" dirty="0" err="1"/>
+              <a:t>strcpy</a:t>
+            </a:r>
+            <a:endParaRPr lang="en-US" dirty="0"/>
+          </a:p>
+        </p:txBody>
+      </p:sp>
+      <p:sp>
+        <p:nvSpPr>
+          <p:cNvPr id="6" name="Footer Placeholder 5">
+            <a:extLst>
+              <a:ext uri="{FF2B5EF4-FFF2-40B4-BE49-F238E27FC236}">
+                <a16:creationId xmlns:a16="http://schemas.microsoft.com/office/drawing/2014/main" id="{F2E8EC43-7618-B2E9-9760-6807E33B58C6}"/>
+              </a:ext>
+            </a:extLst>
+          </p:cNvPr>
+          <p:cNvSpPr>
+            <a:spLocks noGrp="1"/>
+          </p:cNvSpPr>
+          <p:nvPr>
+            <p:ph type="ftr" sz="quarter" idx="11"/>
+          </p:nvPr>
+        </p:nvSpPr>
+        <p:spPr/>
+        <p:txBody>
+          <a:bodyPr/>
+          <a:lstStyle/>
+          <a:p>
+            <a:r>
+              <a:rPr lang="en-US"/>
+              <a:t>Week 11</a:t>
+            </a:r>
+          </a:p>
+        </p:txBody>
+      </p:sp>
+      <p:sp>
+        <p:nvSpPr>
+          <p:cNvPr id="7" name="Slide Number Placeholder 6">
+            <a:extLst>
+              <a:ext uri="{FF2B5EF4-FFF2-40B4-BE49-F238E27FC236}">
+                <a16:creationId xmlns:a16="http://schemas.microsoft.com/office/drawing/2014/main" id="{05304F85-5D58-66F7-8021-EEDA49903EF5}"/>
+              </a:ext>
+            </a:extLst>
+          </p:cNvPr>
+          <p:cNvSpPr>
+            <a:spLocks noGrp="1"/>
+          </p:cNvSpPr>
+          <p:nvPr>
+            <p:ph type="sldNum" sz="quarter" idx="12"/>
+          </p:nvPr>
+        </p:nvSpPr>
+        <p:spPr/>
+        <p:txBody>
+          <a:bodyPr/>
+          <a:lstStyle/>
+          <a:p>
+            <a:fld id="{3EC9E123-0CB8-4CD3-A52F-DDEB9B17898B}" type="slidenum">
+              <a:rPr lang="en-US" smtClean="0"/>
+              <a:t>77</a:t>
+            </a:fld>
+            <a:endParaRPr lang="en-US"/>
+          </a:p>
+        </p:txBody>
+      </p:sp>
+    </p:spTree>
+    <p:extLst>
+      <p:ext uri="{BB962C8B-B14F-4D97-AF65-F5344CB8AC3E}">
+        <p14:creationId xmlns:p14="http://schemas.microsoft.com/office/powerpoint/2010/main" val="1880975456"/>
+      </p:ext>
+    </p:extLst>
+  </p:cSld>
+  <p:clrMapOvr>
+    <a:masterClrMapping/>
+  </p:clrMapOvr>
+</p:sld>
+</file>
+
+<file path=ppt/slides/slide78.xml><?xml version="1.0" encoding="utf-8"?>
+<p:sld xmlns:a="http://schemas.openxmlformats.org/drawingml/2006/main" xmlns:r="http://schemas.openxmlformats.org/officeDocument/2006/relationships" xmlns:p="http://schemas.openxmlformats.org/presentationml/2006/main">
+  <p:cSld>
+    <p:spTree>
+      <p:nvGrpSpPr>
+        <p:cNvPr id="1" name=""/>
+        <p:cNvGrpSpPr/>
+        <p:nvPr/>
+      </p:nvGrpSpPr>
+      <p:grpSpPr>
+        <a:xfrm>
+          <a:off x="0" y="0"/>
+          <a:ext cx="0" cy="0"/>
+          <a:chOff x="0" y="0"/>
+          <a:chExt cx="0" cy="0"/>
+        </a:xfrm>
+      </p:grpSpPr>
+      <p:sp>
+        <p:nvSpPr>
+          <p:cNvPr id="2" name="Title 1">
+            <a:extLst>
+              <a:ext uri="{FF2B5EF4-FFF2-40B4-BE49-F238E27FC236}">
+                <a16:creationId xmlns:a16="http://schemas.microsoft.com/office/drawing/2014/main" id="{F00B9261-4602-4943-8281-E3C03441CDCC}"/>
+              </a:ext>
+            </a:extLst>
+          </p:cNvPr>
+          <p:cNvSpPr>
+            <a:spLocks noGrp="1"/>
+          </p:cNvSpPr>
+          <p:nvPr>
+            <p:ph type="title"/>
+          </p:nvPr>
+        </p:nvSpPr>
+        <p:spPr/>
+        <p:txBody>
+          <a:bodyPr/>
+          <a:lstStyle/>
+          <a:p>
+            <a:r>
+              <a:rPr lang="en-US" dirty="0"/>
+              <a:t>Using string functions</a:t>
+            </a:r>
+          </a:p>
+        </p:txBody>
+      </p:sp>
+      <p:pic>
+        <p:nvPicPr>
+          <p:cNvPr id="5" name="Content Placeholder 4">
+            <a:extLst>
+              <a:ext uri="{FF2B5EF4-FFF2-40B4-BE49-F238E27FC236}">
+                <a16:creationId xmlns:a16="http://schemas.microsoft.com/office/drawing/2014/main" id="{6B927209-7FE4-59F3-42A7-1A7DFEEE66D2}"/>
+              </a:ext>
+            </a:extLst>
+          </p:cNvPr>
+          <p:cNvPicPr>
+            <a:picLocks noGrp="1" noChangeAspect="1"/>
+          </p:cNvPicPr>
+          <p:nvPr>
+            <p:ph idx="1"/>
+          </p:nvPr>
+        </p:nvPicPr>
+        <p:blipFill>
+          <a:blip r:embed="rId2"/>
+          <a:stretch>
+            <a:fillRect/>
+          </a:stretch>
+        </p:blipFill>
+        <p:spPr>
+          <a:xfrm>
+            <a:off x="909052" y="1763841"/>
+            <a:ext cx="5950173" cy="4351338"/>
+          </a:xfrm>
+        </p:spPr>
+      </p:pic>
+      <p:sp>
+        <p:nvSpPr>
+          <p:cNvPr id="6" name="Footer Placeholder 5">
+            <a:extLst>
+              <a:ext uri="{FF2B5EF4-FFF2-40B4-BE49-F238E27FC236}">
+                <a16:creationId xmlns:a16="http://schemas.microsoft.com/office/drawing/2014/main" id="{C3BB9542-8B5F-AAE9-4DA2-CB19339CD67D}"/>
+              </a:ext>
+            </a:extLst>
+          </p:cNvPr>
+          <p:cNvSpPr>
+            <a:spLocks noGrp="1"/>
+          </p:cNvSpPr>
+          <p:nvPr>
+            <p:ph type="ftr" sz="quarter" idx="11"/>
+          </p:nvPr>
+        </p:nvSpPr>
+        <p:spPr/>
+        <p:txBody>
+          <a:bodyPr/>
+          <a:lstStyle/>
+          <a:p>
+            <a:r>
+              <a:rPr lang="en-US"/>
+              <a:t>Week 11</a:t>
+            </a:r>
+          </a:p>
+        </p:txBody>
+      </p:sp>
+      <p:sp>
+        <p:nvSpPr>
+          <p:cNvPr id="7" name="Slide Number Placeholder 6">
+            <a:extLst>
+              <a:ext uri="{FF2B5EF4-FFF2-40B4-BE49-F238E27FC236}">
+                <a16:creationId xmlns:a16="http://schemas.microsoft.com/office/drawing/2014/main" id="{9A76A117-B733-AC52-5190-2B623D703DDB}"/>
+              </a:ext>
+            </a:extLst>
+          </p:cNvPr>
+          <p:cNvSpPr>
+            <a:spLocks noGrp="1"/>
+          </p:cNvSpPr>
+          <p:nvPr>
+            <p:ph type="sldNum" sz="quarter" idx="12"/>
+          </p:nvPr>
+        </p:nvSpPr>
+        <p:spPr/>
+        <p:txBody>
+          <a:bodyPr/>
+          <a:lstStyle/>
+          <a:p>
+            <a:fld id="{3EC9E123-0CB8-4CD3-A52F-DDEB9B17898B}" type="slidenum">
+              <a:rPr lang="en-US" smtClean="0"/>
+              <a:t>78</a:t>
+            </a:fld>
+            <a:endParaRPr lang="en-US"/>
+          </a:p>
+        </p:txBody>
+      </p:sp>
+    </p:spTree>
+    <p:extLst>
+      <p:ext uri="{BB962C8B-B14F-4D97-AF65-F5344CB8AC3E}">
+        <p14:creationId xmlns:p14="http://schemas.microsoft.com/office/powerpoint/2010/main" val="147944397"/>
+      </p:ext>
+    </p:extLst>
+  </p:cSld>
+  <p:clrMapOvr>
+    <a:masterClrMapping/>
+  </p:clrMapOvr>
+</p:sld>
+</file>
+
+<file path=ppt/slides/slide79.xml><?xml version="1.0" encoding="utf-8"?>
+<p:sld xmlns:a="http://schemas.openxmlformats.org/drawingml/2006/main" xmlns:r="http://schemas.openxmlformats.org/officeDocument/2006/relationships" xmlns:p="http://schemas.openxmlformats.org/presentationml/2006/main">
+  <p:cSld>
+    <p:spTree>
+      <p:nvGrpSpPr>
+        <p:cNvPr id="1" name=""/>
+        <p:cNvGrpSpPr/>
+        <p:nvPr/>
+      </p:nvGrpSpPr>
+      <p:grpSpPr>
+        <a:xfrm>
+          <a:off x="0" y="0"/>
+          <a:ext cx="0" cy="0"/>
+          <a:chOff x="0" y="0"/>
+          <a:chExt cx="0" cy="0"/>
+        </a:xfrm>
+      </p:grpSpPr>
+      <p:sp>
+        <p:nvSpPr>
+          <p:cNvPr id="2" name="Title 1">
+            <a:extLst>
+              <a:ext uri="{FF2B5EF4-FFF2-40B4-BE49-F238E27FC236}">
+                <a16:creationId xmlns:a16="http://schemas.microsoft.com/office/drawing/2014/main" id="{F623E95A-A985-5046-9E7A-C35F5326DFA3}"/>
+              </a:ext>
+            </a:extLst>
+          </p:cNvPr>
+          <p:cNvSpPr>
+            <a:spLocks noGrp="1"/>
+          </p:cNvSpPr>
+          <p:nvPr>
+            <p:ph type="title"/>
+          </p:nvPr>
+        </p:nvSpPr>
+        <p:spPr/>
+        <p:txBody>
+          <a:bodyPr/>
+          <a:lstStyle/>
+          <a:p>
+            <a:r>
+              <a:rPr lang="en-US" dirty="0"/>
+              <a:t>String operations</a:t>
+            </a:r>
+          </a:p>
+        </p:txBody>
+      </p:sp>
+      <p:sp>
+        <p:nvSpPr>
+          <p:cNvPr id="3" name="Content Placeholder 2">
+            <a:extLst>
+              <a:ext uri="{FF2B5EF4-FFF2-40B4-BE49-F238E27FC236}">
+                <a16:creationId xmlns:a16="http://schemas.microsoft.com/office/drawing/2014/main" id="{6CB7EF14-DB9E-343A-79A5-71D8E18C9987}"/>
+              </a:ext>
+            </a:extLst>
+          </p:cNvPr>
+          <p:cNvSpPr>
+            <a:spLocks noGrp="1"/>
+          </p:cNvSpPr>
+          <p:nvPr>
+            <p:ph idx="1"/>
+          </p:nvPr>
+        </p:nvSpPr>
+        <p:spPr/>
+        <p:txBody>
+          <a:bodyPr/>
+          <a:lstStyle/>
+          <a:p>
+            <a:r>
+              <a:rPr lang="en-US" dirty="0"/>
+              <a:t>How do you find string sizes ?</a:t>
+            </a:r>
+          </a:p>
+          <a:p>
+            <a:pPr lvl="1"/>
+            <a:r>
+              <a:rPr lang="en-US" dirty="0" err="1"/>
+              <a:t>strlen</a:t>
+            </a:r>
+            <a:endParaRPr lang="en-US" dirty="0"/>
+          </a:p>
+          <a:p>
+            <a:r>
+              <a:rPr lang="en-US" dirty="0"/>
+              <a:t>How do you compare strings  ?</a:t>
+            </a:r>
+          </a:p>
+          <a:p>
+            <a:pPr lvl="1"/>
+            <a:r>
+              <a:rPr lang="en-US" dirty="0"/>
+              <a:t>For &lt;,&gt;,==</a:t>
+            </a:r>
+          </a:p>
+          <a:p>
+            <a:pPr lvl="1"/>
+            <a:r>
+              <a:rPr lang="en-US" dirty="0"/>
+              <a:t>*Use </a:t>
+            </a:r>
+            <a:r>
+              <a:rPr lang="en-US" dirty="0" err="1"/>
+              <a:t>strcmp</a:t>
+            </a:r>
+            <a:r>
+              <a:rPr lang="en-US" dirty="0"/>
+              <a:t> </a:t>
+            </a:r>
+          </a:p>
+          <a:p>
+            <a:pPr marL="0" indent="0">
+              <a:buNone/>
+            </a:pPr>
+            <a:endParaRPr lang="en-US" dirty="0"/>
+          </a:p>
+          <a:p>
+            <a:endParaRPr lang="en-US" dirty="0"/>
+          </a:p>
+          <a:p>
+            <a:endParaRPr lang="en-US" dirty="0"/>
+          </a:p>
+        </p:txBody>
+      </p:sp>
+      <p:sp>
+        <p:nvSpPr>
+          <p:cNvPr id="4" name="Footer Placeholder 3">
+            <a:extLst>
+              <a:ext uri="{FF2B5EF4-FFF2-40B4-BE49-F238E27FC236}">
+                <a16:creationId xmlns:a16="http://schemas.microsoft.com/office/drawing/2014/main" id="{01C61286-F737-8649-7BCB-88B93CE96EF2}"/>
+              </a:ext>
+            </a:extLst>
+          </p:cNvPr>
+          <p:cNvSpPr>
+            <a:spLocks noGrp="1"/>
+          </p:cNvSpPr>
+          <p:nvPr>
+            <p:ph type="ftr" sz="quarter" idx="11"/>
+          </p:nvPr>
+        </p:nvSpPr>
+        <p:spPr/>
+        <p:txBody>
+          <a:bodyPr/>
+          <a:lstStyle/>
+          <a:p>
+            <a:r>
+              <a:rPr lang="en-US"/>
+              <a:t>Week 11</a:t>
+            </a:r>
+          </a:p>
+        </p:txBody>
+      </p:sp>
+      <p:sp>
+        <p:nvSpPr>
+          <p:cNvPr id="5" name="Slide Number Placeholder 4">
+            <a:extLst>
+              <a:ext uri="{FF2B5EF4-FFF2-40B4-BE49-F238E27FC236}">
+                <a16:creationId xmlns:a16="http://schemas.microsoft.com/office/drawing/2014/main" id="{DB887C79-4ECC-979F-BAAE-52D3A3A31CAD}"/>
+              </a:ext>
+            </a:extLst>
+          </p:cNvPr>
+          <p:cNvSpPr>
+            <a:spLocks noGrp="1"/>
+          </p:cNvSpPr>
+          <p:nvPr>
+            <p:ph type="sldNum" sz="quarter" idx="12"/>
+          </p:nvPr>
+        </p:nvSpPr>
+        <p:spPr/>
+        <p:txBody>
+          <a:bodyPr/>
+          <a:lstStyle/>
+          <a:p>
+            <a:fld id="{3EC9E123-0CB8-4CD3-A52F-DDEB9B17898B}" type="slidenum">
+              <a:rPr lang="en-US" smtClean="0"/>
+              <a:t>79</a:t>
+            </a:fld>
+            <a:endParaRPr lang="en-US"/>
+          </a:p>
+        </p:txBody>
+      </p:sp>
+    </p:spTree>
+    <p:extLst>
+      <p:ext uri="{BB962C8B-B14F-4D97-AF65-F5344CB8AC3E}">
+        <p14:creationId xmlns:p14="http://schemas.microsoft.com/office/powerpoint/2010/main" val="1577990365"/>
       </p:ext>
     </p:extLst>
   </p:cSld>
@@ -22881,6 +23607,852 @@
     <p:extLst>
       <p:ext uri="{BB962C8B-B14F-4D97-AF65-F5344CB8AC3E}">
         <p14:creationId xmlns:p14="http://schemas.microsoft.com/office/powerpoint/2010/main" val="1902030883"/>
+      </p:ext>
+    </p:extLst>
+  </p:cSld>
+  <p:clrMapOvr>
+    <a:masterClrMapping/>
+  </p:clrMapOvr>
+</p:sld>
+</file>
+
+<file path=ppt/slides/slide80.xml><?xml version="1.0" encoding="utf-8"?>
+<p:sld xmlns:a="http://schemas.openxmlformats.org/drawingml/2006/main" xmlns:r="http://schemas.openxmlformats.org/officeDocument/2006/relationships" xmlns:p="http://schemas.openxmlformats.org/presentationml/2006/main">
+  <p:cSld>
+    <p:spTree>
+      <p:nvGrpSpPr>
+        <p:cNvPr id="1" name=""/>
+        <p:cNvGrpSpPr/>
+        <p:nvPr/>
+      </p:nvGrpSpPr>
+      <p:grpSpPr>
+        <a:xfrm>
+          <a:off x="0" y="0"/>
+          <a:ext cx="0" cy="0"/>
+          <a:chOff x="0" y="0"/>
+          <a:chExt cx="0" cy="0"/>
+        </a:xfrm>
+      </p:grpSpPr>
+      <p:sp>
+        <p:nvSpPr>
+          <p:cNvPr id="2" name="Title 1">
+            <a:extLst>
+              <a:ext uri="{FF2B5EF4-FFF2-40B4-BE49-F238E27FC236}">
+                <a16:creationId xmlns:a16="http://schemas.microsoft.com/office/drawing/2014/main" id="{29FC879A-25C9-E077-78D5-53BFEC516C6D}"/>
+              </a:ext>
+            </a:extLst>
+          </p:cNvPr>
+          <p:cNvSpPr>
+            <a:spLocks noGrp="1"/>
+          </p:cNvSpPr>
+          <p:nvPr>
+            <p:ph type="title"/>
+          </p:nvPr>
+        </p:nvSpPr>
+        <p:spPr/>
+        <p:txBody>
+          <a:bodyPr/>
+          <a:lstStyle/>
+          <a:p>
+            <a:r>
+              <a:rPr lang="en-US" dirty="0" err="1"/>
+              <a:t>Strcmp</a:t>
+            </a:r>
+            <a:r>
+              <a:rPr lang="en-US" dirty="0"/>
+              <a:t> example</a:t>
+            </a:r>
+          </a:p>
+        </p:txBody>
+      </p:sp>
+      <p:pic>
+        <p:nvPicPr>
+          <p:cNvPr id="6" name="Content Placeholder 5">
+            <a:extLst>
+              <a:ext uri="{FF2B5EF4-FFF2-40B4-BE49-F238E27FC236}">
+                <a16:creationId xmlns:a16="http://schemas.microsoft.com/office/drawing/2014/main" id="{A0EDD1A4-ADBC-399A-BD96-8F38611ACC4D}"/>
+              </a:ext>
+            </a:extLst>
+          </p:cNvPr>
+          <p:cNvPicPr>
+            <a:picLocks noGrp="1" noChangeAspect="1"/>
+          </p:cNvPicPr>
+          <p:nvPr>
+            <p:ph idx="1"/>
+          </p:nvPr>
+        </p:nvPicPr>
+        <p:blipFill>
+          <a:blip r:embed="rId2"/>
+          <a:stretch>
+            <a:fillRect/>
+          </a:stretch>
+        </p:blipFill>
+        <p:spPr>
+          <a:xfrm>
+            <a:off x="887474" y="1787701"/>
+            <a:ext cx="4998074" cy="4351338"/>
+          </a:xfrm>
+        </p:spPr>
+      </p:pic>
+      <p:sp>
+        <p:nvSpPr>
+          <p:cNvPr id="7" name="Footer Placeholder 6">
+            <a:extLst>
+              <a:ext uri="{FF2B5EF4-FFF2-40B4-BE49-F238E27FC236}">
+                <a16:creationId xmlns:a16="http://schemas.microsoft.com/office/drawing/2014/main" id="{71E2DABF-D85A-F862-6E7F-3F038D7453FC}"/>
+              </a:ext>
+            </a:extLst>
+          </p:cNvPr>
+          <p:cNvSpPr>
+            <a:spLocks noGrp="1"/>
+          </p:cNvSpPr>
+          <p:nvPr>
+            <p:ph type="ftr" sz="quarter" idx="11"/>
+          </p:nvPr>
+        </p:nvSpPr>
+        <p:spPr/>
+        <p:txBody>
+          <a:bodyPr/>
+          <a:lstStyle/>
+          <a:p>
+            <a:r>
+              <a:rPr lang="en-US"/>
+              <a:t>Week 11</a:t>
+            </a:r>
+          </a:p>
+        </p:txBody>
+      </p:sp>
+      <p:sp>
+        <p:nvSpPr>
+          <p:cNvPr id="8" name="Slide Number Placeholder 7">
+            <a:extLst>
+              <a:ext uri="{FF2B5EF4-FFF2-40B4-BE49-F238E27FC236}">
+                <a16:creationId xmlns:a16="http://schemas.microsoft.com/office/drawing/2014/main" id="{38667587-5AA2-9712-76E6-0A388EA712C0}"/>
+              </a:ext>
+            </a:extLst>
+          </p:cNvPr>
+          <p:cNvSpPr>
+            <a:spLocks noGrp="1"/>
+          </p:cNvSpPr>
+          <p:nvPr>
+            <p:ph type="sldNum" sz="quarter" idx="12"/>
+          </p:nvPr>
+        </p:nvSpPr>
+        <p:spPr/>
+        <p:txBody>
+          <a:bodyPr/>
+          <a:lstStyle/>
+          <a:p>
+            <a:fld id="{3EC9E123-0CB8-4CD3-A52F-DDEB9B17898B}" type="slidenum">
+              <a:rPr lang="en-US" smtClean="0"/>
+              <a:t>80</a:t>
+            </a:fld>
+            <a:endParaRPr lang="en-US"/>
+          </a:p>
+        </p:txBody>
+      </p:sp>
+    </p:spTree>
+    <p:extLst>
+      <p:ext uri="{BB962C8B-B14F-4D97-AF65-F5344CB8AC3E}">
+        <p14:creationId xmlns:p14="http://schemas.microsoft.com/office/powerpoint/2010/main" val="4083524481"/>
+      </p:ext>
+    </p:extLst>
+  </p:cSld>
+  <p:clrMapOvr>
+    <a:masterClrMapping/>
+  </p:clrMapOvr>
+</p:sld>
+</file>
+
+<file path=ppt/slides/slide81.xml><?xml version="1.0" encoding="utf-8"?>
+<p:sld xmlns:a="http://schemas.openxmlformats.org/drawingml/2006/main" xmlns:r="http://schemas.openxmlformats.org/officeDocument/2006/relationships" xmlns:p="http://schemas.openxmlformats.org/presentationml/2006/main">
+  <p:cSld>
+    <p:spTree>
+      <p:nvGrpSpPr>
+        <p:cNvPr id="1" name=""/>
+        <p:cNvGrpSpPr/>
+        <p:nvPr/>
+      </p:nvGrpSpPr>
+      <p:grpSpPr>
+        <a:xfrm>
+          <a:off x="0" y="0"/>
+          <a:ext cx="0" cy="0"/>
+          <a:chOff x="0" y="0"/>
+          <a:chExt cx="0" cy="0"/>
+        </a:xfrm>
+      </p:grpSpPr>
+      <p:sp>
+        <p:nvSpPr>
+          <p:cNvPr id="2" name="Title 1">
+            <a:extLst>
+              <a:ext uri="{FF2B5EF4-FFF2-40B4-BE49-F238E27FC236}">
+                <a16:creationId xmlns:a16="http://schemas.microsoft.com/office/drawing/2014/main" id="{F2101EAF-3BCA-2FF8-5CE3-46D03D9D415B}"/>
+              </a:ext>
+            </a:extLst>
+          </p:cNvPr>
+          <p:cNvSpPr>
+            <a:spLocks noGrp="1"/>
+          </p:cNvSpPr>
+          <p:nvPr>
+            <p:ph type="title"/>
+          </p:nvPr>
+        </p:nvSpPr>
+        <p:spPr/>
+        <p:txBody>
+          <a:bodyPr/>
+          <a:lstStyle/>
+          <a:p>
+            <a:r>
+              <a:rPr lang="en-US" dirty="0"/>
+              <a:t>Assignment</a:t>
+            </a:r>
+          </a:p>
+        </p:txBody>
+      </p:sp>
+      <p:sp>
+        <p:nvSpPr>
+          <p:cNvPr id="3" name="Content Placeholder 2">
+            <a:extLst>
+              <a:ext uri="{FF2B5EF4-FFF2-40B4-BE49-F238E27FC236}">
+                <a16:creationId xmlns:a16="http://schemas.microsoft.com/office/drawing/2014/main" id="{35FDB0EF-05B9-4BE9-6767-3DD63418D3DB}"/>
+              </a:ext>
+            </a:extLst>
+          </p:cNvPr>
+          <p:cNvSpPr>
+            <a:spLocks noGrp="1"/>
+          </p:cNvSpPr>
+          <p:nvPr>
+            <p:ph idx="1"/>
+          </p:nvPr>
+        </p:nvSpPr>
+        <p:spPr/>
+        <p:txBody>
+          <a:bodyPr/>
+          <a:lstStyle/>
+          <a:p>
+            <a:r>
+              <a:rPr lang="en-US" dirty="0"/>
+              <a:t>Convert string to upper cases</a:t>
+            </a:r>
+          </a:p>
+          <a:p>
+            <a:pPr lvl="1"/>
+            <a:r>
+              <a:rPr lang="en-US" dirty="0"/>
+              <a:t>hello -&gt;HELLO</a:t>
+            </a:r>
+          </a:p>
+          <a:p>
+            <a:pPr lvl="1"/>
+            <a:r>
+              <a:rPr lang="en-US" dirty="0"/>
+              <a:t>ChatGPT -&gt; CHATGPT</a:t>
+            </a:r>
+          </a:p>
+          <a:p>
+            <a:r>
+              <a:rPr lang="en-US" dirty="0"/>
+              <a:t>Reverse a string </a:t>
+            </a:r>
+          </a:p>
+          <a:p>
+            <a:pPr lvl="1"/>
+            <a:r>
+              <a:rPr lang="en-US" dirty="0"/>
+              <a:t>Hello -&gt; </a:t>
+            </a:r>
+            <a:r>
+              <a:rPr lang="en-US" dirty="0" err="1"/>
+              <a:t>olleH</a:t>
+            </a:r>
+            <a:endParaRPr lang="en-US" dirty="0"/>
+          </a:p>
+          <a:p>
+            <a:pPr lvl="1"/>
+            <a:r>
+              <a:rPr lang="en-US" dirty="0"/>
+              <a:t>six-seven -&gt; </a:t>
+            </a:r>
+            <a:r>
+              <a:rPr lang="en-US" dirty="0" err="1"/>
+              <a:t>neves-xis</a:t>
+            </a:r>
+            <a:endParaRPr lang="en-US" dirty="0"/>
+          </a:p>
+        </p:txBody>
+      </p:sp>
+      <p:sp>
+        <p:nvSpPr>
+          <p:cNvPr id="4" name="Footer Placeholder 3">
+            <a:extLst>
+              <a:ext uri="{FF2B5EF4-FFF2-40B4-BE49-F238E27FC236}">
+                <a16:creationId xmlns:a16="http://schemas.microsoft.com/office/drawing/2014/main" id="{DE493A58-936C-B55A-2DE5-36BC62D4C2FF}"/>
+              </a:ext>
+            </a:extLst>
+          </p:cNvPr>
+          <p:cNvSpPr>
+            <a:spLocks noGrp="1"/>
+          </p:cNvSpPr>
+          <p:nvPr>
+            <p:ph type="ftr" sz="quarter" idx="11"/>
+          </p:nvPr>
+        </p:nvSpPr>
+        <p:spPr/>
+        <p:txBody>
+          <a:bodyPr/>
+          <a:lstStyle/>
+          <a:p>
+            <a:r>
+              <a:rPr lang="en-US"/>
+              <a:t>Week 11</a:t>
+            </a:r>
+          </a:p>
+        </p:txBody>
+      </p:sp>
+      <p:sp>
+        <p:nvSpPr>
+          <p:cNvPr id="5" name="Slide Number Placeholder 4">
+            <a:extLst>
+              <a:ext uri="{FF2B5EF4-FFF2-40B4-BE49-F238E27FC236}">
+                <a16:creationId xmlns:a16="http://schemas.microsoft.com/office/drawing/2014/main" id="{A9E94FFC-273D-017B-35B1-649DEAC1E7CF}"/>
+              </a:ext>
+            </a:extLst>
+          </p:cNvPr>
+          <p:cNvSpPr>
+            <a:spLocks noGrp="1"/>
+          </p:cNvSpPr>
+          <p:nvPr>
+            <p:ph type="sldNum" sz="quarter" idx="12"/>
+          </p:nvPr>
+        </p:nvSpPr>
+        <p:spPr/>
+        <p:txBody>
+          <a:bodyPr/>
+          <a:lstStyle/>
+          <a:p>
+            <a:fld id="{3EC9E123-0CB8-4CD3-A52F-DDEB9B17898B}" type="slidenum">
+              <a:rPr lang="en-US" smtClean="0"/>
+              <a:t>81</a:t>
+            </a:fld>
+            <a:endParaRPr lang="en-US"/>
+          </a:p>
+        </p:txBody>
+      </p:sp>
+    </p:spTree>
+    <p:extLst>
+      <p:ext uri="{BB962C8B-B14F-4D97-AF65-F5344CB8AC3E}">
+        <p14:creationId xmlns:p14="http://schemas.microsoft.com/office/powerpoint/2010/main" val="3020951309"/>
+      </p:ext>
+    </p:extLst>
+  </p:cSld>
+  <p:clrMapOvr>
+    <a:masterClrMapping/>
+  </p:clrMapOvr>
+</p:sld>
+</file>
+
+<file path=ppt/slides/slide82.xml><?xml version="1.0" encoding="utf-8"?>
+<p:sld xmlns:a="http://schemas.openxmlformats.org/drawingml/2006/main" xmlns:r="http://schemas.openxmlformats.org/officeDocument/2006/relationships" xmlns:p="http://schemas.openxmlformats.org/presentationml/2006/main">
+  <p:cSld>
+    <p:spTree>
+      <p:nvGrpSpPr>
+        <p:cNvPr id="1" name=""/>
+        <p:cNvGrpSpPr/>
+        <p:nvPr/>
+      </p:nvGrpSpPr>
+      <p:grpSpPr>
+        <a:xfrm>
+          <a:off x="0" y="0"/>
+          <a:ext cx="0" cy="0"/>
+          <a:chOff x="0" y="0"/>
+          <a:chExt cx="0" cy="0"/>
+        </a:xfrm>
+      </p:grpSpPr>
+      <p:sp>
+        <p:nvSpPr>
+          <p:cNvPr id="2" name="Title 1">
+            <a:extLst>
+              <a:ext uri="{FF2B5EF4-FFF2-40B4-BE49-F238E27FC236}">
+                <a16:creationId xmlns:a16="http://schemas.microsoft.com/office/drawing/2014/main" id="{7C74D8D5-89A0-8088-4FD7-71766864100F}"/>
+              </a:ext>
+            </a:extLst>
+          </p:cNvPr>
+          <p:cNvSpPr>
+            <a:spLocks noGrp="1"/>
+          </p:cNvSpPr>
+          <p:nvPr>
+            <p:ph type="title"/>
+          </p:nvPr>
+        </p:nvSpPr>
+        <p:spPr/>
+        <p:txBody>
+          <a:bodyPr/>
+          <a:lstStyle/>
+          <a:p>
+            <a:r>
+              <a:rPr lang="en-US" dirty="0"/>
+              <a:t>Boss Assignment</a:t>
+            </a:r>
+          </a:p>
+        </p:txBody>
+      </p:sp>
+      <p:sp>
+        <p:nvSpPr>
+          <p:cNvPr id="3" name="Content Placeholder 2">
+            <a:extLst>
+              <a:ext uri="{FF2B5EF4-FFF2-40B4-BE49-F238E27FC236}">
+                <a16:creationId xmlns:a16="http://schemas.microsoft.com/office/drawing/2014/main" id="{75AE8EC2-08AF-206D-04A9-0C328F8504E8}"/>
+              </a:ext>
+            </a:extLst>
+          </p:cNvPr>
+          <p:cNvSpPr>
+            <a:spLocks noGrp="1"/>
+          </p:cNvSpPr>
+          <p:nvPr>
+            <p:ph idx="1"/>
+          </p:nvPr>
+        </p:nvSpPr>
+        <p:spPr/>
+        <p:txBody>
+          <a:bodyPr/>
+          <a:lstStyle/>
+          <a:p>
+            <a:r>
+              <a:rPr lang="en-US" dirty="0"/>
+              <a:t>Count words in a sentence </a:t>
+            </a:r>
+          </a:p>
+          <a:p>
+            <a:pPr lvl="1"/>
+            <a:r>
+              <a:rPr lang="en-US" dirty="0"/>
+              <a:t>“A quick brown fox jumps over the lazy dog” -&gt; 9</a:t>
+            </a:r>
+          </a:p>
+          <a:p>
+            <a:pPr lvl="1"/>
+            <a:r>
+              <a:rPr lang="en-US" dirty="0"/>
+              <a:t>“Pa may we all go to” -&gt; 6</a:t>
+            </a:r>
+          </a:p>
+          <a:p>
+            <a:r>
+              <a:rPr lang="en-US" dirty="0"/>
+              <a:t>Reverse the words of the sentence in place</a:t>
+            </a:r>
+          </a:p>
+          <a:p>
+            <a:pPr lvl="1"/>
+            <a:r>
+              <a:rPr lang="en-US" dirty="0"/>
+              <a:t>“A quick brown fox jumps over the lazy dog”</a:t>
+            </a:r>
+          </a:p>
+          <a:p>
+            <a:pPr lvl="2"/>
+            <a:r>
+              <a:rPr lang="en-US" dirty="0"/>
+              <a:t>“A </a:t>
+            </a:r>
+            <a:r>
+              <a:rPr lang="en-US" dirty="0" err="1"/>
+              <a:t>kciuq</a:t>
+            </a:r>
+            <a:r>
+              <a:rPr lang="en-US" dirty="0"/>
+              <a:t> </a:t>
+            </a:r>
+            <a:r>
+              <a:rPr lang="en-US" dirty="0" err="1"/>
+              <a:t>nworb</a:t>
+            </a:r>
+            <a:r>
+              <a:rPr lang="en-US" dirty="0"/>
+              <a:t> </a:t>
+            </a:r>
+            <a:r>
+              <a:rPr lang="en-US" dirty="0" err="1"/>
+              <a:t>xof</a:t>
+            </a:r>
+            <a:r>
+              <a:rPr lang="en-US" dirty="0"/>
+              <a:t> </a:t>
+            </a:r>
+            <a:r>
+              <a:rPr lang="en-US" dirty="0" err="1"/>
+              <a:t>spmuj</a:t>
+            </a:r>
+            <a:r>
+              <a:rPr lang="en-US" dirty="0"/>
+              <a:t> </a:t>
+            </a:r>
+            <a:r>
+              <a:rPr lang="en-US" dirty="0" err="1"/>
+              <a:t>revo</a:t>
+            </a:r>
+            <a:r>
+              <a:rPr lang="en-US" dirty="0"/>
+              <a:t> </a:t>
+            </a:r>
+            <a:r>
+              <a:rPr lang="en-US" dirty="0" err="1"/>
+              <a:t>eht</a:t>
+            </a:r>
+            <a:r>
+              <a:rPr lang="en-US" dirty="0"/>
+              <a:t> </a:t>
+            </a:r>
+            <a:r>
+              <a:rPr lang="en-US" dirty="0" err="1"/>
+              <a:t>yzal</a:t>
+            </a:r>
+            <a:r>
+              <a:rPr lang="en-US" dirty="0"/>
+              <a:t> god”</a:t>
+            </a:r>
+          </a:p>
+          <a:p>
+            <a:pPr lvl="1"/>
+            <a:r>
+              <a:rPr lang="en-US" dirty="0"/>
+              <a:t>“Pa may we all to go”</a:t>
+            </a:r>
+          </a:p>
+          <a:p>
+            <a:pPr lvl="2"/>
+            <a:r>
+              <a:rPr lang="en-US" dirty="0" err="1"/>
+              <a:t>aP</a:t>
+            </a:r>
+            <a:r>
+              <a:rPr lang="en-US" dirty="0"/>
+              <a:t> yam </a:t>
+            </a:r>
+            <a:r>
+              <a:rPr lang="en-US" dirty="0" err="1"/>
+              <a:t>ew</a:t>
+            </a:r>
+            <a:r>
+              <a:rPr lang="en-US" dirty="0"/>
+              <a:t> </a:t>
+            </a:r>
+            <a:r>
+              <a:rPr lang="en-US" dirty="0" err="1"/>
+              <a:t>lla</a:t>
+            </a:r>
+            <a:r>
+              <a:rPr lang="en-US" dirty="0"/>
+              <a:t> </a:t>
+            </a:r>
+            <a:r>
+              <a:rPr lang="en-US" dirty="0" err="1"/>
+              <a:t>ot</a:t>
+            </a:r>
+            <a:r>
+              <a:rPr lang="en-US" dirty="0"/>
+              <a:t> </a:t>
+            </a:r>
+            <a:r>
+              <a:rPr lang="en-US" dirty="0" err="1"/>
+              <a:t>og</a:t>
+            </a:r>
+            <a:r>
+              <a:rPr lang="en-US" dirty="0"/>
+              <a:t>”</a:t>
+            </a:r>
+          </a:p>
+          <a:p>
+            <a:pPr lvl="2"/>
+            <a:endParaRPr lang="en-US" dirty="0"/>
+          </a:p>
+        </p:txBody>
+      </p:sp>
+      <p:sp>
+        <p:nvSpPr>
+          <p:cNvPr id="4" name="Footer Placeholder 3">
+            <a:extLst>
+              <a:ext uri="{FF2B5EF4-FFF2-40B4-BE49-F238E27FC236}">
+                <a16:creationId xmlns:a16="http://schemas.microsoft.com/office/drawing/2014/main" id="{967D3FFF-8404-170D-03F0-CCFD5FF3E08E}"/>
+              </a:ext>
+            </a:extLst>
+          </p:cNvPr>
+          <p:cNvSpPr>
+            <a:spLocks noGrp="1"/>
+          </p:cNvSpPr>
+          <p:nvPr>
+            <p:ph type="ftr" sz="quarter" idx="11"/>
+          </p:nvPr>
+        </p:nvSpPr>
+        <p:spPr/>
+        <p:txBody>
+          <a:bodyPr/>
+          <a:lstStyle/>
+          <a:p>
+            <a:r>
+              <a:rPr lang="en-US"/>
+              <a:t>Week 11</a:t>
+            </a:r>
+          </a:p>
+        </p:txBody>
+      </p:sp>
+      <p:sp>
+        <p:nvSpPr>
+          <p:cNvPr id="5" name="Slide Number Placeholder 4">
+            <a:extLst>
+              <a:ext uri="{FF2B5EF4-FFF2-40B4-BE49-F238E27FC236}">
+                <a16:creationId xmlns:a16="http://schemas.microsoft.com/office/drawing/2014/main" id="{BD271CE2-A99F-6B05-BD99-12DFACC9D37F}"/>
+              </a:ext>
+            </a:extLst>
+          </p:cNvPr>
+          <p:cNvSpPr>
+            <a:spLocks noGrp="1"/>
+          </p:cNvSpPr>
+          <p:nvPr>
+            <p:ph type="sldNum" sz="quarter" idx="12"/>
+          </p:nvPr>
+        </p:nvSpPr>
+        <p:spPr/>
+        <p:txBody>
+          <a:bodyPr/>
+          <a:lstStyle/>
+          <a:p>
+            <a:fld id="{3EC9E123-0CB8-4CD3-A52F-DDEB9B17898B}" type="slidenum">
+              <a:rPr lang="en-US" smtClean="0"/>
+              <a:t>82</a:t>
+            </a:fld>
+            <a:endParaRPr lang="en-US"/>
+          </a:p>
+        </p:txBody>
+      </p:sp>
+    </p:spTree>
+    <p:extLst>
+      <p:ext uri="{BB962C8B-B14F-4D97-AF65-F5344CB8AC3E}">
+        <p14:creationId xmlns:p14="http://schemas.microsoft.com/office/powerpoint/2010/main" val="795109191"/>
+      </p:ext>
+    </p:extLst>
+  </p:cSld>
+  <p:clrMapOvr>
+    <a:masterClrMapping/>
+  </p:clrMapOvr>
+</p:sld>
+</file>
+
+<file path=ppt/slides/slide83.xml><?xml version="1.0" encoding="utf-8"?>
+<p:sld xmlns:a="http://schemas.openxmlformats.org/drawingml/2006/main" xmlns:r="http://schemas.openxmlformats.org/officeDocument/2006/relationships" xmlns:p="http://schemas.openxmlformats.org/presentationml/2006/main">
+  <p:cSld>
+    <p:spTree>
+      <p:nvGrpSpPr>
+        <p:cNvPr id="1" name=""/>
+        <p:cNvGrpSpPr/>
+        <p:nvPr/>
+      </p:nvGrpSpPr>
+      <p:grpSpPr>
+        <a:xfrm>
+          <a:off x="0" y="0"/>
+          <a:ext cx="0" cy="0"/>
+          <a:chOff x="0" y="0"/>
+          <a:chExt cx="0" cy="0"/>
+        </a:xfrm>
+      </p:grpSpPr>
+      <p:sp>
+        <p:nvSpPr>
+          <p:cNvPr id="2" name="Title 1">
+            <a:extLst>
+              <a:ext uri="{FF2B5EF4-FFF2-40B4-BE49-F238E27FC236}">
+                <a16:creationId xmlns:a16="http://schemas.microsoft.com/office/drawing/2014/main" id="{7F3F2022-DBA0-F8BB-70DA-B01A01136D53}"/>
+              </a:ext>
+            </a:extLst>
+          </p:cNvPr>
+          <p:cNvSpPr>
+            <a:spLocks noGrp="1"/>
+          </p:cNvSpPr>
+          <p:nvPr>
+            <p:ph type="title"/>
+          </p:nvPr>
+        </p:nvSpPr>
+        <p:spPr/>
+        <p:txBody>
+          <a:bodyPr/>
+          <a:lstStyle/>
+          <a:p>
+            <a:r>
+              <a:rPr lang="en-US" dirty="0"/>
+              <a:t>string data type</a:t>
+            </a:r>
+          </a:p>
+        </p:txBody>
+      </p:sp>
+      <p:sp>
+        <p:nvSpPr>
+          <p:cNvPr id="3" name="Content Placeholder 2">
+            <a:extLst>
+              <a:ext uri="{FF2B5EF4-FFF2-40B4-BE49-F238E27FC236}">
+                <a16:creationId xmlns:a16="http://schemas.microsoft.com/office/drawing/2014/main" id="{12C7C63C-7B86-C453-D132-93C8AB055AC5}"/>
+              </a:ext>
+            </a:extLst>
+          </p:cNvPr>
+          <p:cNvSpPr>
+            <a:spLocks noGrp="1"/>
+          </p:cNvSpPr>
+          <p:nvPr>
+            <p:ph idx="1"/>
+          </p:nvPr>
+        </p:nvSpPr>
+        <p:spPr/>
+        <p:txBody>
+          <a:bodyPr>
+            <a:normAutofit fontScale="92500" lnSpcReduction="10000"/>
+          </a:bodyPr>
+          <a:lstStyle/>
+          <a:p>
+            <a:r>
+              <a:rPr lang="en-US" dirty="0"/>
+              <a:t>We already know few built in types</a:t>
+            </a:r>
+          </a:p>
+          <a:p>
+            <a:pPr lvl="1"/>
+            <a:r>
+              <a:rPr lang="en-US" dirty="0"/>
+              <a:t>int , float , char, bool</a:t>
+            </a:r>
+          </a:p>
+          <a:p>
+            <a:r>
+              <a:rPr lang="en-US" dirty="0"/>
+              <a:t>string </a:t>
+            </a:r>
+          </a:p>
+          <a:p>
+            <a:pPr lvl="1"/>
+            <a:r>
+              <a:rPr lang="en-US" dirty="0"/>
+              <a:t>Is a derived data type, </a:t>
+            </a:r>
+          </a:p>
+          <a:p>
+            <a:pPr lvl="1"/>
+            <a:r>
+              <a:rPr lang="en-US" dirty="0"/>
+              <a:t>Useful for names, description etc. </a:t>
+            </a:r>
+          </a:p>
+          <a:p>
+            <a:r>
+              <a:rPr lang="en-US" dirty="0"/>
+              <a:t>Header </a:t>
+            </a:r>
+          </a:p>
+          <a:p>
+            <a:pPr lvl="1"/>
+            <a:r>
+              <a:rPr lang="en-US" dirty="0"/>
+              <a:t>#include&lt;string&gt;</a:t>
+            </a:r>
+          </a:p>
+          <a:p>
+            <a:r>
+              <a:rPr lang="en-US" dirty="0"/>
+              <a:t>Usage </a:t>
+            </a:r>
+          </a:p>
+          <a:p>
+            <a:pPr lvl="1"/>
+            <a:r>
+              <a:rPr lang="en-US" dirty="0"/>
+              <a:t>string name;</a:t>
+            </a:r>
+          </a:p>
+          <a:p>
+            <a:pPr lvl="1"/>
+            <a:r>
+              <a:rPr lang="en-US" dirty="0" err="1"/>
+              <a:t>cin</a:t>
+            </a:r>
+            <a:r>
+              <a:rPr lang="en-US" dirty="0"/>
+              <a:t> &gt;&gt; name;</a:t>
+            </a:r>
+          </a:p>
+          <a:p>
+            <a:pPr lvl="1"/>
+            <a:r>
+              <a:rPr lang="en-US" dirty="0" err="1"/>
+              <a:t>cout</a:t>
+            </a:r>
+            <a:r>
+              <a:rPr lang="en-US" dirty="0"/>
+              <a:t> &lt;&lt;name;</a:t>
+            </a:r>
+            <a:br>
+              <a:rPr lang="en-US" dirty="0"/>
+            </a:br>
+            <a:endParaRPr lang="en-US" dirty="0"/>
+          </a:p>
+        </p:txBody>
+      </p:sp>
+      <p:sp>
+        <p:nvSpPr>
+          <p:cNvPr id="4" name="Footer Placeholder 3">
+            <a:extLst>
+              <a:ext uri="{FF2B5EF4-FFF2-40B4-BE49-F238E27FC236}">
+                <a16:creationId xmlns:a16="http://schemas.microsoft.com/office/drawing/2014/main" id="{975DF1C2-BCB7-988E-2E18-DF5C6412B181}"/>
+              </a:ext>
+            </a:extLst>
+          </p:cNvPr>
+          <p:cNvSpPr>
+            <a:spLocks noGrp="1"/>
+          </p:cNvSpPr>
+          <p:nvPr>
+            <p:ph type="ftr" sz="quarter" idx="11"/>
+          </p:nvPr>
+        </p:nvSpPr>
+        <p:spPr/>
+        <p:txBody>
+          <a:bodyPr/>
+          <a:lstStyle/>
+          <a:p>
+            <a:r>
+              <a:rPr lang="en-US"/>
+              <a:t>Week 4</a:t>
+            </a:r>
+          </a:p>
+        </p:txBody>
+      </p:sp>
+      <p:sp>
+        <p:nvSpPr>
+          <p:cNvPr id="5" name="Slide Number Placeholder 4">
+            <a:extLst>
+              <a:ext uri="{FF2B5EF4-FFF2-40B4-BE49-F238E27FC236}">
+                <a16:creationId xmlns:a16="http://schemas.microsoft.com/office/drawing/2014/main" id="{43357A0E-A54D-5BCE-A42F-833CB4760EC1}"/>
+              </a:ext>
+            </a:extLst>
+          </p:cNvPr>
+          <p:cNvSpPr>
+            <a:spLocks noGrp="1"/>
+          </p:cNvSpPr>
+          <p:nvPr>
+            <p:ph type="sldNum" sz="quarter" idx="12"/>
+          </p:nvPr>
+        </p:nvSpPr>
+        <p:spPr/>
+        <p:txBody>
+          <a:bodyPr/>
+          <a:lstStyle/>
+          <a:p>
+            <a:fld id="{3EC9E123-0CB8-4CD3-A52F-DDEB9B17898B}" type="slidenum">
+              <a:rPr lang="en-US" smtClean="0"/>
+              <a:t>83</a:t>
+            </a:fld>
+            <a:endParaRPr lang="en-US"/>
+          </a:p>
+        </p:txBody>
+      </p:sp>
+    </p:spTree>
+    <p:extLst>
+      <p:ext uri="{BB962C8B-B14F-4D97-AF65-F5344CB8AC3E}">
+        <p14:creationId xmlns:p14="http://schemas.microsoft.com/office/powerpoint/2010/main" val="4193919016"/>
       </p:ext>
     </p:extLst>
   </p:cSld>

--- a/all/Intro to Programming_all.pptx
+++ b/all/Intro to Programming_all.pptx
@@ -5,7 +5,7 @@
     <p:sldMasterId id="2147483648" r:id="rId1"/>
   </p:sldMasterIdLst>
   <p:notesMasterIdLst>
-    <p:notesMasterId r:id="rId85"/>
+    <p:notesMasterId r:id="rId91"/>
   </p:notesMasterIdLst>
   <p:sldIdLst>
     <p:sldId id="256" r:id="rId2"/>
@@ -90,7 +90,13 @@
     <p:sldId id="339" r:id="rId81"/>
     <p:sldId id="340" r:id="rId82"/>
     <p:sldId id="341" r:id="rId83"/>
-    <p:sldId id="281" r:id="rId84"/>
+    <p:sldId id="342" r:id="rId84"/>
+    <p:sldId id="343" r:id="rId85"/>
+    <p:sldId id="344" r:id="rId86"/>
+    <p:sldId id="345" r:id="rId87"/>
+    <p:sldId id="346" r:id="rId88"/>
+    <p:sldId id="347" r:id="rId89"/>
+    <p:sldId id="281" r:id="rId90"/>
   </p:sldIdLst>
   <p:sldSz cx="12192000" cy="6858000"/>
   <p:notesSz cx="7315200" cy="9601200"/>
@@ -276,6 +282,12 @@
             <p14:sldId id="339"/>
             <p14:sldId id="340"/>
             <p14:sldId id="341"/>
+            <p14:sldId id="342"/>
+            <p14:sldId id="343"/>
+            <p14:sldId id="344"/>
+            <p14:sldId id="345"/>
+            <p14:sldId id="346"/>
+            <p14:sldId id="347"/>
             <p14:sldId id="281"/>
           </p14:sldIdLst>
         </p14:section>
@@ -370,7 +382,7 @@
           <a:p>
             <a:fld id="{03FEC988-D264-4851-9784-E262DEC12FF7}" type="datetimeFigureOut">
               <a:rPr lang="en-US" smtClean="0"/>
-              <a:t>12/4/2025</a:t>
+              <a:t>12/18/2025</a:t>
             </a:fld>
             <a:endParaRPr lang="en-US"/>
           </a:p>
@@ -784,7 +796,7 @@
           <a:p>
             <a:fld id="{FC9FB2DD-DF35-4B84-9135-C0E6A5E9FBB3}" type="datetimeFigureOut">
               <a:rPr lang="en-US" smtClean="0"/>
-              <a:t>12/4/2025</a:t>
+              <a:t>12/18/2025</a:t>
             </a:fld>
             <a:endParaRPr lang="en-US"/>
           </a:p>
@@ -982,7 +994,7 @@
           <a:p>
             <a:fld id="{FC9FB2DD-DF35-4B84-9135-C0E6A5E9FBB3}" type="datetimeFigureOut">
               <a:rPr lang="en-US" smtClean="0"/>
-              <a:t>12/4/2025</a:t>
+              <a:t>12/18/2025</a:t>
             </a:fld>
             <a:endParaRPr lang="en-US"/>
           </a:p>
@@ -1190,7 +1202,7 @@
           <a:p>
             <a:fld id="{FC9FB2DD-DF35-4B84-9135-C0E6A5E9FBB3}" type="datetimeFigureOut">
               <a:rPr lang="en-US" smtClean="0"/>
-              <a:t>12/4/2025</a:t>
+              <a:t>12/18/2025</a:t>
             </a:fld>
             <a:endParaRPr lang="en-US"/>
           </a:p>
@@ -1388,7 +1400,7 @@
           <a:p>
             <a:fld id="{FC9FB2DD-DF35-4B84-9135-C0E6A5E9FBB3}" type="datetimeFigureOut">
               <a:rPr lang="en-US" smtClean="0"/>
-              <a:t>12/4/2025</a:t>
+              <a:t>12/18/2025</a:t>
             </a:fld>
             <a:endParaRPr lang="en-US"/>
           </a:p>
@@ -1663,7 +1675,7 @@
           <a:p>
             <a:fld id="{FC9FB2DD-DF35-4B84-9135-C0E6A5E9FBB3}" type="datetimeFigureOut">
               <a:rPr lang="en-US" smtClean="0"/>
-              <a:t>12/4/2025</a:t>
+              <a:t>12/18/2025</a:t>
             </a:fld>
             <a:endParaRPr lang="en-US"/>
           </a:p>
@@ -1928,7 +1940,7 @@
           <a:p>
             <a:fld id="{FC9FB2DD-DF35-4B84-9135-C0E6A5E9FBB3}" type="datetimeFigureOut">
               <a:rPr lang="en-US" smtClean="0"/>
-              <a:t>12/4/2025</a:t>
+              <a:t>12/18/2025</a:t>
             </a:fld>
             <a:endParaRPr lang="en-US"/>
           </a:p>
@@ -2340,7 +2352,7 @@
           <a:p>
             <a:fld id="{FC9FB2DD-DF35-4B84-9135-C0E6A5E9FBB3}" type="datetimeFigureOut">
               <a:rPr lang="en-US" smtClean="0"/>
-              <a:t>12/4/2025</a:t>
+              <a:t>12/18/2025</a:t>
             </a:fld>
             <a:endParaRPr lang="en-US"/>
           </a:p>
@@ -2481,7 +2493,7 @@
           <a:p>
             <a:fld id="{FC9FB2DD-DF35-4B84-9135-C0E6A5E9FBB3}" type="datetimeFigureOut">
               <a:rPr lang="en-US" smtClean="0"/>
-              <a:t>12/4/2025</a:t>
+              <a:t>12/18/2025</a:t>
             </a:fld>
             <a:endParaRPr lang="en-US"/>
           </a:p>
@@ -2594,7 +2606,7 @@
           <a:p>
             <a:fld id="{FC9FB2DD-DF35-4B84-9135-C0E6A5E9FBB3}" type="datetimeFigureOut">
               <a:rPr lang="en-US" smtClean="0"/>
-              <a:t>12/4/2025</a:t>
+              <a:t>12/18/2025</a:t>
             </a:fld>
             <a:endParaRPr lang="en-US"/>
           </a:p>
@@ -2905,7 +2917,7 @@
           <a:p>
             <a:fld id="{FC9FB2DD-DF35-4B84-9135-C0E6A5E9FBB3}" type="datetimeFigureOut">
               <a:rPr lang="en-US" smtClean="0"/>
-              <a:t>12/4/2025</a:t>
+              <a:t>12/18/2025</a:t>
             </a:fld>
             <a:endParaRPr lang="en-US"/>
           </a:p>
@@ -3193,7 +3205,7 @@
           <a:p>
             <a:fld id="{FC9FB2DD-DF35-4B84-9135-C0E6A5E9FBB3}" type="datetimeFigureOut">
               <a:rPr lang="en-US" smtClean="0"/>
-              <a:t>12/4/2025</a:t>
+              <a:t>12/18/2025</a:t>
             </a:fld>
             <a:endParaRPr lang="en-US"/>
           </a:p>
@@ -3434,7 +3446,7 @@
           <a:p>
             <a:fld id="{FC9FB2DD-DF35-4B84-9135-C0E6A5E9FBB3}" type="datetimeFigureOut">
               <a:rPr lang="en-US" smtClean="0"/>
-              <a:t>12/4/2025</a:t>
+              <a:t>12/18/2025</a:t>
             </a:fld>
             <a:endParaRPr lang="en-US"/>
           </a:p>
@@ -24260,6 +24272,823 @@
           <p:cNvPr id="2" name="Title 1">
             <a:extLst>
               <a:ext uri="{FF2B5EF4-FFF2-40B4-BE49-F238E27FC236}">
+                <a16:creationId xmlns:a16="http://schemas.microsoft.com/office/drawing/2014/main" id="{C4D89B00-0A4A-D2FD-8266-E5C1AC88909A}"/>
+              </a:ext>
+            </a:extLst>
+          </p:cNvPr>
+          <p:cNvSpPr>
+            <a:spLocks noGrp="1"/>
+          </p:cNvSpPr>
+          <p:nvPr>
+            <p:ph type="title"/>
+          </p:nvPr>
+        </p:nvSpPr>
+        <p:spPr/>
+        <p:txBody>
+          <a:bodyPr/>
+          <a:lstStyle/>
+          <a:p>
+            <a:r>
+              <a:rPr lang="en-US" dirty="0"/>
+              <a:t>Back to Data types</a:t>
+            </a:r>
+          </a:p>
+        </p:txBody>
+      </p:sp>
+      <p:sp>
+        <p:nvSpPr>
+          <p:cNvPr id="3" name="Content Placeholder 2">
+            <a:extLst>
+              <a:ext uri="{FF2B5EF4-FFF2-40B4-BE49-F238E27FC236}">
+                <a16:creationId xmlns:a16="http://schemas.microsoft.com/office/drawing/2014/main" id="{01F30A2C-C588-FC43-9BB2-AEA66CCECAA9}"/>
+              </a:ext>
+            </a:extLst>
+          </p:cNvPr>
+          <p:cNvSpPr>
+            <a:spLocks noGrp="1"/>
+          </p:cNvSpPr>
+          <p:nvPr>
+            <p:ph idx="1"/>
+          </p:nvPr>
+        </p:nvSpPr>
+        <p:spPr/>
+        <p:txBody>
+          <a:bodyPr/>
+          <a:lstStyle/>
+          <a:p>
+            <a:r>
+              <a:rPr lang="en-US" dirty="0"/>
+              <a:t>Fundamental data type</a:t>
+            </a:r>
+          </a:p>
+          <a:p>
+            <a:pPr lvl="1"/>
+            <a:r>
+              <a:rPr lang="en-US" dirty="0"/>
+              <a:t>int, char, float, bool, …</a:t>
+            </a:r>
+          </a:p>
+          <a:p>
+            <a:pPr lvl="1"/>
+            <a:r>
+              <a:rPr lang="en-US" dirty="0"/>
+              <a:t>And arrays</a:t>
+            </a:r>
+          </a:p>
+          <a:p>
+            <a:r>
+              <a:rPr lang="en-US" dirty="0"/>
+              <a:t>Custom data types</a:t>
+            </a:r>
+          </a:p>
+          <a:p>
+            <a:pPr lvl="1"/>
+            <a:r>
+              <a:rPr lang="en-US" b="1" dirty="0"/>
+              <a:t>struct</a:t>
+            </a:r>
+          </a:p>
+          <a:p>
+            <a:pPr lvl="2"/>
+            <a:r>
+              <a:rPr lang="en-US" dirty="0"/>
+              <a:t>Short for structure</a:t>
+            </a:r>
+          </a:p>
+          <a:p>
+            <a:pPr lvl="1"/>
+            <a:r>
+              <a:rPr lang="en-US" dirty="0"/>
+              <a:t>class</a:t>
+            </a:r>
+          </a:p>
+        </p:txBody>
+      </p:sp>
+    </p:spTree>
+    <p:extLst>
+      <p:ext uri="{BB962C8B-B14F-4D97-AF65-F5344CB8AC3E}">
+        <p14:creationId xmlns:p14="http://schemas.microsoft.com/office/powerpoint/2010/main" val="360451394"/>
+      </p:ext>
+    </p:extLst>
+  </p:cSld>
+  <p:clrMapOvr>
+    <a:masterClrMapping/>
+  </p:clrMapOvr>
+</p:sld>
+</file>
+
+<file path=ppt/slides/slide84.xml><?xml version="1.0" encoding="utf-8"?>
+<p:sld xmlns:a="http://schemas.openxmlformats.org/drawingml/2006/main" xmlns:r="http://schemas.openxmlformats.org/officeDocument/2006/relationships" xmlns:p="http://schemas.openxmlformats.org/presentationml/2006/main">
+  <p:cSld>
+    <p:spTree>
+      <p:nvGrpSpPr>
+        <p:cNvPr id="1" name=""/>
+        <p:cNvGrpSpPr/>
+        <p:nvPr/>
+      </p:nvGrpSpPr>
+      <p:grpSpPr>
+        <a:xfrm>
+          <a:off x="0" y="0"/>
+          <a:ext cx="0" cy="0"/>
+          <a:chOff x="0" y="0"/>
+          <a:chExt cx="0" cy="0"/>
+        </a:xfrm>
+      </p:grpSpPr>
+      <p:sp>
+        <p:nvSpPr>
+          <p:cNvPr id="2" name="Title 1">
+            <a:extLst>
+              <a:ext uri="{FF2B5EF4-FFF2-40B4-BE49-F238E27FC236}">
+                <a16:creationId xmlns:a16="http://schemas.microsoft.com/office/drawing/2014/main" id="{3DA54089-BA71-7B16-B152-5F33C9D46A2B}"/>
+              </a:ext>
+            </a:extLst>
+          </p:cNvPr>
+          <p:cNvSpPr>
+            <a:spLocks noGrp="1"/>
+          </p:cNvSpPr>
+          <p:nvPr>
+            <p:ph type="title"/>
+          </p:nvPr>
+        </p:nvSpPr>
+        <p:spPr/>
+        <p:txBody>
+          <a:bodyPr/>
+          <a:lstStyle/>
+          <a:p>
+            <a:r>
+              <a:rPr lang="en-US" dirty="0"/>
+              <a:t>struct : </a:t>
+            </a:r>
+            <a:r>
+              <a:rPr lang="en-US" i="1" dirty="0"/>
+              <a:t>use case</a:t>
+            </a:r>
+          </a:p>
+        </p:txBody>
+      </p:sp>
+      <p:sp>
+        <p:nvSpPr>
+          <p:cNvPr id="3" name="Content Placeholder 2">
+            <a:extLst>
+              <a:ext uri="{FF2B5EF4-FFF2-40B4-BE49-F238E27FC236}">
+                <a16:creationId xmlns:a16="http://schemas.microsoft.com/office/drawing/2014/main" id="{ED046890-EDC0-97C3-85FA-26F6A70BD3CD}"/>
+              </a:ext>
+            </a:extLst>
+          </p:cNvPr>
+          <p:cNvSpPr>
+            <a:spLocks noGrp="1"/>
+          </p:cNvSpPr>
+          <p:nvPr>
+            <p:ph idx="1"/>
+          </p:nvPr>
+        </p:nvSpPr>
+        <p:spPr/>
+        <p:txBody>
+          <a:bodyPr/>
+          <a:lstStyle/>
+          <a:p>
+            <a:r>
+              <a:rPr lang="en-US" dirty="0"/>
+              <a:t>Need for grouping multiple different types</a:t>
+            </a:r>
+          </a:p>
+          <a:p>
+            <a:r>
+              <a:rPr lang="en-US" dirty="0"/>
+              <a:t>Helps organize complex data in a meaningful way</a:t>
+            </a:r>
+          </a:p>
+          <a:p>
+            <a:r>
+              <a:rPr lang="en-US" dirty="0"/>
+              <a:t>Examples ….</a:t>
+            </a:r>
+          </a:p>
+          <a:p>
+            <a:pPr lvl="1"/>
+            <a:r>
+              <a:rPr lang="en-US" dirty="0"/>
+              <a:t>time : seconds, minutes, hours</a:t>
+            </a:r>
+          </a:p>
+          <a:p>
+            <a:pPr lvl="1"/>
+            <a:r>
+              <a:rPr lang="en-US" dirty="0"/>
+              <a:t>date : day, month, year</a:t>
+            </a:r>
+          </a:p>
+          <a:p>
+            <a:pPr lvl="1"/>
+            <a:r>
+              <a:rPr lang="en-US" dirty="0"/>
+              <a:t>book : author, title, price, year</a:t>
+            </a:r>
+          </a:p>
+          <a:p>
+            <a:pPr lvl="1"/>
+            <a:r>
+              <a:rPr lang="en-US" dirty="0"/>
+              <a:t>player : username, experience</a:t>
+            </a:r>
+          </a:p>
+          <a:p>
+            <a:pPr lvl="1"/>
+            <a:r>
+              <a:rPr lang="en-US" dirty="0"/>
+              <a:t>game leaderboard : player, rank, score</a:t>
+            </a:r>
+          </a:p>
+          <a:p>
+            <a:endParaRPr lang="en-US" dirty="0"/>
+          </a:p>
+          <a:p>
+            <a:pPr lvl="1"/>
+            <a:endParaRPr lang="en-US" dirty="0"/>
+          </a:p>
+        </p:txBody>
+      </p:sp>
+    </p:spTree>
+    <p:extLst>
+      <p:ext uri="{BB962C8B-B14F-4D97-AF65-F5344CB8AC3E}">
+        <p14:creationId xmlns:p14="http://schemas.microsoft.com/office/powerpoint/2010/main" val="1342419639"/>
+      </p:ext>
+    </p:extLst>
+  </p:cSld>
+  <p:clrMapOvr>
+    <a:masterClrMapping/>
+  </p:clrMapOvr>
+</p:sld>
+</file>
+
+<file path=ppt/slides/slide85.xml><?xml version="1.0" encoding="utf-8"?>
+<p:sld xmlns:a="http://schemas.openxmlformats.org/drawingml/2006/main" xmlns:r="http://schemas.openxmlformats.org/officeDocument/2006/relationships" xmlns:p="http://schemas.openxmlformats.org/presentationml/2006/main">
+  <p:cSld>
+    <p:spTree>
+      <p:nvGrpSpPr>
+        <p:cNvPr id="1" name=""/>
+        <p:cNvGrpSpPr/>
+        <p:nvPr/>
+      </p:nvGrpSpPr>
+      <p:grpSpPr>
+        <a:xfrm>
+          <a:off x="0" y="0"/>
+          <a:ext cx="0" cy="0"/>
+          <a:chOff x="0" y="0"/>
+          <a:chExt cx="0" cy="0"/>
+        </a:xfrm>
+      </p:grpSpPr>
+      <p:sp>
+        <p:nvSpPr>
+          <p:cNvPr id="2" name="Title 1">
+            <a:extLst>
+              <a:ext uri="{FF2B5EF4-FFF2-40B4-BE49-F238E27FC236}">
+                <a16:creationId xmlns:a16="http://schemas.microsoft.com/office/drawing/2014/main" id="{BB6C5D90-9D00-E479-6810-CD9D999FBAAB}"/>
+              </a:ext>
+            </a:extLst>
+          </p:cNvPr>
+          <p:cNvSpPr>
+            <a:spLocks noGrp="1"/>
+          </p:cNvSpPr>
+          <p:nvPr>
+            <p:ph type="title"/>
+          </p:nvPr>
+        </p:nvSpPr>
+        <p:spPr/>
+        <p:txBody>
+          <a:bodyPr/>
+          <a:lstStyle/>
+          <a:p>
+            <a:r>
+              <a:rPr lang="en-US" dirty="0"/>
+              <a:t>struct : </a:t>
+            </a:r>
+            <a:r>
+              <a:rPr lang="en-US" i="1" dirty="0"/>
+              <a:t>definition</a:t>
+            </a:r>
+          </a:p>
+        </p:txBody>
+      </p:sp>
+      <p:pic>
+        <p:nvPicPr>
+          <p:cNvPr id="15" name="Content Placeholder 14">
+            <a:extLst>
+              <a:ext uri="{FF2B5EF4-FFF2-40B4-BE49-F238E27FC236}">
+                <a16:creationId xmlns:a16="http://schemas.microsoft.com/office/drawing/2014/main" id="{653C2E75-7EF2-B5E9-84CF-F998234FB6EE}"/>
+              </a:ext>
+            </a:extLst>
+          </p:cNvPr>
+          <p:cNvPicPr>
+            <a:picLocks noGrp="1" noChangeAspect="1"/>
+          </p:cNvPicPr>
+          <p:nvPr>
+            <p:ph idx="1"/>
+          </p:nvPr>
+        </p:nvPicPr>
+        <p:blipFill>
+          <a:blip r:embed="rId2"/>
+          <a:stretch>
+            <a:fillRect/>
+          </a:stretch>
+        </p:blipFill>
+        <p:spPr>
+          <a:xfrm>
+            <a:off x="924155" y="1725235"/>
+            <a:ext cx="4705592" cy="4324572"/>
+          </a:xfrm>
+        </p:spPr>
+      </p:pic>
+      <p:pic>
+        <p:nvPicPr>
+          <p:cNvPr id="17" name="Picture 16">
+            <a:extLst>
+              <a:ext uri="{FF2B5EF4-FFF2-40B4-BE49-F238E27FC236}">
+                <a16:creationId xmlns:a16="http://schemas.microsoft.com/office/drawing/2014/main" id="{360C2D90-A559-FA84-0540-1F7E3CDEAFB7}"/>
+              </a:ext>
+            </a:extLst>
+          </p:cNvPr>
+          <p:cNvPicPr>
+            <a:picLocks noChangeAspect="1"/>
+          </p:cNvPicPr>
+          <p:nvPr/>
+        </p:nvPicPr>
+        <p:blipFill>
+          <a:blip r:embed="rId3"/>
+          <a:stretch>
+            <a:fillRect/>
+          </a:stretch>
+        </p:blipFill>
+        <p:spPr>
+          <a:xfrm>
+            <a:off x="6420746" y="1725235"/>
+            <a:ext cx="2140060" cy="2209914"/>
+          </a:xfrm>
+          <a:prstGeom prst="rect">
+            <a:avLst/>
+          </a:prstGeom>
+        </p:spPr>
+      </p:pic>
+    </p:spTree>
+    <p:extLst>
+      <p:ext uri="{BB962C8B-B14F-4D97-AF65-F5344CB8AC3E}">
+        <p14:creationId xmlns:p14="http://schemas.microsoft.com/office/powerpoint/2010/main" val="3226751043"/>
+      </p:ext>
+    </p:extLst>
+  </p:cSld>
+  <p:clrMapOvr>
+    <a:masterClrMapping/>
+  </p:clrMapOvr>
+</p:sld>
+</file>
+
+<file path=ppt/slides/slide86.xml><?xml version="1.0" encoding="utf-8"?>
+<p:sld xmlns:a="http://schemas.openxmlformats.org/drawingml/2006/main" xmlns:r="http://schemas.openxmlformats.org/officeDocument/2006/relationships" xmlns:p="http://schemas.openxmlformats.org/presentationml/2006/main">
+  <p:cSld>
+    <p:spTree>
+      <p:nvGrpSpPr>
+        <p:cNvPr id="1" name=""/>
+        <p:cNvGrpSpPr/>
+        <p:nvPr/>
+      </p:nvGrpSpPr>
+      <p:grpSpPr>
+        <a:xfrm>
+          <a:off x="0" y="0"/>
+          <a:ext cx="0" cy="0"/>
+          <a:chOff x="0" y="0"/>
+          <a:chExt cx="0" cy="0"/>
+        </a:xfrm>
+      </p:grpSpPr>
+      <p:sp>
+        <p:nvSpPr>
+          <p:cNvPr id="2" name="Title 1">
+            <a:extLst>
+              <a:ext uri="{FF2B5EF4-FFF2-40B4-BE49-F238E27FC236}">
+                <a16:creationId xmlns:a16="http://schemas.microsoft.com/office/drawing/2014/main" id="{CB64DC34-6CEE-73F2-AB55-50590E027665}"/>
+              </a:ext>
+            </a:extLst>
+          </p:cNvPr>
+          <p:cNvSpPr>
+            <a:spLocks noGrp="1"/>
+          </p:cNvSpPr>
+          <p:nvPr>
+            <p:ph type="title"/>
+          </p:nvPr>
+        </p:nvSpPr>
+        <p:spPr/>
+        <p:txBody>
+          <a:bodyPr/>
+          <a:lstStyle/>
+          <a:p>
+            <a:r>
+              <a:rPr lang="en-US" dirty="0"/>
+              <a:t>struct : </a:t>
+            </a:r>
+            <a:r>
+              <a:rPr lang="en-US" i="1" dirty="0"/>
+              <a:t>variable declaration</a:t>
+            </a:r>
+          </a:p>
+        </p:txBody>
+      </p:sp>
+      <p:pic>
+        <p:nvPicPr>
+          <p:cNvPr id="5" name="Content Placeholder 4">
+            <a:extLst>
+              <a:ext uri="{FF2B5EF4-FFF2-40B4-BE49-F238E27FC236}">
+                <a16:creationId xmlns:a16="http://schemas.microsoft.com/office/drawing/2014/main" id="{EB13AB57-8C93-743C-8114-AA0430DF8BF4}"/>
+              </a:ext>
+            </a:extLst>
+          </p:cNvPr>
+          <p:cNvPicPr>
+            <a:picLocks noGrp="1" noChangeAspect="1"/>
+          </p:cNvPicPr>
+          <p:nvPr>
+            <p:ph idx="1"/>
+          </p:nvPr>
+        </p:nvPicPr>
+        <p:blipFill>
+          <a:blip r:embed="rId2"/>
+          <a:stretch>
+            <a:fillRect/>
+          </a:stretch>
+        </p:blipFill>
+        <p:spPr>
+          <a:xfrm>
+            <a:off x="979875" y="1812582"/>
+            <a:ext cx="3397425" cy="2101958"/>
+          </a:xfrm>
+        </p:spPr>
+      </p:pic>
+      <p:pic>
+        <p:nvPicPr>
+          <p:cNvPr id="7" name="Picture 6">
+            <a:extLst>
+              <a:ext uri="{FF2B5EF4-FFF2-40B4-BE49-F238E27FC236}">
+                <a16:creationId xmlns:a16="http://schemas.microsoft.com/office/drawing/2014/main" id="{BCB2377E-7E5E-92FC-20EB-55E4FDB864FB}"/>
+              </a:ext>
+            </a:extLst>
+          </p:cNvPr>
+          <p:cNvPicPr>
+            <a:picLocks noChangeAspect="1"/>
+          </p:cNvPicPr>
+          <p:nvPr/>
+        </p:nvPicPr>
+        <p:blipFill>
+          <a:blip r:embed="rId3"/>
+          <a:stretch>
+            <a:fillRect/>
+          </a:stretch>
+        </p:blipFill>
+        <p:spPr>
+          <a:xfrm>
+            <a:off x="6142903" y="1739635"/>
+            <a:ext cx="2476627" cy="3454578"/>
+          </a:xfrm>
+          <a:prstGeom prst="rect">
+            <a:avLst/>
+          </a:prstGeom>
+        </p:spPr>
+      </p:pic>
+    </p:spTree>
+    <p:extLst>
+      <p:ext uri="{BB962C8B-B14F-4D97-AF65-F5344CB8AC3E}">
+        <p14:creationId xmlns:p14="http://schemas.microsoft.com/office/powerpoint/2010/main" val="2323693458"/>
+      </p:ext>
+    </p:extLst>
+  </p:cSld>
+  <p:clrMapOvr>
+    <a:masterClrMapping/>
+  </p:clrMapOvr>
+</p:sld>
+</file>
+
+<file path=ppt/slides/slide87.xml><?xml version="1.0" encoding="utf-8"?>
+<p:sld xmlns:a="http://schemas.openxmlformats.org/drawingml/2006/main" xmlns:r="http://schemas.openxmlformats.org/officeDocument/2006/relationships" xmlns:p="http://schemas.openxmlformats.org/presentationml/2006/main">
+  <p:cSld>
+    <p:spTree>
+      <p:nvGrpSpPr>
+        <p:cNvPr id="1" name=""/>
+        <p:cNvGrpSpPr/>
+        <p:nvPr/>
+      </p:nvGrpSpPr>
+      <p:grpSpPr>
+        <a:xfrm>
+          <a:off x="0" y="0"/>
+          <a:ext cx="0" cy="0"/>
+          <a:chOff x="0" y="0"/>
+          <a:chExt cx="0" cy="0"/>
+        </a:xfrm>
+      </p:grpSpPr>
+      <p:sp>
+        <p:nvSpPr>
+          <p:cNvPr id="2" name="Title 1">
+            <a:extLst>
+              <a:ext uri="{FF2B5EF4-FFF2-40B4-BE49-F238E27FC236}">
+                <a16:creationId xmlns:a16="http://schemas.microsoft.com/office/drawing/2014/main" id="{BE1AF9A3-E77E-D218-A825-A5E30D7C3AC4}"/>
+              </a:ext>
+            </a:extLst>
+          </p:cNvPr>
+          <p:cNvSpPr>
+            <a:spLocks noGrp="1"/>
+          </p:cNvSpPr>
+          <p:nvPr>
+            <p:ph type="title"/>
+          </p:nvPr>
+        </p:nvSpPr>
+        <p:spPr/>
+        <p:txBody>
+          <a:bodyPr/>
+          <a:lstStyle/>
+          <a:p>
+            <a:r>
+              <a:rPr lang="en-US" dirty="0"/>
+              <a:t>Structure : </a:t>
+            </a:r>
+            <a:r>
+              <a:rPr lang="en-US" i="1" dirty="0"/>
+              <a:t>member access using . operator</a:t>
+            </a:r>
+          </a:p>
+        </p:txBody>
+      </p:sp>
+      <p:pic>
+        <p:nvPicPr>
+          <p:cNvPr id="5" name="Content Placeholder 4">
+            <a:extLst>
+              <a:ext uri="{FF2B5EF4-FFF2-40B4-BE49-F238E27FC236}">
+                <a16:creationId xmlns:a16="http://schemas.microsoft.com/office/drawing/2014/main" id="{5810114C-CFE7-E073-1DA5-EB6B286749C3}"/>
+              </a:ext>
+            </a:extLst>
+          </p:cNvPr>
+          <p:cNvPicPr>
+            <a:picLocks noGrp="1" noChangeAspect="1"/>
+          </p:cNvPicPr>
+          <p:nvPr>
+            <p:ph idx="1"/>
+          </p:nvPr>
+        </p:nvPicPr>
+        <p:blipFill>
+          <a:blip r:embed="rId2"/>
+          <a:stretch>
+            <a:fillRect/>
+          </a:stretch>
+        </p:blipFill>
+        <p:spPr>
+          <a:xfrm>
+            <a:off x="6137452" y="1766005"/>
+            <a:ext cx="3911801" cy="4007056"/>
+          </a:xfrm>
+        </p:spPr>
+      </p:pic>
+      <p:pic>
+        <p:nvPicPr>
+          <p:cNvPr id="7" name="Picture 6">
+            <a:extLst>
+              <a:ext uri="{FF2B5EF4-FFF2-40B4-BE49-F238E27FC236}">
+                <a16:creationId xmlns:a16="http://schemas.microsoft.com/office/drawing/2014/main" id="{7CA43CD4-7AF1-900A-A695-AB62A8AEE8F8}"/>
+              </a:ext>
+            </a:extLst>
+          </p:cNvPr>
+          <p:cNvPicPr>
+            <a:picLocks noChangeAspect="1"/>
+          </p:cNvPicPr>
+          <p:nvPr/>
+        </p:nvPicPr>
+        <p:blipFill>
+          <a:blip r:embed="rId3"/>
+          <a:stretch>
+            <a:fillRect/>
+          </a:stretch>
+        </p:blipFill>
+        <p:spPr>
+          <a:xfrm>
+            <a:off x="1822285" y="1854651"/>
+            <a:ext cx="3549832" cy="2921150"/>
+          </a:xfrm>
+          <a:prstGeom prst="rect">
+            <a:avLst/>
+          </a:prstGeom>
+        </p:spPr>
+      </p:pic>
+    </p:spTree>
+    <p:extLst>
+      <p:ext uri="{BB962C8B-B14F-4D97-AF65-F5344CB8AC3E}">
+        <p14:creationId xmlns:p14="http://schemas.microsoft.com/office/powerpoint/2010/main" val="1335278831"/>
+      </p:ext>
+    </p:extLst>
+  </p:cSld>
+  <p:clrMapOvr>
+    <a:masterClrMapping/>
+  </p:clrMapOvr>
+</p:sld>
+</file>
+
+<file path=ppt/slides/slide88.xml><?xml version="1.0" encoding="utf-8"?>
+<p:sld xmlns:a="http://schemas.openxmlformats.org/drawingml/2006/main" xmlns:r="http://schemas.openxmlformats.org/officeDocument/2006/relationships" xmlns:p="http://schemas.openxmlformats.org/presentationml/2006/main">
+  <p:cSld>
+    <p:spTree>
+      <p:nvGrpSpPr>
+        <p:cNvPr id="1" name=""/>
+        <p:cNvGrpSpPr/>
+        <p:nvPr/>
+      </p:nvGrpSpPr>
+      <p:grpSpPr>
+        <a:xfrm>
+          <a:off x="0" y="0"/>
+          <a:ext cx="0" cy="0"/>
+          <a:chOff x="0" y="0"/>
+          <a:chExt cx="0" cy="0"/>
+        </a:xfrm>
+      </p:grpSpPr>
+      <p:sp>
+        <p:nvSpPr>
+          <p:cNvPr id="2" name="Title 1">
+            <a:extLst>
+              <a:ext uri="{FF2B5EF4-FFF2-40B4-BE49-F238E27FC236}">
+                <a16:creationId xmlns:a16="http://schemas.microsoft.com/office/drawing/2014/main" id="{E8928B40-1167-8A95-9E96-A06BF7F56AEC}"/>
+              </a:ext>
+            </a:extLst>
+          </p:cNvPr>
+          <p:cNvSpPr>
+            <a:spLocks noGrp="1"/>
+          </p:cNvSpPr>
+          <p:nvPr>
+            <p:ph type="title"/>
+          </p:nvPr>
+        </p:nvSpPr>
+        <p:spPr/>
+        <p:txBody>
+          <a:bodyPr/>
+          <a:lstStyle/>
+          <a:p>
+            <a:r>
+              <a:rPr lang="en-US" dirty="0" err="1"/>
+              <a:t>Assingment</a:t>
+            </a:r>
+            <a:endParaRPr lang="en-US" dirty="0"/>
+          </a:p>
+        </p:txBody>
+      </p:sp>
+      <p:sp>
+        <p:nvSpPr>
+          <p:cNvPr id="3" name="Content Placeholder 2">
+            <a:extLst>
+              <a:ext uri="{FF2B5EF4-FFF2-40B4-BE49-F238E27FC236}">
+                <a16:creationId xmlns:a16="http://schemas.microsoft.com/office/drawing/2014/main" id="{07C91012-8209-29D9-7390-436500A36043}"/>
+              </a:ext>
+            </a:extLst>
+          </p:cNvPr>
+          <p:cNvSpPr>
+            <a:spLocks noGrp="1"/>
+          </p:cNvSpPr>
+          <p:nvPr>
+            <p:ph idx="1"/>
+          </p:nvPr>
+        </p:nvSpPr>
+        <p:spPr/>
+        <p:txBody>
+          <a:bodyPr/>
+          <a:lstStyle/>
+          <a:p>
+            <a:r>
+              <a:rPr lang="en-US" dirty="0"/>
+              <a:t>Create a function to take a struct of </a:t>
+            </a:r>
+            <a:r>
+              <a:rPr lang="en-US" dirty="0" err="1"/>
+              <a:t>PlayerInfo</a:t>
+            </a:r>
+            <a:r>
+              <a:rPr lang="en-US" dirty="0"/>
+              <a:t> and print it. </a:t>
+            </a:r>
+          </a:p>
+          <a:p>
+            <a:r>
+              <a:rPr lang="en-US" dirty="0"/>
+              <a:t>Create a function to </a:t>
+            </a:r>
+          </a:p>
+          <a:p>
+            <a:pPr lvl="1"/>
+            <a:r>
+              <a:rPr lang="en-US" dirty="0"/>
+              <a:t>take 2 Time variables as parameters</a:t>
+            </a:r>
+          </a:p>
+          <a:p>
+            <a:pPr lvl="1"/>
+            <a:r>
+              <a:rPr lang="en-US" dirty="0"/>
+              <a:t>Add them </a:t>
+            </a:r>
+          </a:p>
+          <a:p>
+            <a:pPr lvl="1"/>
+            <a:r>
+              <a:rPr lang="en-US" dirty="0"/>
+              <a:t>And return the new Time</a:t>
+            </a:r>
+          </a:p>
+          <a:p>
+            <a:pPr lvl="1"/>
+            <a:r>
+              <a:rPr lang="en-US" dirty="0"/>
+              <a:t>Hint</a:t>
+            </a:r>
+          </a:p>
+          <a:p>
+            <a:pPr lvl="2"/>
+            <a:r>
+              <a:rPr lang="en-US" dirty="0"/>
+              <a:t>Time </a:t>
+            </a:r>
+            <a:r>
+              <a:rPr lang="en-US" dirty="0" err="1"/>
+              <a:t>AddTime</a:t>
+            </a:r>
+            <a:r>
+              <a:rPr lang="en-US" dirty="0"/>
+              <a:t>(Time </a:t>
+            </a:r>
+            <a:r>
+              <a:rPr lang="en-US" dirty="0" err="1"/>
+              <a:t>timeA</a:t>
+            </a:r>
+            <a:r>
+              <a:rPr lang="en-US" dirty="0"/>
+              <a:t>, Time </a:t>
+            </a:r>
+            <a:r>
+              <a:rPr lang="en-US" dirty="0" err="1"/>
+              <a:t>time</a:t>
+            </a:r>
+            <a:r>
+              <a:rPr lang="en-US" dirty="0"/>
+              <a:t> B)</a:t>
+            </a:r>
+            <a:br>
+              <a:rPr lang="en-US" dirty="0"/>
+            </a:br>
+            <a:r>
+              <a:rPr lang="en-US" dirty="0"/>
+              <a:t>{</a:t>
+            </a:r>
+            <a:br>
+              <a:rPr lang="en-US" dirty="0"/>
+            </a:br>
+            <a:r>
+              <a:rPr lang="en-US" dirty="0"/>
+              <a:t>   //fill in here</a:t>
+            </a:r>
+          </a:p>
+          <a:p>
+            <a:pPr marL="914400" lvl="2" indent="0">
+              <a:buNone/>
+            </a:pPr>
+            <a:r>
+              <a:rPr lang="en-US" dirty="0"/>
+              <a:t>    }</a:t>
+            </a:r>
+          </a:p>
+        </p:txBody>
+      </p:sp>
+    </p:spTree>
+    <p:extLst>
+      <p:ext uri="{BB962C8B-B14F-4D97-AF65-F5344CB8AC3E}">
+        <p14:creationId xmlns:p14="http://schemas.microsoft.com/office/powerpoint/2010/main" val="3653216143"/>
+      </p:ext>
+    </p:extLst>
+  </p:cSld>
+  <p:clrMapOvr>
+    <a:masterClrMapping/>
+  </p:clrMapOvr>
+</p:sld>
+</file>
+
+<file path=ppt/slides/slide89.xml><?xml version="1.0" encoding="utf-8"?>
+<p:sld xmlns:a="http://schemas.openxmlformats.org/drawingml/2006/main" xmlns:r="http://schemas.openxmlformats.org/officeDocument/2006/relationships" xmlns:p="http://schemas.openxmlformats.org/presentationml/2006/main">
+  <p:cSld>
+    <p:spTree>
+      <p:nvGrpSpPr>
+        <p:cNvPr id="1" name=""/>
+        <p:cNvGrpSpPr/>
+        <p:nvPr/>
+      </p:nvGrpSpPr>
+      <p:grpSpPr>
+        <a:xfrm>
+          <a:off x="0" y="0"/>
+          <a:ext cx="0" cy="0"/>
+          <a:chOff x="0" y="0"/>
+          <a:chExt cx="0" cy="0"/>
+        </a:xfrm>
+      </p:grpSpPr>
+      <p:sp>
+        <p:nvSpPr>
+          <p:cNvPr id="2" name="Title 1">
+            <a:extLst>
+              <a:ext uri="{FF2B5EF4-FFF2-40B4-BE49-F238E27FC236}">
                 <a16:creationId xmlns:a16="http://schemas.microsoft.com/office/drawing/2014/main" id="{7F3F2022-DBA0-F8BB-70DA-B01A01136D53}"/>
               </a:ext>
             </a:extLst>
@@ -24443,7 +25272,7 @@
           <a:p>
             <a:fld id="{3EC9E123-0CB8-4CD3-A52F-DDEB9B17898B}" type="slidenum">
               <a:rPr lang="en-US" smtClean="0"/>
-              <a:t>83</a:t>
+              <a:t>89</a:t>
             </a:fld>
             <a:endParaRPr lang="en-US"/>
           </a:p>
